--- a/Lectures/01.Foundations/Lecture03.pptx
+++ b/Lectures/01.Foundations/Lecture03.pptx
@@ -5,10 +5,10 @@
     <p:sldMasterId id="2147483648" r:id="rId1"/>
   </p:sldMasterIdLst>
   <p:notesMasterIdLst>
-    <p:notesMasterId r:id="rId33"/>
+    <p:notesMasterId r:id="rId32"/>
   </p:notesMasterIdLst>
   <p:handoutMasterIdLst>
-    <p:handoutMasterId r:id="rId34"/>
+    <p:handoutMasterId r:id="rId33"/>
   </p:handoutMasterIdLst>
   <p:sldIdLst>
     <p:sldId id="256" r:id="rId2"/>
@@ -18,30 +18,29 @@
     <p:sldId id="279" r:id="rId6"/>
     <p:sldId id="280" r:id="rId7"/>
     <p:sldId id="1057" r:id="rId8"/>
-    <p:sldId id="1058" r:id="rId9"/>
-    <p:sldId id="1021" r:id="rId10"/>
-    <p:sldId id="1059" r:id="rId11"/>
-    <p:sldId id="1023" r:id="rId12"/>
-    <p:sldId id="1022" r:id="rId13"/>
-    <p:sldId id="1013" r:id="rId14"/>
-    <p:sldId id="1015" r:id="rId15"/>
-    <p:sldId id="1017" r:id="rId16"/>
-    <p:sldId id="1019" r:id="rId17"/>
-    <p:sldId id="1055" r:id="rId18"/>
-    <p:sldId id="1054" r:id="rId19"/>
-    <p:sldId id="1040" r:id="rId20"/>
-    <p:sldId id="1045" r:id="rId21"/>
-    <p:sldId id="1046" r:id="rId22"/>
-    <p:sldId id="1053" r:id="rId23"/>
-    <p:sldId id="1047" r:id="rId24"/>
-    <p:sldId id="1033" r:id="rId25"/>
-    <p:sldId id="1042" r:id="rId26"/>
-    <p:sldId id="1048" r:id="rId27"/>
-    <p:sldId id="1018" r:id="rId28"/>
-    <p:sldId id="1050" r:id="rId29"/>
-    <p:sldId id="1051" r:id="rId30"/>
-    <p:sldId id="1052" r:id="rId31"/>
-    <p:sldId id="1056" r:id="rId32"/>
+    <p:sldId id="1021" r:id="rId9"/>
+    <p:sldId id="1059" r:id="rId10"/>
+    <p:sldId id="1023" r:id="rId11"/>
+    <p:sldId id="1022" r:id="rId12"/>
+    <p:sldId id="1013" r:id="rId13"/>
+    <p:sldId id="1015" r:id="rId14"/>
+    <p:sldId id="1017" r:id="rId15"/>
+    <p:sldId id="1019" r:id="rId16"/>
+    <p:sldId id="1055" r:id="rId17"/>
+    <p:sldId id="1054" r:id="rId18"/>
+    <p:sldId id="1040" r:id="rId19"/>
+    <p:sldId id="1045" r:id="rId20"/>
+    <p:sldId id="1046" r:id="rId21"/>
+    <p:sldId id="1053" r:id="rId22"/>
+    <p:sldId id="1047" r:id="rId23"/>
+    <p:sldId id="1033" r:id="rId24"/>
+    <p:sldId id="1042" r:id="rId25"/>
+    <p:sldId id="1048" r:id="rId26"/>
+    <p:sldId id="1018" r:id="rId27"/>
+    <p:sldId id="1050" r:id="rId28"/>
+    <p:sldId id="1051" r:id="rId29"/>
+    <p:sldId id="1052" r:id="rId30"/>
+    <p:sldId id="1056" r:id="rId31"/>
   </p:sldIdLst>
   <p:sldSz cx="9144000" cy="6858000" type="letter"/>
   <p:notesSz cx="9601200" cy="7315200"/>
@@ -3170,72 +3169,6 @@
         <p:cNvPr id="1" name="">
           <a:extLst>
             <a:ext uri="{FF2B5EF4-FFF2-40B4-BE49-F238E27FC236}">
-              <a16:creationId xmlns:a16="http://schemas.microsoft.com/office/drawing/2014/main" id="{61ECB4C0-80C8-07F9-C349-10ACCC49952E}"/>
-            </a:ext>
-          </a:extLst>
-        </p:cNvPr>
-        <p:cNvGrpSpPr/>
-        <p:nvPr/>
-      </p:nvGrpSpPr>
-      <p:grpSpPr>
-        <a:xfrm>
-          <a:off x="0" y="0"/>
-          <a:ext cx="0" cy="0"/>
-          <a:chOff x="0" y="0"/>
-          <a:chExt cx="0" cy="0"/>
-        </a:xfrm>
-      </p:grpSpPr>
-      <p:pic>
-        <p:nvPicPr>
-          <p:cNvPr id="11" name="Picture 10">
-            <a:extLst>
-              <a:ext uri="{FF2B5EF4-FFF2-40B4-BE49-F238E27FC236}">
-                <a16:creationId xmlns:a16="http://schemas.microsoft.com/office/drawing/2014/main" id="{351E33F5-BBCF-6CD6-6E9E-6FD680B452EB}"/>
-              </a:ext>
-            </a:extLst>
-          </p:cNvPr>
-          <p:cNvPicPr>
-            <a:picLocks noChangeAspect="1"/>
-          </p:cNvPicPr>
-          <p:nvPr/>
-        </p:nvPicPr>
-        <p:blipFill>
-          <a:blip r:embed="rId2"/>
-          <a:stretch>
-            <a:fillRect/>
-          </a:stretch>
-        </p:blipFill>
-        <p:spPr>
-          <a:xfrm>
-            <a:off x="946150" y="457200"/>
-            <a:ext cx="7251700" cy="5791200"/>
-          </a:xfrm>
-          <a:prstGeom prst="rect">
-            <a:avLst/>
-          </a:prstGeom>
-        </p:spPr>
-      </p:pic>
-    </p:spTree>
-    <p:extLst>
-      <p:ext uri="{BB962C8B-B14F-4D97-AF65-F5344CB8AC3E}">
-        <p14:creationId xmlns:p14="http://schemas.microsoft.com/office/powerpoint/2010/main" val="782288326"/>
-      </p:ext>
-    </p:extLst>
-  </p:cSld>
-  <p:clrMapOvr>
-    <a:masterClrMapping/>
-  </p:clrMapOvr>
-</p:sld>
-</file>
-
-<file path=ppt/slides/slide11.xml><?xml version="1.0" encoding="utf-8"?>
-<p:sld xmlns:a="http://schemas.openxmlformats.org/drawingml/2006/main" xmlns:r="http://schemas.openxmlformats.org/officeDocument/2006/relationships" xmlns:p="http://schemas.openxmlformats.org/presentationml/2006/main">
-  <p:cSld>
-    <p:spTree>
-      <p:nvGrpSpPr>
-        <p:cNvPr id="1" name="">
-          <a:extLst>
-            <a:ext uri="{FF2B5EF4-FFF2-40B4-BE49-F238E27FC236}">
               <a16:creationId xmlns:a16="http://schemas.microsoft.com/office/drawing/2014/main" id="{4CA98269-3DD1-62B3-A440-2DC62FE9527E}"/>
             </a:ext>
           </a:extLst>
@@ -3294,7 +3227,7 @@
 </p:sld>
 </file>
 
-<file path=ppt/slides/slide12.xml><?xml version="1.0" encoding="utf-8"?>
+<file path=ppt/slides/slide11.xml><?xml version="1.0" encoding="utf-8"?>
 <p:sld xmlns:a="http://schemas.openxmlformats.org/drawingml/2006/main" xmlns:r="http://schemas.openxmlformats.org/officeDocument/2006/relationships" xmlns:p="http://schemas.openxmlformats.org/presentationml/2006/main">
   <p:cSld>
     <p:spTree>
@@ -3355,7 +3288,7 @@
 </p:sld>
 </file>
 
-<file path=ppt/slides/slide13.xml><?xml version="1.0" encoding="utf-8"?>
+<file path=ppt/slides/slide12.xml><?xml version="1.0" encoding="utf-8"?>
 <p:sld xmlns:a="http://schemas.openxmlformats.org/drawingml/2006/main" xmlns:r="http://schemas.openxmlformats.org/officeDocument/2006/relationships" xmlns:p="http://schemas.openxmlformats.org/presentationml/2006/main">
   <p:cSld>
     <p:spTree>
@@ -3378,8 +3311,8 @@
           <a:chExt cx="0" cy="0"/>
         </a:xfrm>
       </p:grpSpPr>
-      <mc:AlternateContent xmlns:mc="http://schemas.openxmlformats.org/markup-compatibility/2006">
-        <mc:Choice xmlns:a14="http://schemas.microsoft.com/office/drawing/2010/main" Requires="a14">
+      <mc:AlternateContent xmlns:mc="http://schemas.openxmlformats.org/markup-compatibility/2006" xmlns:a14="http://schemas.microsoft.com/office/drawing/2010/main">
+        <mc:Choice Requires="a14">
           <p:sp>
             <p:nvSpPr>
               <p:cNvPr id="4" name="Content Placeholder 3">
@@ -4085,7 +4018,7 @@
             </p:txBody>
           </p:sp>
         </mc:Choice>
-        <mc:Fallback>
+        <mc:Fallback xmlns="">
           <p:sp>
             <p:nvSpPr>
               <p:cNvPr id="4" name="Content Placeholder 3">
@@ -4166,7 +4099,7 @@
 </p:sld>
 </file>
 
-<file path=ppt/slides/slide14.xml><?xml version="1.0" encoding="utf-8"?>
+<file path=ppt/slides/slide13.xml><?xml version="1.0" encoding="utf-8"?>
 <p:sld xmlns:a="http://schemas.openxmlformats.org/drawingml/2006/main" xmlns:r="http://schemas.openxmlformats.org/officeDocument/2006/relationships" xmlns:p="http://schemas.openxmlformats.org/presentationml/2006/main">
   <p:cSld>
     <p:spTree>
@@ -5107,7 +5040,7 @@
 </p:sld>
 </file>
 
-<file path=ppt/slides/slide15.xml><?xml version="1.0" encoding="utf-8"?>
+<file path=ppt/slides/slide14.xml><?xml version="1.0" encoding="utf-8"?>
 <p:sld xmlns:a="http://schemas.openxmlformats.org/drawingml/2006/main" xmlns:r="http://schemas.openxmlformats.org/officeDocument/2006/relationships" xmlns:p="http://schemas.openxmlformats.org/presentationml/2006/main">
   <p:cSld>
     <p:spTree>
@@ -5130,8 +5063,8 @@
           <a:chExt cx="0" cy="0"/>
         </a:xfrm>
       </p:grpSpPr>
-      <mc:AlternateContent xmlns:mc="http://schemas.openxmlformats.org/markup-compatibility/2006">
-        <mc:Choice xmlns:a14="http://schemas.microsoft.com/office/drawing/2010/main" Requires="a14">
+      <mc:AlternateContent xmlns:mc="http://schemas.openxmlformats.org/markup-compatibility/2006" xmlns:a14="http://schemas.microsoft.com/office/drawing/2010/main">
+        <mc:Choice Requires="a14">
           <p:sp>
             <p:nvSpPr>
               <p:cNvPr id="4" name="Content Placeholder 3">
@@ -5552,7 +5485,7 @@
             </p:txBody>
           </p:sp>
         </mc:Choice>
-        <mc:Fallback>
+        <mc:Fallback xmlns="">
           <p:sp>
             <p:nvSpPr>
               <p:cNvPr id="4" name="Content Placeholder 3">
@@ -5720,7 +5653,7 @@
 </p:sld>
 </file>
 
-<file path=ppt/slides/slide16.xml><?xml version="1.0" encoding="utf-8"?>
+<file path=ppt/slides/slide15.xml><?xml version="1.0" encoding="utf-8"?>
 <p:sld xmlns:a="http://schemas.openxmlformats.org/drawingml/2006/main" xmlns:r="http://schemas.openxmlformats.org/officeDocument/2006/relationships" xmlns:p="http://schemas.openxmlformats.org/presentationml/2006/main">
   <p:cSld>
     <p:spTree>
@@ -5743,8 +5676,8 @@
           <a:chExt cx="0" cy="0"/>
         </a:xfrm>
       </p:grpSpPr>
-      <mc:AlternateContent xmlns:mc="http://schemas.openxmlformats.org/markup-compatibility/2006">
-        <mc:Choice xmlns:a14="http://schemas.microsoft.com/office/drawing/2010/main" Requires="a14">
+      <mc:AlternateContent xmlns:mc="http://schemas.openxmlformats.org/markup-compatibility/2006" xmlns:a14="http://schemas.microsoft.com/office/drawing/2010/main">
+        <mc:Choice Requires="a14">
           <p:sp>
             <p:nvSpPr>
               <p:cNvPr id="4" name="Content Placeholder 3">
@@ -5921,7 +5854,7 @@
             </p:txBody>
           </p:sp>
         </mc:Choice>
-        <mc:Fallback>
+        <mc:Fallback xmlns="">
           <p:sp>
             <p:nvSpPr>
               <p:cNvPr id="4" name="Content Placeholder 3">
@@ -6007,7 +5940,7 @@
 </p:sld>
 </file>
 
-<file path=ppt/slides/slide17.xml><?xml version="1.0" encoding="utf-8"?>
+<file path=ppt/slides/slide16.xml><?xml version="1.0" encoding="utf-8"?>
 <p:sld xmlns:a="http://schemas.openxmlformats.org/drawingml/2006/main" xmlns:r="http://schemas.openxmlformats.org/officeDocument/2006/relationships" xmlns:p="http://schemas.openxmlformats.org/presentationml/2006/main">
   <p:cSld>
     <p:spTree>
@@ -6030,8 +5963,8 @@
           <a:chExt cx="0" cy="0"/>
         </a:xfrm>
       </p:grpSpPr>
-      <mc:AlternateContent xmlns:mc="http://schemas.openxmlformats.org/markup-compatibility/2006">
-        <mc:Choice xmlns:a14="http://schemas.microsoft.com/office/drawing/2010/main" Requires="a14">
+      <mc:AlternateContent xmlns:mc="http://schemas.openxmlformats.org/markup-compatibility/2006" xmlns:a14="http://schemas.microsoft.com/office/drawing/2010/main">
+        <mc:Choice Requires="a14">
           <p:sp>
             <p:nvSpPr>
               <p:cNvPr id="4" name="Content Placeholder 3">
@@ -6779,7 +6712,7 @@
             </p:txBody>
           </p:sp>
         </mc:Choice>
-        <mc:Fallback>
+        <mc:Fallback xmlns="">
           <p:sp>
             <p:nvSpPr>
               <p:cNvPr id="4" name="Content Placeholder 3">
@@ -7017,7 +6950,7 @@
 </p:sld>
 </file>
 
-<file path=ppt/slides/slide18.xml><?xml version="1.0" encoding="utf-8"?>
+<file path=ppt/slides/slide17.xml><?xml version="1.0" encoding="utf-8"?>
 <p:sld xmlns:a="http://schemas.openxmlformats.org/drawingml/2006/main" xmlns:r="http://schemas.openxmlformats.org/officeDocument/2006/relationships" xmlns:p="http://schemas.openxmlformats.org/presentationml/2006/main">
   <p:cSld>
     <p:spTree>
@@ -7084,7 +7017,7 @@
 </p:sld>
 </file>
 
-<file path=ppt/slides/slide19.xml><?xml version="1.0" encoding="utf-8"?>
+<file path=ppt/slides/slide18.xml><?xml version="1.0" encoding="utf-8"?>
 <p:sld xmlns:a="http://schemas.openxmlformats.org/drawingml/2006/main" xmlns:r="http://schemas.openxmlformats.org/officeDocument/2006/relationships" xmlns:p="http://schemas.openxmlformats.org/presentationml/2006/main">
   <p:cSld>
     <p:spTree>
@@ -8545,6 +8478,1092 @@
 </p:sld>
 </file>
 
+<file path=ppt/slides/slide19.xml><?xml version="1.0" encoding="utf-8"?>
+<p:sld xmlns:a="http://schemas.openxmlformats.org/drawingml/2006/main" xmlns:r="http://schemas.openxmlformats.org/officeDocument/2006/relationships" xmlns:p="http://schemas.openxmlformats.org/presentationml/2006/main">
+  <p:cSld>
+    <p:spTree>
+      <p:nvGrpSpPr>
+        <p:cNvPr id="1" name="">
+          <a:extLst>
+            <a:ext uri="{FF2B5EF4-FFF2-40B4-BE49-F238E27FC236}">
+              <a16:creationId xmlns:a16="http://schemas.microsoft.com/office/drawing/2014/main" id="{E570CCC6-1254-A8A6-1666-29EA2E74EB42}"/>
+            </a:ext>
+          </a:extLst>
+        </p:cNvPr>
+        <p:cNvGrpSpPr/>
+        <p:nvPr/>
+      </p:nvGrpSpPr>
+      <p:grpSpPr>
+        <a:xfrm>
+          <a:off x="0" y="0"/>
+          <a:ext cx="0" cy="0"/>
+          <a:chOff x="0" y="0"/>
+          <a:chExt cx="0" cy="0"/>
+        </a:xfrm>
+      </p:grpSpPr>
+      <p:sp>
+        <p:nvSpPr>
+          <p:cNvPr id="7" name="Title 6">
+            <a:extLst>
+              <a:ext uri="{FF2B5EF4-FFF2-40B4-BE49-F238E27FC236}">
+                <a16:creationId xmlns:a16="http://schemas.microsoft.com/office/drawing/2014/main" id="{E5B4D7EC-0A9E-88B8-3786-D04B92BF01D5}"/>
+              </a:ext>
+            </a:extLst>
+          </p:cNvPr>
+          <p:cNvSpPr>
+            <a:spLocks noGrp="1"/>
+          </p:cNvSpPr>
+          <p:nvPr>
+            <p:ph type="title"/>
+          </p:nvPr>
+        </p:nvSpPr>
+        <p:spPr/>
+        <p:txBody>
+          <a:bodyPr/>
+          <a:lstStyle/>
+          <a:p>
+            <a:r>
+              <a:rPr lang="en-US" dirty="0"/>
+              <a:t>Classifier Performance (2)</a:t>
+            </a:r>
+            <a:endParaRPr lang="en-US" dirty="0">
+              <a:solidFill>
+                <a:schemeClr val="accent1"/>
+              </a:solidFill>
+            </a:endParaRPr>
+          </a:p>
+        </p:txBody>
+      </p:sp>
+      <mc:AlternateContent xmlns:mc="http://schemas.openxmlformats.org/markup-compatibility/2006" xmlns:a14="http://schemas.microsoft.com/office/drawing/2010/main">
+        <mc:Choice Requires="a14">
+          <p:sp>
+            <p:nvSpPr>
+              <p:cNvPr id="8" name="Content Placeholder 7">
+                <a:extLst>
+                  <a:ext uri="{FF2B5EF4-FFF2-40B4-BE49-F238E27FC236}">
+                    <a16:creationId xmlns:a16="http://schemas.microsoft.com/office/drawing/2014/main" id="{8A099783-2799-6C19-C31C-FAF24757F700}"/>
+                  </a:ext>
+                </a:extLst>
+              </p:cNvPr>
+              <p:cNvSpPr>
+                <a:spLocks noGrp="1"/>
+              </p:cNvSpPr>
+              <p:nvPr>
+                <p:ph idx="1"/>
+              </p:nvPr>
+            </p:nvSpPr>
+            <p:spPr>
+              <a:xfrm>
+                <a:off x="711200" y="1295400"/>
+                <a:ext cx="8432800" cy="4819650"/>
+              </a:xfrm>
+            </p:spPr>
+            <p:txBody>
+              <a:bodyPr/>
+              <a:lstStyle/>
+              <a:p>
+                <a:pPr marL="0" indent="0">
+                  <a:buNone/>
+                </a:pPr>
+                <a:r>
+                  <a:rPr lang="en-US" dirty="0"/>
+                  <a:t>FN:	</a:t>
+                </a:r>
+                <a14:m>
+                  <m:oMath xmlns:m="http://schemas.openxmlformats.org/officeDocument/2006/math">
+                    <m:nary>
+                      <m:naryPr>
+                        <m:chr m:val="∑"/>
+                        <m:supHide m:val="on"/>
+                        <m:ctrlPr>
+                          <a:rPr lang="en-US" b="0" i="1" smtClean="0">
+                            <a:latin typeface="Cambria Math" panose="02040503050406030204" pitchFamily="18" charset="0"/>
+                          </a:rPr>
+                        </m:ctrlPr>
+                      </m:naryPr>
+                      <m:sub>
+                        <m:r>
+                          <a:rPr lang="en-US" b="0" i="1" smtClean="0">
+                            <a:latin typeface="Cambria Math" panose="02040503050406030204" pitchFamily="18" charset="0"/>
+                          </a:rPr>
+                          <m:t>𝑖</m:t>
+                        </m:r>
+                        <m:r>
+                          <a:rPr lang="en-US" b="0" i="1" smtClean="0">
+                            <a:latin typeface="Cambria Math" panose="02040503050406030204" pitchFamily="18" charset="0"/>
+                          </a:rPr>
+                          <m:t>,   </m:t>
+                        </m:r>
+                        <m:sSub>
+                          <m:sSubPr>
+                            <m:ctrlPr>
+                              <a:rPr lang="en-US" b="1" i="1">
+                                <a:solidFill>
+                                  <a:srgbClr val="0033CC"/>
+                                </a:solidFill>
+                                <a:latin typeface="Cambria Math" panose="02040503050406030204" pitchFamily="18" charset="0"/>
+                              </a:rPr>
+                            </m:ctrlPr>
+                          </m:sSubPr>
+                          <m:e>
+                            <m:r>
+                              <m:rPr>
+                                <m:brk m:alnAt="7"/>
+                              </m:rPr>
+                              <a:rPr lang="en-US" b="1" i="1">
+                                <a:solidFill>
+                                  <a:srgbClr val="0033CC"/>
+                                </a:solidFill>
+                                <a:latin typeface="Cambria Math" panose="02040503050406030204" pitchFamily="18" charset="0"/>
+                              </a:rPr>
+                              <m:t>𝒚</m:t>
+                            </m:r>
+                          </m:e>
+                          <m:sub>
+                            <m:r>
+                              <m:rPr>
+                                <m:brk m:alnAt="7"/>
+                              </m:rPr>
+                              <a:rPr lang="en-US" b="1" i="1">
+                                <a:solidFill>
+                                  <a:srgbClr val="0033CC"/>
+                                </a:solidFill>
+                                <a:latin typeface="Cambria Math" panose="02040503050406030204" pitchFamily="18" charset="0"/>
+                              </a:rPr>
+                              <m:t>𝒊</m:t>
+                            </m:r>
+                          </m:sub>
+                        </m:sSub>
+                        <m:r>
+                          <m:rPr>
+                            <m:brk m:alnAt="7"/>
+                          </m:rPr>
+                          <a:rPr lang="en-US" b="1" i="1">
+                            <a:solidFill>
+                              <a:srgbClr val="0033CC"/>
+                            </a:solidFill>
+                            <a:latin typeface="Cambria Math" panose="02040503050406030204" pitchFamily="18" charset="0"/>
+                          </a:rPr>
+                          <m:t>=</m:t>
+                        </m:r>
+                        <m:r>
+                          <a:rPr lang="en-US" b="1" i="1">
+                            <a:solidFill>
+                              <a:srgbClr val="0033CC"/>
+                            </a:solidFill>
+                            <a:latin typeface="Cambria Math" panose="02040503050406030204" pitchFamily="18" charset="0"/>
+                          </a:rPr>
+                          <m:t>𝟏</m:t>
+                        </m:r>
+                      </m:sub>
+                      <m:sup/>
+                      <m:e>
+                        <m:r>
+                          <a:rPr lang="en-US" i="1">
+                            <a:latin typeface="Cambria Math" panose="02040503050406030204" pitchFamily="18" charset="0"/>
+                          </a:rPr>
+                          <m:t>𝐼</m:t>
+                        </m:r>
+                        <m:r>
+                          <a:rPr lang="en-US" i="1">
+                            <a:latin typeface="Cambria Math" panose="02040503050406030204" pitchFamily="18" charset="0"/>
+                          </a:rPr>
+                          <m:t>[</m:t>
+                        </m:r>
+                        <m:r>
+                          <a:rPr lang="en-US" i="1">
+                            <a:latin typeface="Cambria Math" panose="02040503050406030204" pitchFamily="18" charset="0"/>
+                          </a:rPr>
+                          <m:t>𝐷</m:t>
+                        </m:r>
+                        <m:d>
+                          <m:dPr>
+                            <m:ctrlPr>
+                              <a:rPr lang="en-US" i="1">
+                                <a:latin typeface="Cambria Math" panose="02040503050406030204" pitchFamily="18" charset="0"/>
+                              </a:rPr>
+                            </m:ctrlPr>
+                          </m:dPr>
+                          <m:e>
+                            <m:sSub>
+                              <m:sSubPr>
+                                <m:ctrlPr>
+                                  <a:rPr lang="en-US" i="1">
+                                    <a:latin typeface="Cambria Math" panose="02040503050406030204" pitchFamily="18" charset="0"/>
+                                  </a:rPr>
+                                </m:ctrlPr>
+                              </m:sSubPr>
+                              <m:e>
+                                <m:r>
+                                  <a:rPr lang="en-US" i="1">
+                                    <a:latin typeface="Cambria Math" panose="02040503050406030204" pitchFamily="18" charset="0"/>
+                                  </a:rPr>
+                                  <m:t>𝑥</m:t>
+                                </m:r>
+                              </m:e>
+                              <m:sub>
+                                <m:r>
+                                  <a:rPr lang="en-US" i="1">
+                                    <a:latin typeface="Cambria Math" panose="02040503050406030204" pitchFamily="18" charset="0"/>
+                                  </a:rPr>
+                                  <m:t>𝑖</m:t>
+                                </m:r>
+                              </m:sub>
+                            </m:sSub>
+                          </m:e>
+                        </m:d>
+                        <m:r>
+                          <a:rPr lang="en-US" i="1">
+                            <a:latin typeface="Cambria Math" panose="02040503050406030204" pitchFamily="18" charset="0"/>
+                            <a:ea typeface="Cambria Math" panose="02040503050406030204" pitchFamily="18" charset="0"/>
+                          </a:rPr>
+                          <m:t>≤</m:t>
+                        </m:r>
+                        <m:r>
+                          <a:rPr lang="en-US" i="1">
+                            <a:latin typeface="Cambria Math" panose="02040503050406030204" pitchFamily="18" charset="0"/>
+                          </a:rPr>
+                          <m:t>𝑡</m:t>
+                        </m:r>
+                      </m:e>
+                    </m:nary>
+                    <m:r>
+                      <a:rPr lang="en-US" i="1">
+                        <a:latin typeface="Cambria Math" panose="02040503050406030204" pitchFamily="18" charset="0"/>
+                      </a:rPr>
+                      <m:t>]</m:t>
+                    </m:r>
+                  </m:oMath>
+                </a14:m>
+                <a:r>
+                  <a:rPr lang="en-US" dirty="0"/>
+                  <a:t>	</a:t>
+                </a:r>
+                <a14:m>
+                  <m:oMath xmlns:m="http://schemas.openxmlformats.org/officeDocument/2006/math">
+                    <m:r>
+                      <a:rPr lang="en-US" b="0" i="1" smtClean="0">
+                        <a:latin typeface="Cambria Math" panose="02040503050406030204" pitchFamily="18" charset="0"/>
+                      </a:rPr>
+                      <m:t>𝑡</m:t>
+                    </m:r>
+                    <m:r>
+                      <a:rPr lang="en-US" b="0" i="1" smtClean="0">
+                        <a:latin typeface="Cambria Math" panose="02040503050406030204" pitchFamily="18" charset="0"/>
+                      </a:rPr>
+                      <m:t>=0.5</m:t>
+                    </m:r>
+                  </m:oMath>
+                </a14:m>
+                <a:endParaRPr lang="en-US" dirty="0"/>
+              </a:p>
+              <a:p>
+                <a:pPr marL="0" indent="0">
+                  <a:buNone/>
+                </a:pPr>
+                <a:r>
+                  <a:rPr lang="en-US" dirty="0"/>
+                  <a:t>TP:	</a:t>
+                </a:r>
+                <a14:m>
+                  <m:oMath xmlns:m="http://schemas.openxmlformats.org/officeDocument/2006/math">
+                    <m:nary>
+                      <m:naryPr>
+                        <m:chr m:val="∑"/>
+                        <m:supHide m:val="on"/>
+                        <m:ctrlPr>
+                          <a:rPr lang="en-US" b="1" i="1" smtClean="0">
+                            <a:solidFill>
+                              <a:srgbClr val="0033CC"/>
+                            </a:solidFill>
+                            <a:latin typeface="Cambria Math" panose="02040503050406030204" pitchFamily="18" charset="0"/>
+                          </a:rPr>
+                        </m:ctrlPr>
+                      </m:naryPr>
+                      <m:sub>
+                        <m:sSub>
+                          <m:sSubPr>
+                            <m:ctrlPr>
+                              <a:rPr lang="en-US" b="1" i="1" smtClean="0">
+                                <a:solidFill>
+                                  <a:srgbClr val="0033CC"/>
+                                </a:solidFill>
+                                <a:latin typeface="Cambria Math" panose="02040503050406030204" pitchFamily="18" charset="0"/>
+                              </a:rPr>
+                            </m:ctrlPr>
+                          </m:sSubPr>
+                          <m:e>
+                            <m:r>
+                              <a:rPr lang="en-US" b="1" i="1" smtClean="0">
+                                <a:solidFill>
+                                  <a:srgbClr val="0033CC"/>
+                                </a:solidFill>
+                                <a:latin typeface="Cambria Math" panose="02040503050406030204" pitchFamily="18" charset="0"/>
+                              </a:rPr>
+                              <m:t>𝒊</m:t>
+                            </m:r>
+                            <m:r>
+                              <a:rPr lang="en-US" b="1" i="1" smtClean="0">
+                                <a:solidFill>
+                                  <a:srgbClr val="0033CC"/>
+                                </a:solidFill>
+                                <a:latin typeface="Cambria Math" panose="02040503050406030204" pitchFamily="18" charset="0"/>
+                              </a:rPr>
+                              <m:t>,   </m:t>
+                            </m:r>
+                            <m:r>
+                              <m:rPr>
+                                <m:brk m:alnAt="7"/>
+                              </m:rPr>
+                              <a:rPr lang="en-US" b="1" i="1" smtClean="0">
+                                <a:solidFill>
+                                  <a:srgbClr val="0033CC"/>
+                                </a:solidFill>
+                                <a:latin typeface="Cambria Math" panose="02040503050406030204" pitchFamily="18" charset="0"/>
+                              </a:rPr>
+                              <m:t>𝒚</m:t>
+                            </m:r>
+                          </m:e>
+                          <m:sub>
+                            <m:r>
+                              <m:rPr>
+                                <m:brk m:alnAt="7"/>
+                              </m:rPr>
+                              <a:rPr lang="en-US" b="1" i="1" smtClean="0">
+                                <a:solidFill>
+                                  <a:srgbClr val="0033CC"/>
+                                </a:solidFill>
+                                <a:latin typeface="Cambria Math" panose="02040503050406030204" pitchFamily="18" charset="0"/>
+                              </a:rPr>
+                              <m:t>𝒊</m:t>
+                            </m:r>
+                          </m:sub>
+                        </m:sSub>
+                        <m:r>
+                          <m:rPr>
+                            <m:brk m:alnAt="7"/>
+                          </m:rPr>
+                          <a:rPr lang="en-US" b="1" i="1" smtClean="0">
+                            <a:solidFill>
+                              <a:srgbClr val="0033CC"/>
+                            </a:solidFill>
+                            <a:latin typeface="Cambria Math" panose="02040503050406030204" pitchFamily="18" charset="0"/>
+                          </a:rPr>
+                          <m:t>=</m:t>
+                        </m:r>
+                        <m:r>
+                          <a:rPr lang="en-US" b="1" i="1" smtClean="0">
+                            <a:solidFill>
+                              <a:srgbClr val="0033CC"/>
+                            </a:solidFill>
+                            <a:latin typeface="Cambria Math" panose="02040503050406030204" pitchFamily="18" charset="0"/>
+                          </a:rPr>
+                          <m:t>𝟏</m:t>
+                        </m:r>
+                      </m:sub>
+                      <m:sup/>
+                      <m:e>
+                        <m:r>
+                          <a:rPr lang="en-US" i="1">
+                            <a:latin typeface="Cambria Math" panose="02040503050406030204" pitchFamily="18" charset="0"/>
+                          </a:rPr>
+                          <m:t>𝐼</m:t>
+                        </m:r>
+                        <m:r>
+                          <a:rPr lang="en-US" i="1">
+                            <a:latin typeface="Cambria Math" panose="02040503050406030204" pitchFamily="18" charset="0"/>
+                          </a:rPr>
+                          <m:t>[</m:t>
+                        </m:r>
+                        <m:r>
+                          <a:rPr lang="en-US" i="1">
+                            <a:latin typeface="Cambria Math" panose="02040503050406030204" pitchFamily="18" charset="0"/>
+                          </a:rPr>
+                          <m:t>𝐷</m:t>
+                        </m:r>
+                        <m:d>
+                          <m:dPr>
+                            <m:ctrlPr>
+                              <a:rPr lang="en-US" i="1">
+                                <a:latin typeface="Cambria Math" panose="02040503050406030204" pitchFamily="18" charset="0"/>
+                              </a:rPr>
+                            </m:ctrlPr>
+                          </m:dPr>
+                          <m:e>
+                            <m:sSub>
+                              <m:sSubPr>
+                                <m:ctrlPr>
+                                  <a:rPr lang="en-US" i="1">
+                                    <a:latin typeface="Cambria Math" panose="02040503050406030204" pitchFamily="18" charset="0"/>
+                                  </a:rPr>
+                                </m:ctrlPr>
+                              </m:sSubPr>
+                              <m:e>
+                                <m:r>
+                                  <a:rPr lang="en-US" i="1">
+                                    <a:latin typeface="Cambria Math" panose="02040503050406030204" pitchFamily="18" charset="0"/>
+                                  </a:rPr>
+                                  <m:t>𝑥</m:t>
+                                </m:r>
+                              </m:e>
+                              <m:sub>
+                                <m:r>
+                                  <a:rPr lang="en-US" i="1">
+                                    <a:latin typeface="Cambria Math" panose="02040503050406030204" pitchFamily="18" charset="0"/>
+                                  </a:rPr>
+                                  <m:t>𝑖</m:t>
+                                </m:r>
+                              </m:sub>
+                            </m:sSub>
+                          </m:e>
+                        </m:d>
+                        <m:r>
+                          <a:rPr lang="en-US" i="1">
+                            <a:latin typeface="Cambria Math" panose="02040503050406030204" pitchFamily="18" charset="0"/>
+                          </a:rPr>
+                          <m:t>&gt;</m:t>
+                        </m:r>
+                        <m:r>
+                          <a:rPr lang="en-US" i="1">
+                            <a:latin typeface="Cambria Math" panose="02040503050406030204" pitchFamily="18" charset="0"/>
+                          </a:rPr>
+                          <m:t>𝑡</m:t>
+                        </m:r>
+                      </m:e>
+                    </m:nary>
+                    <m:r>
+                      <a:rPr lang="en-US" b="0" i="1" smtClean="0">
+                        <a:latin typeface="Cambria Math" panose="02040503050406030204" pitchFamily="18" charset="0"/>
+                      </a:rPr>
+                      <m:t>]</m:t>
+                    </m:r>
+                  </m:oMath>
+                </a14:m>
+                <a:r>
+                  <a:rPr lang="en-US" dirty="0"/>
+                  <a:t>			 </a:t>
+                </a:r>
+                <a14:m>
+                  <m:oMath xmlns:m="http://schemas.openxmlformats.org/officeDocument/2006/math">
+                    <m:r>
+                      <a:rPr lang="en-US" b="1" i="1" smtClean="0">
+                        <a:solidFill>
+                          <a:srgbClr val="C00000"/>
+                        </a:solidFill>
+                        <a:latin typeface="Cambria Math" panose="02040503050406030204" pitchFamily="18" charset="0"/>
+                      </a:rPr>
+                      <m:t>𝒚</m:t>
+                    </m:r>
+                    <m:r>
+                      <a:rPr lang="en-US" b="1" i="1">
+                        <a:solidFill>
+                          <a:srgbClr val="C00000"/>
+                        </a:solidFill>
+                        <a:latin typeface="Cambria Math" panose="02040503050406030204" pitchFamily="18" charset="0"/>
+                      </a:rPr>
+                      <m:t>=</m:t>
+                    </m:r>
+                    <m:r>
+                      <a:rPr lang="en-US" b="1" i="1" smtClean="0">
+                        <a:solidFill>
+                          <a:srgbClr val="C00000"/>
+                        </a:solidFill>
+                        <a:latin typeface="Cambria Math" panose="02040503050406030204" pitchFamily="18" charset="0"/>
+                      </a:rPr>
+                      <m:t>𝟎</m:t>
+                    </m:r>
+                  </m:oMath>
+                </a14:m>
+                <a:endParaRPr lang="en-US" b="1" dirty="0"/>
+              </a:p>
+              <a:p>
+                <a:pPr marL="0" indent="0">
+                  <a:buNone/>
+                </a:pPr>
+                <a:endParaRPr lang="en-US" dirty="0"/>
+              </a:p>
+              <a:p>
+                <a:pPr marL="0" indent="0">
+                  <a:buNone/>
+                </a:pPr>
+                <a:endParaRPr lang="en-US" dirty="0"/>
+              </a:p>
+              <a:p>
+                <a:pPr marL="457200" indent="-457200">
+                  <a:buFont typeface="+mj-lt"/>
+                  <a:buAutoNum type="arabicPeriod"/>
+                </a:pPr>
+                <a:endParaRPr lang="en-US" b="0" dirty="0"/>
+              </a:p>
+              <a:p>
+                <a:pPr marL="457200" indent="-457200">
+                  <a:buFont typeface="+mj-lt"/>
+                  <a:buAutoNum type="arabicPeriod"/>
+                </a:pPr>
+                <a:endParaRPr lang="en-US" dirty="0"/>
+              </a:p>
+              <a:p>
+                <a:pPr marL="457200" indent="-457200">
+                  <a:buFont typeface="+mj-lt"/>
+                  <a:buAutoNum type="arabicPeriod"/>
+                </a:pPr>
+                <a:endParaRPr lang="en-US" b="0" dirty="0"/>
+              </a:p>
+              <a:p>
+                <a:pPr marL="0" indent="0">
+                  <a:buNone/>
+                </a:pPr>
+                <a:endParaRPr lang="en-US" dirty="0"/>
+              </a:p>
+              <a:p>
+                <a:pPr marL="0" indent="0">
+                  <a:buNone/>
+                </a:pPr>
+                <a:br>
+                  <a:rPr lang="en-US" b="0" dirty="0"/>
+                </a:br>
+                <a:r>
+                  <a:rPr lang="en-US" b="0" dirty="0"/>
+                  <a:t>	</a:t>
+                </a:r>
+                <a14:m>
+                  <m:oMath xmlns:m="http://schemas.openxmlformats.org/officeDocument/2006/math">
+                    <m:r>
+                      <a:rPr lang="en-US" b="1" i="1" smtClean="0">
+                        <a:solidFill>
+                          <a:srgbClr val="0033CC"/>
+                        </a:solidFill>
+                        <a:latin typeface="Cambria Math" panose="02040503050406030204" pitchFamily="18" charset="0"/>
+                      </a:rPr>
+                      <m:t>𝒚</m:t>
+                    </m:r>
+                    <m:r>
+                      <a:rPr lang="en-US" b="1" i="1" smtClean="0">
+                        <a:solidFill>
+                          <a:srgbClr val="0033CC"/>
+                        </a:solidFill>
+                        <a:latin typeface="Cambria Math" panose="02040503050406030204" pitchFamily="18" charset="0"/>
+                      </a:rPr>
+                      <m:t>=</m:t>
+                    </m:r>
+                    <m:r>
+                      <a:rPr lang="en-US" b="1" i="0" smtClean="0">
+                        <a:solidFill>
+                          <a:srgbClr val="0033CC"/>
+                        </a:solidFill>
+                        <a:latin typeface="Cambria Math" panose="02040503050406030204" pitchFamily="18" charset="0"/>
+                      </a:rPr>
+                      <m:t>𝟏</m:t>
+                    </m:r>
+                  </m:oMath>
+                </a14:m>
+                <a:r>
+                  <a:rPr lang="en-US" dirty="0"/>
+                  <a:t> 				TN:	</a:t>
+                </a:r>
+                <a14:m>
+                  <m:oMath xmlns:m="http://schemas.openxmlformats.org/officeDocument/2006/math">
+                    <m:nary>
+                      <m:naryPr>
+                        <m:chr m:val="∑"/>
+                        <m:supHide m:val="on"/>
+                        <m:ctrlPr>
+                          <a:rPr lang="en-US" b="0" i="1" smtClean="0">
+                            <a:latin typeface="Cambria Math" panose="02040503050406030204" pitchFamily="18" charset="0"/>
+                          </a:rPr>
+                        </m:ctrlPr>
+                      </m:naryPr>
+                      <m:sub>
+                        <m:r>
+                          <a:rPr lang="en-US" b="0" i="1" smtClean="0">
+                            <a:latin typeface="Cambria Math" panose="02040503050406030204" pitchFamily="18" charset="0"/>
+                          </a:rPr>
+                          <m:t>𝑖</m:t>
+                        </m:r>
+                        <m:r>
+                          <a:rPr lang="en-US" b="0" i="1" smtClean="0">
+                            <a:latin typeface="Cambria Math" panose="02040503050406030204" pitchFamily="18" charset="0"/>
+                          </a:rPr>
+                          <m:t>,   </m:t>
+                        </m:r>
+                        <m:sSub>
+                          <m:sSubPr>
+                            <m:ctrlPr>
+                              <a:rPr lang="en-US" b="1" i="1">
+                                <a:solidFill>
+                                  <a:srgbClr val="C00000"/>
+                                </a:solidFill>
+                                <a:latin typeface="Cambria Math" panose="02040503050406030204" pitchFamily="18" charset="0"/>
+                              </a:rPr>
+                            </m:ctrlPr>
+                          </m:sSubPr>
+                          <m:e>
+                            <m:r>
+                              <m:rPr>
+                                <m:brk m:alnAt="7"/>
+                              </m:rPr>
+                              <a:rPr lang="en-US" b="1" i="1">
+                                <a:solidFill>
+                                  <a:srgbClr val="C00000"/>
+                                </a:solidFill>
+                                <a:latin typeface="Cambria Math" panose="02040503050406030204" pitchFamily="18" charset="0"/>
+                              </a:rPr>
+                              <m:t>𝒚</m:t>
+                            </m:r>
+                          </m:e>
+                          <m:sub>
+                            <m:r>
+                              <m:rPr>
+                                <m:brk m:alnAt="7"/>
+                              </m:rPr>
+                              <a:rPr lang="en-US" b="1" i="1">
+                                <a:solidFill>
+                                  <a:srgbClr val="C00000"/>
+                                </a:solidFill>
+                                <a:latin typeface="Cambria Math" panose="02040503050406030204" pitchFamily="18" charset="0"/>
+                              </a:rPr>
+                              <m:t>𝒊</m:t>
+                            </m:r>
+                          </m:sub>
+                        </m:sSub>
+                        <m:r>
+                          <m:rPr>
+                            <m:brk m:alnAt="7"/>
+                          </m:rPr>
+                          <a:rPr lang="en-US" b="1" i="1">
+                            <a:solidFill>
+                              <a:srgbClr val="C00000"/>
+                            </a:solidFill>
+                            <a:latin typeface="Cambria Math" panose="02040503050406030204" pitchFamily="18" charset="0"/>
+                          </a:rPr>
+                          <m:t>=</m:t>
+                        </m:r>
+                        <m:r>
+                          <a:rPr lang="en-US" b="1" i="1">
+                            <a:solidFill>
+                              <a:srgbClr val="C00000"/>
+                            </a:solidFill>
+                            <a:latin typeface="Cambria Math" panose="02040503050406030204" pitchFamily="18" charset="0"/>
+                          </a:rPr>
+                          <m:t>𝟎</m:t>
+                        </m:r>
+                      </m:sub>
+                      <m:sup/>
+                      <m:e>
+                        <m:r>
+                          <a:rPr lang="en-US" i="1">
+                            <a:latin typeface="Cambria Math" panose="02040503050406030204" pitchFamily="18" charset="0"/>
+                          </a:rPr>
+                          <m:t>𝐼</m:t>
+                        </m:r>
+                        <m:r>
+                          <a:rPr lang="en-US" i="1">
+                            <a:latin typeface="Cambria Math" panose="02040503050406030204" pitchFamily="18" charset="0"/>
+                          </a:rPr>
+                          <m:t>[</m:t>
+                        </m:r>
+                        <m:r>
+                          <a:rPr lang="en-US" i="1">
+                            <a:latin typeface="Cambria Math" panose="02040503050406030204" pitchFamily="18" charset="0"/>
+                          </a:rPr>
+                          <m:t>𝐷</m:t>
+                        </m:r>
+                        <m:d>
+                          <m:dPr>
+                            <m:ctrlPr>
+                              <a:rPr lang="en-US" i="1">
+                                <a:latin typeface="Cambria Math" panose="02040503050406030204" pitchFamily="18" charset="0"/>
+                              </a:rPr>
+                            </m:ctrlPr>
+                          </m:dPr>
+                          <m:e>
+                            <m:sSub>
+                              <m:sSubPr>
+                                <m:ctrlPr>
+                                  <a:rPr lang="en-US" i="1">
+                                    <a:latin typeface="Cambria Math" panose="02040503050406030204" pitchFamily="18" charset="0"/>
+                                  </a:rPr>
+                                </m:ctrlPr>
+                              </m:sSubPr>
+                              <m:e>
+                                <m:r>
+                                  <a:rPr lang="en-US" i="1">
+                                    <a:latin typeface="Cambria Math" panose="02040503050406030204" pitchFamily="18" charset="0"/>
+                                  </a:rPr>
+                                  <m:t>𝑥</m:t>
+                                </m:r>
+                              </m:e>
+                              <m:sub>
+                                <m:r>
+                                  <a:rPr lang="en-US" i="1">
+                                    <a:latin typeface="Cambria Math" panose="02040503050406030204" pitchFamily="18" charset="0"/>
+                                  </a:rPr>
+                                  <m:t>𝑖</m:t>
+                                </m:r>
+                              </m:sub>
+                            </m:sSub>
+                          </m:e>
+                        </m:d>
+                        <m:r>
+                          <a:rPr lang="en-US" i="1">
+                            <a:latin typeface="Cambria Math" panose="02040503050406030204" pitchFamily="18" charset="0"/>
+                            <a:ea typeface="Cambria Math" panose="02040503050406030204" pitchFamily="18" charset="0"/>
+                          </a:rPr>
+                          <m:t>≤</m:t>
+                        </m:r>
+                        <m:r>
+                          <a:rPr lang="en-US" i="1">
+                            <a:latin typeface="Cambria Math" panose="02040503050406030204" pitchFamily="18" charset="0"/>
+                          </a:rPr>
+                          <m:t>𝑡</m:t>
+                        </m:r>
+                      </m:e>
+                    </m:nary>
+                    <m:r>
+                      <a:rPr lang="en-US" i="1">
+                        <a:latin typeface="Cambria Math" panose="02040503050406030204" pitchFamily="18" charset="0"/>
+                      </a:rPr>
+                      <m:t>]</m:t>
+                    </m:r>
+                  </m:oMath>
+                </a14:m>
+                <a:endParaRPr lang="en-US" b="0" dirty="0"/>
+              </a:p>
+              <a:p>
+                <a:pPr marL="0" indent="0">
+                  <a:buNone/>
+                </a:pPr>
+                <a:r>
+                  <a:rPr lang="en-US" dirty="0"/>
+                  <a:t>					FP:	</a:t>
+                </a:r>
+                <a14:m>
+                  <m:oMath xmlns:m="http://schemas.openxmlformats.org/officeDocument/2006/math">
+                    <m:nary>
+                      <m:naryPr>
+                        <m:chr m:val="∑"/>
+                        <m:supHide m:val="on"/>
+                        <m:ctrlPr>
+                          <a:rPr lang="en-US" b="0" i="1" smtClean="0">
+                            <a:latin typeface="Cambria Math" panose="02040503050406030204" pitchFamily="18" charset="0"/>
+                          </a:rPr>
+                        </m:ctrlPr>
+                      </m:naryPr>
+                      <m:sub>
+                        <m:r>
+                          <a:rPr lang="en-US" b="0" i="1" smtClean="0">
+                            <a:latin typeface="Cambria Math" panose="02040503050406030204" pitchFamily="18" charset="0"/>
+                          </a:rPr>
+                          <m:t>𝑖</m:t>
+                        </m:r>
+                        <m:r>
+                          <a:rPr lang="en-US" b="0" i="1" smtClean="0">
+                            <a:latin typeface="Cambria Math" panose="02040503050406030204" pitchFamily="18" charset="0"/>
+                          </a:rPr>
+                          <m:t>,   </m:t>
+                        </m:r>
+                        <m:sSub>
+                          <m:sSubPr>
+                            <m:ctrlPr>
+                              <a:rPr lang="en-US" b="1" i="1">
+                                <a:solidFill>
+                                  <a:srgbClr val="C00000"/>
+                                </a:solidFill>
+                                <a:latin typeface="Cambria Math" panose="02040503050406030204" pitchFamily="18" charset="0"/>
+                              </a:rPr>
+                            </m:ctrlPr>
+                          </m:sSubPr>
+                          <m:e>
+                            <m:r>
+                              <m:rPr>
+                                <m:brk m:alnAt="7"/>
+                              </m:rPr>
+                              <a:rPr lang="en-US" b="1" i="1">
+                                <a:solidFill>
+                                  <a:srgbClr val="C00000"/>
+                                </a:solidFill>
+                                <a:latin typeface="Cambria Math" panose="02040503050406030204" pitchFamily="18" charset="0"/>
+                              </a:rPr>
+                              <m:t>𝒚</m:t>
+                            </m:r>
+                          </m:e>
+                          <m:sub>
+                            <m:r>
+                              <m:rPr>
+                                <m:brk m:alnAt="7"/>
+                              </m:rPr>
+                              <a:rPr lang="en-US" b="1" i="1">
+                                <a:solidFill>
+                                  <a:srgbClr val="C00000"/>
+                                </a:solidFill>
+                                <a:latin typeface="Cambria Math" panose="02040503050406030204" pitchFamily="18" charset="0"/>
+                              </a:rPr>
+                              <m:t>𝒊</m:t>
+                            </m:r>
+                          </m:sub>
+                        </m:sSub>
+                        <m:r>
+                          <m:rPr>
+                            <m:brk m:alnAt="7"/>
+                          </m:rPr>
+                          <a:rPr lang="en-US" b="1" i="1">
+                            <a:solidFill>
+                              <a:srgbClr val="C00000"/>
+                            </a:solidFill>
+                            <a:latin typeface="Cambria Math" panose="02040503050406030204" pitchFamily="18" charset="0"/>
+                          </a:rPr>
+                          <m:t>=</m:t>
+                        </m:r>
+                        <m:r>
+                          <a:rPr lang="en-US" b="1" i="1" smtClean="0">
+                            <a:solidFill>
+                              <a:srgbClr val="C00000"/>
+                            </a:solidFill>
+                            <a:latin typeface="Cambria Math" panose="02040503050406030204" pitchFamily="18" charset="0"/>
+                          </a:rPr>
+                          <m:t>𝟎</m:t>
+                        </m:r>
+                      </m:sub>
+                      <m:sup/>
+                      <m:e>
+                        <m:r>
+                          <a:rPr lang="en-US" i="1">
+                            <a:latin typeface="Cambria Math" panose="02040503050406030204" pitchFamily="18" charset="0"/>
+                          </a:rPr>
+                          <m:t>𝐼</m:t>
+                        </m:r>
+                        <m:r>
+                          <a:rPr lang="en-US" i="1">
+                            <a:latin typeface="Cambria Math" panose="02040503050406030204" pitchFamily="18" charset="0"/>
+                          </a:rPr>
+                          <m:t>[</m:t>
+                        </m:r>
+                        <m:r>
+                          <a:rPr lang="en-US" i="1">
+                            <a:latin typeface="Cambria Math" panose="02040503050406030204" pitchFamily="18" charset="0"/>
+                          </a:rPr>
+                          <m:t>𝐷</m:t>
+                        </m:r>
+                        <m:d>
+                          <m:dPr>
+                            <m:ctrlPr>
+                              <a:rPr lang="en-US" i="1">
+                                <a:latin typeface="Cambria Math" panose="02040503050406030204" pitchFamily="18" charset="0"/>
+                              </a:rPr>
+                            </m:ctrlPr>
+                          </m:dPr>
+                          <m:e>
+                            <m:sSub>
+                              <m:sSubPr>
+                                <m:ctrlPr>
+                                  <a:rPr lang="en-US" i="1">
+                                    <a:latin typeface="Cambria Math" panose="02040503050406030204" pitchFamily="18" charset="0"/>
+                                  </a:rPr>
+                                </m:ctrlPr>
+                              </m:sSubPr>
+                              <m:e>
+                                <m:r>
+                                  <a:rPr lang="en-US" i="1">
+                                    <a:latin typeface="Cambria Math" panose="02040503050406030204" pitchFamily="18" charset="0"/>
+                                  </a:rPr>
+                                  <m:t>𝑥</m:t>
+                                </m:r>
+                              </m:e>
+                              <m:sub>
+                                <m:r>
+                                  <a:rPr lang="en-US" i="1">
+                                    <a:latin typeface="Cambria Math" panose="02040503050406030204" pitchFamily="18" charset="0"/>
+                                  </a:rPr>
+                                  <m:t>𝑖</m:t>
+                                </m:r>
+                              </m:sub>
+                            </m:sSub>
+                          </m:e>
+                        </m:d>
+                        <m:r>
+                          <a:rPr lang="en-US" i="1">
+                            <a:latin typeface="Cambria Math" panose="02040503050406030204" pitchFamily="18" charset="0"/>
+                          </a:rPr>
+                          <m:t>&gt;</m:t>
+                        </m:r>
+                        <m:r>
+                          <a:rPr lang="en-US" i="1">
+                            <a:latin typeface="Cambria Math" panose="02040503050406030204" pitchFamily="18" charset="0"/>
+                          </a:rPr>
+                          <m:t>𝑡</m:t>
+                        </m:r>
+                      </m:e>
+                    </m:nary>
+                    <m:r>
+                      <a:rPr lang="en-US" i="1">
+                        <a:latin typeface="Cambria Math" panose="02040503050406030204" pitchFamily="18" charset="0"/>
+                      </a:rPr>
+                      <m:t>]</m:t>
+                    </m:r>
+                  </m:oMath>
+                </a14:m>
+                <a:endParaRPr lang="en-US" dirty="0"/>
+              </a:p>
+              <a:p>
+                <a:pPr marL="0" indent="0">
+                  <a:buNone/>
+                </a:pPr>
+                <a:endParaRPr lang="en-US" dirty="0"/>
+              </a:p>
+              <a:p>
+                <a:pPr marL="0" indent="0">
+                  <a:buNone/>
+                </a:pPr>
+                <a:endParaRPr lang="en-US" b="0" dirty="0">
+                  <a:latin typeface="+mn-lt"/>
+                </a:endParaRPr>
+              </a:p>
+            </p:txBody>
+          </p:sp>
+        </mc:Choice>
+        <mc:Fallback xmlns="">
+          <p:sp>
+            <p:nvSpPr>
+              <p:cNvPr id="8" name="Content Placeholder 7">
+                <a:extLst>
+                  <a:ext uri="{FF2B5EF4-FFF2-40B4-BE49-F238E27FC236}">
+                    <a16:creationId xmlns:a16="http://schemas.microsoft.com/office/drawing/2014/main" id="{8A099783-2799-6C19-C31C-FAF24757F700}"/>
+                  </a:ext>
+                </a:extLst>
+              </p:cNvPr>
+              <p:cNvSpPr>
+                <a:spLocks noGrp="1" noRot="1" noChangeAspect="1" noMove="1" noResize="1" noEditPoints="1" noAdjustHandles="1" noChangeArrowheads="1" noChangeShapeType="1" noTextEdit="1"/>
+              </p:cNvSpPr>
+              <p:nvPr>
+                <p:ph idx="1"/>
+              </p:nvPr>
+            </p:nvSpPr>
+            <p:spPr>
+              <a:xfrm>
+                <a:off x="711200" y="1295400"/>
+                <a:ext cx="8432800" cy="4819650"/>
+              </a:xfrm>
+              <a:blipFill>
+                <a:blip r:embed="rId2"/>
+                <a:stretch>
+                  <a:fillRect l="-1205" t="-12368" b="-21316"/>
+                </a:stretch>
+              </a:blipFill>
+            </p:spPr>
+            <p:txBody>
+              <a:bodyPr/>
+              <a:lstStyle/>
+              <a:p>
+                <a:r>
+                  <a:rPr lang="en-US">
+                    <a:noFill/>
+                  </a:rPr>
+                  <a:t> </a:t>
+                </a:r>
+              </a:p>
+            </p:txBody>
+          </p:sp>
+        </mc:Fallback>
+      </mc:AlternateContent>
+      <p:pic>
+        <p:nvPicPr>
+          <p:cNvPr id="19" name="Picture 18" descr="A graph of a function&#10;&#10;Description automatically generated">
+            <a:extLst>
+              <a:ext uri="{FF2B5EF4-FFF2-40B4-BE49-F238E27FC236}">
+                <a16:creationId xmlns:a16="http://schemas.microsoft.com/office/drawing/2014/main" id="{ED5C4D9E-FC76-30ED-A950-D295A549FD58}"/>
+              </a:ext>
+            </a:extLst>
+          </p:cNvPr>
+          <p:cNvPicPr>
+            <a:picLocks noChangeAspect="1"/>
+          </p:cNvPicPr>
+          <p:nvPr/>
+        </p:nvPicPr>
+        <p:blipFill>
+          <a:blip r:embed="rId3"/>
+          <a:stretch>
+            <a:fillRect/>
+          </a:stretch>
+        </p:blipFill>
+        <p:spPr>
+          <a:xfrm>
+            <a:off x="4953000" y="2362200"/>
+            <a:ext cx="3657600" cy="2921000"/>
+          </a:xfrm>
+          <a:prstGeom prst="rect">
+            <a:avLst/>
+          </a:prstGeom>
+          <a:effectLst>
+            <a:outerShdw blurRad="50800" dist="38100" dir="2700000" algn="tl" rotWithShape="0">
+              <a:prstClr val="black">
+                <a:alpha val="40000"/>
+              </a:prstClr>
+            </a:outerShdw>
+          </a:effectLst>
+        </p:spPr>
+      </p:pic>
+      <p:pic>
+        <p:nvPicPr>
+          <p:cNvPr id="21" name="Picture 20" descr="A graph of a function&#10;&#10;Description automatically generated">
+            <a:extLst>
+              <a:ext uri="{FF2B5EF4-FFF2-40B4-BE49-F238E27FC236}">
+                <a16:creationId xmlns:a16="http://schemas.microsoft.com/office/drawing/2014/main" id="{0735ED67-9E57-1D90-753D-20058D423985}"/>
+              </a:ext>
+            </a:extLst>
+          </p:cNvPr>
+          <p:cNvPicPr>
+            <a:picLocks noChangeAspect="1"/>
+          </p:cNvPicPr>
+          <p:nvPr/>
+        </p:nvPicPr>
+        <p:blipFill>
+          <a:blip r:embed="rId4"/>
+          <a:stretch>
+            <a:fillRect/>
+          </a:stretch>
+        </p:blipFill>
+        <p:spPr>
+          <a:xfrm>
+            <a:off x="381000" y="2286000"/>
+            <a:ext cx="3657600" cy="2921000"/>
+          </a:xfrm>
+          <a:prstGeom prst="rect">
+            <a:avLst/>
+          </a:prstGeom>
+          <a:effectLst>
+            <a:outerShdw blurRad="50800" dist="38100" dir="2700000" algn="tl" rotWithShape="0">
+              <a:prstClr val="black">
+                <a:alpha val="40000"/>
+              </a:prstClr>
+            </a:outerShdw>
+          </a:effectLst>
+        </p:spPr>
+      </p:pic>
+    </p:spTree>
+    <p:extLst>
+      <p:ext uri="{BB962C8B-B14F-4D97-AF65-F5344CB8AC3E}">
+        <p14:creationId xmlns:p14="http://schemas.microsoft.com/office/powerpoint/2010/main" val="224792447"/>
+      </p:ext>
+    </p:extLst>
+  </p:cSld>
+  <p:clrMapOvr>
+    <a:masterClrMapping/>
+  </p:clrMapOvr>
+  <mc:AlternateContent xmlns:mc="http://schemas.openxmlformats.org/markup-compatibility/2006" xmlns:p14="http://schemas.microsoft.com/office/powerpoint/2010/main">
+    <mc:Choice Requires="p14">
+      <p:transition spd="med" p14:dur="700">
+        <p:fade/>
+      </p:transition>
+    </mc:Choice>
+    <mc:Fallback xmlns="">
+      <p:transition spd="med">
+        <p:fade/>
+      </p:transition>
+    </mc:Fallback>
+  </mc:AlternateContent>
+</p:sld>
+</file>
+
 <file path=ppt/slides/slide2.xml><?xml version="1.0" encoding="utf-8"?>
 <p:sld xmlns:a="http://schemas.openxmlformats.org/drawingml/2006/main" xmlns:r="http://schemas.openxmlformats.org/officeDocument/2006/relationships" xmlns:p="http://schemas.openxmlformats.org/presentationml/2006/main">
   <p:cSld>
@@ -9020,1092 +10039,6 @@
         <p:cNvPr id="1" name="">
           <a:extLst>
             <a:ext uri="{FF2B5EF4-FFF2-40B4-BE49-F238E27FC236}">
-              <a16:creationId xmlns:a16="http://schemas.microsoft.com/office/drawing/2014/main" id="{E570CCC6-1254-A8A6-1666-29EA2E74EB42}"/>
-            </a:ext>
-          </a:extLst>
-        </p:cNvPr>
-        <p:cNvGrpSpPr/>
-        <p:nvPr/>
-      </p:nvGrpSpPr>
-      <p:grpSpPr>
-        <a:xfrm>
-          <a:off x="0" y="0"/>
-          <a:ext cx="0" cy="0"/>
-          <a:chOff x="0" y="0"/>
-          <a:chExt cx="0" cy="0"/>
-        </a:xfrm>
-      </p:grpSpPr>
-      <p:sp>
-        <p:nvSpPr>
-          <p:cNvPr id="7" name="Title 6">
-            <a:extLst>
-              <a:ext uri="{FF2B5EF4-FFF2-40B4-BE49-F238E27FC236}">
-                <a16:creationId xmlns:a16="http://schemas.microsoft.com/office/drawing/2014/main" id="{E5B4D7EC-0A9E-88B8-3786-D04B92BF01D5}"/>
-              </a:ext>
-            </a:extLst>
-          </p:cNvPr>
-          <p:cNvSpPr>
-            <a:spLocks noGrp="1"/>
-          </p:cNvSpPr>
-          <p:nvPr>
-            <p:ph type="title"/>
-          </p:nvPr>
-        </p:nvSpPr>
-        <p:spPr/>
-        <p:txBody>
-          <a:bodyPr/>
-          <a:lstStyle/>
-          <a:p>
-            <a:r>
-              <a:rPr lang="en-US" dirty="0"/>
-              <a:t>Classifier Performance (2)</a:t>
-            </a:r>
-            <a:endParaRPr lang="en-US" dirty="0">
-              <a:solidFill>
-                <a:schemeClr val="accent1"/>
-              </a:solidFill>
-            </a:endParaRPr>
-          </a:p>
-        </p:txBody>
-      </p:sp>
-      <mc:AlternateContent xmlns:mc="http://schemas.openxmlformats.org/markup-compatibility/2006">
-        <mc:Choice xmlns:a14="http://schemas.microsoft.com/office/drawing/2010/main" Requires="a14">
-          <p:sp>
-            <p:nvSpPr>
-              <p:cNvPr id="8" name="Content Placeholder 7">
-                <a:extLst>
-                  <a:ext uri="{FF2B5EF4-FFF2-40B4-BE49-F238E27FC236}">
-                    <a16:creationId xmlns:a16="http://schemas.microsoft.com/office/drawing/2014/main" id="{8A099783-2799-6C19-C31C-FAF24757F700}"/>
-                  </a:ext>
-                </a:extLst>
-              </p:cNvPr>
-              <p:cNvSpPr>
-                <a:spLocks noGrp="1"/>
-              </p:cNvSpPr>
-              <p:nvPr>
-                <p:ph idx="1"/>
-              </p:nvPr>
-            </p:nvSpPr>
-            <p:spPr>
-              <a:xfrm>
-                <a:off x="711200" y="1295400"/>
-                <a:ext cx="8432800" cy="4819650"/>
-              </a:xfrm>
-            </p:spPr>
-            <p:txBody>
-              <a:bodyPr/>
-              <a:lstStyle/>
-              <a:p>
-                <a:pPr marL="0" indent="0">
-                  <a:buNone/>
-                </a:pPr>
-                <a:r>
-                  <a:rPr lang="en-US" dirty="0"/>
-                  <a:t>FN:	</a:t>
-                </a:r>
-                <a14:m>
-                  <m:oMath xmlns:m="http://schemas.openxmlformats.org/officeDocument/2006/math">
-                    <m:nary>
-                      <m:naryPr>
-                        <m:chr m:val="∑"/>
-                        <m:supHide m:val="on"/>
-                        <m:ctrlPr>
-                          <a:rPr lang="en-US" b="0" i="1" smtClean="0">
-                            <a:latin typeface="Cambria Math" panose="02040503050406030204" pitchFamily="18" charset="0"/>
-                          </a:rPr>
-                        </m:ctrlPr>
-                      </m:naryPr>
-                      <m:sub>
-                        <m:r>
-                          <a:rPr lang="en-US" b="0" i="1" smtClean="0">
-                            <a:latin typeface="Cambria Math" panose="02040503050406030204" pitchFamily="18" charset="0"/>
-                          </a:rPr>
-                          <m:t>𝑖</m:t>
-                        </m:r>
-                        <m:r>
-                          <a:rPr lang="en-US" b="0" i="1" smtClean="0">
-                            <a:latin typeface="Cambria Math" panose="02040503050406030204" pitchFamily="18" charset="0"/>
-                          </a:rPr>
-                          <m:t>,   </m:t>
-                        </m:r>
-                        <m:sSub>
-                          <m:sSubPr>
-                            <m:ctrlPr>
-                              <a:rPr lang="en-US" b="1" i="1">
-                                <a:solidFill>
-                                  <a:srgbClr val="0033CC"/>
-                                </a:solidFill>
-                                <a:latin typeface="Cambria Math" panose="02040503050406030204" pitchFamily="18" charset="0"/>
-                              </a:rPr>
-                            </m:ctrlPr>
-                          </m:sSubPr>
-                          <m:e>
-                            <m:r>
-                              <m:rPr>
-                                <m:brk m:alnAt="7"/>
-                              </m:rPr>
-                              <a:rPr lang="en-US" b="1" i="1">
-                                <a:solidFill>
-                                  <a:srgbClr val="0033CC"/>
-                                </a:solidFill>
-                                <a:latin typeface="Cambria Math" panose="02040503050406030204" pitchFamily="18" charset="0"/>
-                              </a:rPr>
-                              <m:t>𝒚</m:t>
-                            </m:r>
-                          </m:e>
-                          <m:sub>
-                            <m:r>
-                              <m:rPr>
-                                <m:brk m:alnAt="7"/>
-                              </m:rPr>
-                              <a:rPr lang="en-US" b="1" i="1">
-                                <a:solidFill>
-                                  <a:srgbClr val="0033CC"/>
-                                </a:solidFill>
-                                <a:latin typeface="Cambria Math" panose="02040503050406030204" pitchFamily="18" charset="0"/>
-                              </a:rPr>
-                              <m:t>𝒊</m:t>
-                            </m:r>
-                          </m:sub>
-                        </m:sSub>
-                        <m:r>
-                          <m:rPr>
-                            <m:brk m:alnAt="7"/>
-                          </m:rPr>
-                          <a:rPr lang="en-US" b="1" i="1">
-                            <a:solidFill>
-                              <a:srgbClr val="0033CC"/>
-                            </a:solidFill>
-                            <a:latin typeface="Cambria Math" panose="02040503050406030204" pitchFamily="18" charset="0"/>
-                          </a:rPr>
-                          <m:t>=</m:t>
-                        </m:r>
-                        <m:r>
-                          <a:rPr lang="en-US" b="1" i="1">
-                            <a:solidFill>
-                              <a:srgbClr val="0033CC"/>
-                            </a:solidFill>
-                            <a:latin typeface="Cambria Math" panose="02040503050406030204" pitchFamily="18" charset="0"/>
-                          </a:rPr>
-                          <m:t>𝟏</m:t>
-                        </m:r>
-                      </m:sub>
-                      <m:sup/>
-                      <m:e>
-                        <m:r>
-                          <a:rPr lang="en-US" i="1">
-                            <a:latin typeface="Cambria Math" panose="02040503050406030204" pitchFamily="18" charset="0"/>
-                          </a:rPr>
-                          <m:t>𝐼</m:t>
-                        </m:r>
-                        <m:r>
-                          <a:rPr lang="en-US" i="1">
-                            <a:latin typeface="Cambria Math" panose="02040503050406030204" pitchFamily="18" charset="0"/>
-                          </a:rPr>
-                          <m:t>[</m:t>
-                        </m:r>
-                        <m:r>
-                          <a:rPr lang="en-US" i="1">
-                            <a:latin typeface="Cambria Math" panose="02040503050406030204" pitchFamily="18" charset="0"/>
-                          </a:rPr>
-                          <m:t>𝐷</m:t>
-                        </m:r>
-                        <m:d>
-                          <m:dPr>
-                            <m:ctrlPr>
-                              <a:rPr lang="en-US" i="1">
-                                <a:latin typeface="Cambria Math" panose="02040503050406030204" pitchFamily="18" charset="0"/>
-                              </a:rPr>
-                            </m:ctrlPr>
-                          </m:dPr>
-                          <m:e>
-                            <m:sSub>
-                              <m:sSubPr>
-                                <m:ctrlPr>
-                                  <a:rPr lang="en-US" i="1">
-                                    <a:latin typeface="Cambria Math" panose="02040503050406030204" pitchFamily="18" charset="0"/>
-                                  </a:rPr>
-                                </m:ctrlPr>
-                              </m:sSubPr>
-                              <m:e>
-                                <m:r>
-                                  <a:rPr lang="en-US" i="1">
-                                    <a:latin typeface="Cambria Math" panose="02040503050406030204" pitchFamily="18" charset="0"/>
-                                  </a:rPr>
-                                  <m:t>𝑥</m:t>
-                                </m:r>
-                              </m:e>
-                              <m:sub>
-                                <m:r>
-                                  <a:rPr lang="en-US" i="1">
-                                    <a:latin typeface="Cambria Math" panose="02040503050406030204" pitchFamily="18" charset="0"/>
-                                  </a:rPr>
-                                  <m:t>𝑖</m:t>
-                                </m:r>
-                              </m:sub>
-                            </m:sSub>
-                          </m:e>
-                        </m:d>
-                        <m:r>
-                          <a:rPr lang="en-US" i="1">
-                            <a:latin typeface="Cambria Math" panose="02040503050406030204" pitchFamily="18" charset="0"/>
-                            <a:ea typeface="Cambria Math" panose="02040503050406030204" pitchFamily="18" charset="0"/>
-                          </a:rPr>
-                          <m:t>≤</m:t>
-                        </m:r>
-                        <m:r>
-                          <a:rPr lang="en-US" i="1">
-                            <a:latin typeface="Cambria Math" panose="02040503050406030204" pitchFamily="18" charset="0"/>
-                          </a:rPr>
-                          <m:t>𝑡</m:t>
-                        </m:r>
-                      </m:e>
-                    </m:nary>
-                    <m:r>
-                      <a:rPr lang="en-US" i="1">
-                        <a:latin typeface="Cambria Math" panose="02040503050406030204" pitchFamily="18" charset="0"/>
-                      </a:rPr>
-                      <m:t>]</m:t>
-                    </m:r>
-                  </m:oMath>
-                </a14:m>
-                <a:r>
-                  <a:rPr lang="en-US" dirty="0"/>
-                  <a:t>	</a:t>
-                </a:r>
-                <a14:m>
-                  <m:oMath xmlns:m="http://schemas.openxmlformats.org/officeDocument/2006/math">
-                    <m:r>
-                      <a:rPr lang="en-US" b="0" i="1" smtClean="0">
-                        <a:latin typeface="Cambria Math" panose="02040503050406030204" pitchFamily="18" charset="0"/>
-                      </a:rPr>
-                      <m:t>𝑡</m:t>
-                    </m:r>
-                    <m:r>
-                      <a:rPr lang="en-US" b="0" i="1" smtClean="0">
-                        <a:latin typeface="Cambria Math" panose="02040503050406030204" pitchFamily="18" charset="0"/>
-                      </a:rPr>
-                      <m:t>=0.5</m:t>
-                    </m:r>
-                  </m:oMath>
-                </a14:m>
-                <a:endParaRPr lang="en-US" dirty="0"/>
-              </a:p>
-              <a:p>
-                <a:pPr marL="0" indent="0">
-                  <a:buNone/>
-                </a:pPr>
-                <a:r>
-                  <a:rPr lang="en-US" dirty="0"/>
-                  <a:t>TP:	</a:t>
-                </a:r>
-                <a14:m>
-                  <m:oMath xmlns:m="http://schemas.openxmlformats.org/officeDocument/2006/math">
-                    <m:nary>
-                      <m:naryPr>
-                        <m:chr m:val="∑"/>
-                        <m:supHide m:val="on"/>
-                        <m:ctrlPr>
-                          <a:rPr lang="en-US" b="1" i="1" smtClean="0">
-                            <a:solidFill>
-                              <a:srgbClr val="0033CC"/>
-                            </a:solidFill>
-                            <a:latin typeface="Cambria Math" panose="02040503050406030204" pitchFamily="18" charset="0"/>
-                          </a:rPr>
-                        </m:ctrlPr>
-                      </m:naryPr>
-                      <m:sub>
-                        <m:sSub>
-                          <m:sSubPr>
-                            <m:ctrlPr>
-                              <a:rPr lang="en-US" b="1" i="1" smtClean="0">
-                                <a:solidFill>
-                                  <a:srgbClr val="0033CC"/>
-                                </a:solidFill>
-                                <a:latin typeface="Cambria Math" panose="02040503050406030204" pitchFamily="18" charset="0"/>
-                              </a:rPr>
-                            </m:ctrlPr>
-                          </m:sSubPr>
-                          <m:e>
-                            <m:r>
-                              <a:rPr lang="en-US" b="1" i="1" smtClean="0">
-                                <a:solidFill>
-                                  <a:srgbClr val="0033CC"/>
-                                </a:solidFill>
-                                <a:latin typeface="Cambria Math" panose="02040503050406030204" pitchFamily="18" charset="0"/>
-                              </a:rPr>
-                              <m:t>𝒊</m:t>
-                            </m:r>
-                            <m:r>
-                              <a:rPr lang="en-US" b="1" i="1" smtClean="0">
-                                <a:solidFill>
-                                  <a:srgbClr val="0033CC"/>
-                                </a:solidFill>
-                                <a:latin typeface="Cambria Math" panose="02040503050406030204" pitchFamily="18" charset="0"/>
-                              </a:rPr>
-                              <m:t>,   </m:t>
-                            </m:r>
-                            <m:r>
-                              <m:rPr>
-                                <m:brk m:alnAt="7"/>
-                              </m:rPr>
-                              <a:rPr lang="en-US" b="1" i="1" smtClean="0">
-                                <a:solidFill>
-                                  <a:srgbClr val="0033CC"/>
-                                </a:solidFill>
-                                <a:latin typeface="Cambria Math" panose="02040503050406030204" pitchFamily="18" charset="0"/>
-                              </a:rPr>
-                              <m:t>𝒚</m:t>
-                            </m:r>
-                          </m:e>
-                          <m:sub>
-                            <m:r>
-                              <m:rPr>
-                                <m:brk m:alnAt="7"/>
-                              </m:rPr>
-                              <a:rPr lang="en-US" b="1" i="1" smtClean="0">
-                                <a:solidFill>
-                                  <a:srgbClr val="0033CC"/>
-                                </a:solidFill>
-                                <a:latin typeface="Cambria Math" panose="02040503050406030204" pitchFamily="18" charset="0"/>
-                              </a:rPr>
-                              <m:t>𝒊</m:t>
-                            </m:r>
-                          </m:sub>
-                        </m:sSub>
-                        <m:r>
-                          <m:rPr>
-                            <m:brk m:alnAt="7"/>
-                          </m:rPr>
-                          <a:rPr lang="en-US" b="1" i="1" smtClean="0">
-                            <a:solidFill>
-                              <a:srgbClr val="0033CC"/>
-                            </a:solidFill>
-                            <a:latin typeface="Cambria Math" panose="02040503050406030204" pitchFamily="18" charset="0"/>
-                          </a:rPr>
-                          <m:t>=</m:t>
-                        </m:r>
-                        <m:r>
-                          <a:rPr lang="en-US" b="1" i="1" smtClean="0">
-                            <a:solidFill>
-                              <a:srgbClr val="0033CC"/>
-                            </a:solidFill>
-                            <a:latin typeface="Cambria Math" panose="02040503050406030204" pitchFamily="18" charset="0"/>
-                          </a:rPr>
-                          <m:t>𝟏</m:t>
-                        </m:r>
-                      </m:sub>
-                      <m:sup/>
-                      <m:e>
-                        <m:r>
-                          <a:rPr lang="en-US" i="1">
-                            <a:latin typeface="Cambria Math" panose="02040503050406030204" pitchFamily="18" charset="0"/>
-                          </a:rPr>
-                          <m:t>𝐼</m:t>
-                        </m:r>
-                        <m:r>
-                          <a:rPr lang="en-US" i="1">
-                            <a:latin typeface="Cambria Math" panose="02040503050406030204" pitchFamily="18" charset="0"/>
-                          </a:rPr>
-                          <m:t>[</m:t>
-                        </m:r>
-                        <m:r>
-                          <a:rPr lang="en-US" i="1">
-                            <a:latin typeface="Cambria Math" panose="02040503050406030204" pitchFamily="18" charset="0"/>
-                          </a:rPr>
-                          <m:t>𝐷</m:t>
-                        </m:r>
-                        <m:d>
-                          <m:dPr>
-                            <m:ctrlPr>
-                              <a:rPr lang="en-US" i="1">
-                                <a:latin typeface="Cambria Math" panose="02040503050406030204" pitchFamily="18" charset="0"/>
-                              </a:rPr>
-                            </m:ctrlPr>
-                          </m:dPr>
-                          <m:e>
-                            <m:sSub>
-                              <m:sSubPr>
-                                <m:ctrlPr>
-                                  <a:rPr lang="en-US" i="1">
-                                    <a:latin typeface="Cambria Math" panose="02040503050406030204" pitchFamily="18" charset="0"/>
-                                  </a:rPr>
-                                </m:ctrlPr>
-                              </m:sSubPr>
-                              <m:e>
-                                <m:r>
-                                  <a:rPr lang="en-US" i="1">
-                                    <a:latin typeface="Cambria Math" panose="02040503050406030204" pitchFamily="18" charset="0"/>
-                                  </a:rPr>
-                                  <m:t>𝑥</m:t>
-                                </m:r>
-                              </m:e>
-                              <m:sub>
-                                <m:r>
-                                  <a:rPr lang="en-US" i="1">
-                                    <a:latin typeface="Cambria Math" panose="02040503050406030204" pitchFamily="18" charset="0"/>
-                                  </a:rPr>
-                                  <m:t>𝑖</m:t>
-                                </m:r>
-                              </m:sub>
-                            </m:sSub>
-                          </m:e>
-                        </m:d>
-                        <m:r>
-                          <a:rPr lang="en-US" i="1">
-                            <a:latin typeface="Cambria Math" panose="02040503050406030204" pitchFamily="18" charset="0"/>
-                          </a:rPr>
-                          <m:t>&gt;</m:t>
-                        </m:r>
-                        <m:r>
-                          <a:rPr lang="en-US" i="1">
-                            <a:latin typeface="Cambria Math" panose="02040503050406030204" pitchFamily="18" charset="0"/>
-                          </a:rPr>
-                          <m:t>𝑡</m:t>
-                        </m:r>
-                      </m:e>
-                    </m:nary>
-                    <m:r>
-                      <a:rPr lang="en-US" b="0" i="1" smtClean="0">
-                        <a:latin typeface="Cambria Math" panose="02040503050406030204" pitchFamily="18" charset="0"/>
-                      </a:rPr>
-                      <m:t>]</m:t>
-                    </m:r>
-                  </m:oMath>
-                </a14:m>
-                <a:r>
-                  <a:rPr lang="en-US" dirty="0"/>
-                  <a:t>			 </a:t>
-                </a:r>
-                <a14:m>
-                  <m:oMath xmlns:m="http://schemas.openxmlformats.org/officeDocument/2006/math">
-                    <m:r>
-                      <a:rPr lang="en-US" b="1" i="1" smtClean="0">
-                        <a:solidFill>
-                          <a:srgbClr val="C00000"/>
-                        </a:solidFill>
-                        <a:latin typeface="Cambria Math" panose="02040503050406030204" pitchFamily="18" charset="0"/>
-                      </a:rPr>
-                      <m:t>𝒚</m:t>
-                    </m:r>
-                    <m:r>
-                      <a:rPr lang="en-US" b="1" i="1">
-                        <a:solidFill>
-                          <a:srgbClr val="C00000"/>
-                        </a:solidFill>
-                        <a:latin typeface="Cambria Math" panose="02040503050406030204" pitchFamily="18" charset="0"/>
-                      </a:rPr>
-                      <m:t>=</m:t>
-                    </m:r>
-                    <m:r>
-                      <a:rPr lang="en-US" b="1" i="1" smtClean="0">
-                        <a:solidFill>
-                          <a:srgbClr val="C00000"/>
-                        </a:solidFill>
-                        <a:latin typeface="Cambria Math" panose="02040503050406030204" pitchFamily="18" charset="0"/>
-                      </a:rPr>
-                      <m:t>𝟎</m:t>
-                    </m:r>
-                  </m:oMath>
-                </a14:m>
-                <a:endParaRPr lang="en-US" b="1" dirty="0"/>
-              </a:p>
-              <a:p>
-                <a:pPr marL="0" indent="0">
-                  <a:buNone/>
-                </a:pPr>
-                <a:endParaRPr lang="en-US" dirty="0"/>
-              </a:p>
-              <a:p>
-                <a:pPr marL="0" indent="0">
-                  <a:buNone/>
-                </a:pPr>
-                <a:endParaRPr lang="en-US" dirty="0"/>
-              </a:p>
-              <a:p>
-                <a:pPr marL="457200" indent="-457200">
-                  <a:buFont typeface="+mj-lt"/>
-                  <a:buAutoNum type="arabicPeriod"/>
-                </a:pPr>
-                <a:endParaRPr lang="en-US" b="0" dirty="0"/>
-              </a:p>
-              <a:p>
-                <a:pPr marL="457200" indent="-457200">
-                  <a:buFont typeface="+mj-lt"/>
-                  <a:buAutoNum type="arabicPeriod"/>
-                </a:pPr>
-                <a:endParaRPr lang="en-US" dirty="0"/>
-              </a:p>
-              <a:p>
-                <a:pPr marL="457200" indent="-457200">
-                  <a:buFont typeface="+mj-lt"/>
-                  <a:buAutoNum type="arabicPeriod"/>
-                </a:pPr>
-                <a:endParaRPr lang="en-US" b="0" dirty="0"/>
-              </a:p>
-              <a:p>
-                <a:pPr marL="0" indent="0">
-                  <a:buNone/>
-                </a:pPr>
-                <a:endParaRPr lang="en-US" dirty="0"/>
-              </a:p>
-              <a:p>
-                <a:pPr marL="0" indent="0">
-                  <a:buNone/>
-                </a:pPr>
-                <a:br>
-                  <a:rPr lang="en-US" b="0" dirty="0"/>
-                </a:br>
-                <a:r>
-                  <a:rPr lang="en-US" b="0" dirty="0"/>
-                  <a:t>	</a:t>
-                </a:r>
-                <a14:m>
-                  <m:oMath xmlns:m="http://schemas.openxmlformats.org/officeDocument/2006/math">
-                    <m:r>
-                      <a:rPr lang="en-US" b="1" i="1" smtClean="0">
-                        <a:solidFill>
-                          <a:srgbClr val="0033CC"/>
-                        </a:solidFill>
-                        <a:latin typeface="Cambria Math" panose="02040503050406030204" pitchFamily="18" charset="0"/>
-                      </a:rPr>
-                      <m:t>𝒚</m:t>
-                    </m:r>
-                    <m:r>
-                      <a:rPr lang="en-US" b="1" i="1" smtClean="0">
-                        <a:solidFill>
-                          <a:srgbClr val="0033CC"/>
-                        </a:solidFill>
-                        <a:latin typeface="Cambria Math" panose="02040503050406030204" pitchFamily="18" charset="0"/>
-                      </a:rPr>
-                      <m:t>=</m:t>
-                    </m:r>
-                    <m:r>
-                      <a:rPr lang="en-US" b="1" i="0" smtClean="0">
-                        <a:solidFill>
-                          <a:srgbClr val="0033CC"/>
-                        </a:solidFill>
-                        <a:latin typeface="Cambria Math" panose="02040503050406030204" pitchFamily="18" charset="0"/>
-                      </a:rPr>
-                      <m:t>𝟏</m:t>
-                    </m:r>
-                  </m:oMath>
-                </a14:m>
-                <a:r>
-                  <a:rPr lang="en-US" dirty="0"/>
-                  <a:t> 				TN:	</a:t>
-                </a:r>
-                <a14:m>
-                  <m:oMath xmlns:m="http://schemas.openxmlformats.org/officeDocument/2006/math">
-                    <m:nary>
-                      <m:naryPr>
-                        <m:chr m:val="∑"/>
-                        <m:supHide m:val="on"/>
-                        <m:ctrlPr>
-                          <a:rPr lang="en-US" b="0" i="1" smtClean="0">
-                            <a:latin typeface="Cambria Math" panose="02040503050406030204" pitchFamily="18" charset="0"/>
-                          </a:rPr>
-                        </m:ctrlPr>
-                      </m:naryPr>
-                      <m:sub>
-                        <m:r>
-                          <a:rPr lang="en-US" b="0" i="1" smtClean="0">
-                            <a:latin typeface="Cambria Math" panose="02040503050406030204" pitchFamily="18" charset="0"/>
-                          </a:rPr>
-                          <m:t>𝑖</m:t>
-                        </m:r>
-                        <m:r>
-                          <a:rPr lang="en-US" b="0" i="1" smtClean="0">
-                            <a:latin typeface="Cambria Math" panose="02040503050406030204" pitchFamily="18" charset="0"/>
-                          </a:rPr>
-                          <m:t>,   </m:t>
-                        </m:r>
-                        <m:sSub>
-                          <m:sSubPr>
-                            <m:ctrlPr>
-                              <a:rPr lang="en-US" b="1" i="1">
-                                <a:solidFill>
-                                  <a:srgbClr val="C00000"/>
-                                </a:solidFill>
-                                <a:latin typeface="Cambria Math" panose="02040503050406030204" pitchFamily="18" charset="0"/>
-                              </a:rPr>
-                            </m:ctrlPr>
-                          </m:sSubPr>
-                          <m:e>
-                            <m:r>
-                              <m:rPr>
-                                <m:brk m:alnAt="7"/>
-                              </m:rPr>
-                              <a:rPr lang="en-US" b="1" i="1">
-                                <a:solidFill>
-                                  <a:srgbClr val="C00000"/>
-                                </a:solidFill>
-                                <a:latin typeface="Cambria Math" panose="02040503050406030204" pitchFamily="18" charset="0"/>
-                              </a:rPr>
-                              <m:t>𝒚</m:t>
-                            </m:r>
-                          </m:e>
-                          <m:sub>
-                            <m:r>
-                              <m:rPr>
-                                <m:brk m:alnAt="7"/>
-                              </m:rPr>
-                              <a:rPr lang="en-US" b="1" i="1">
-                                <a:solidFill>
-                                  <a:srgbClr val="C00000"/>
-                                </a:solidFill>
-                                <a:latin typeface="Cambria Math" panose="02040503050406030204" pitchFamily="18" charset="0"/>
-                              </a:rPr>
-                              <m:t>𝒊</m:t>
-                            </m:r>
-                          </m:sub>
-                        </m:sSub>
-                        <m:r>
-                          <m:rPr>
-                            <m:brk m:alnAt="7"/>
-                          </m:rPr>
-                          <a:rPr lang="en-US" b="1" i="1">
-                            <a:solidFill>
-                              <a:srgbClr val="C00000"/>
-                            </a:solidFill>
-                            <a:latin typeface="Cambria Math" panose="02040503050406030204" pitchFamily="18" charset="0"/>
-                          </a:rPr>
-                          <m:t>=</m:t>
-                        </m:r>
-                        <m:r>
-                          <a:rPr lang="en-US" b="1" i="1">
-                            <a:solidFill>
-                              <a:srgbClr val="C00000"/>
-                            </a:solidFill>
-                            <a:latin typeface="Cambria Math" panose="02040503050406030204" pitchFamily="18" charset="0"/>
-                          </a:rPr>
-                          <m:t>𝟎</m:t>
-                        </m:r>
-                      </m:sub>
-                      <m:sup/>
-                      <m:e>
-                        <m:r>
-                          <a:rPr lang="en-US" i="1">
-                            <a:latin typeface="Cambria Math" panose="02040503050406030204" pitchFamily="18" charset="0"/>
-                          </a:rPr>
-                          <m:t>𝐼</m:t>
-                        </m:r>
-                        <m:r>
-                          <a:rPr lang="en-US" i="1">
-                            <a:latin typeface="Cambria Math" panose="02040503050406030204" pitchFamily="18" charset="0"/>
-                          </a:rPr>
-                          <m:t>[</m:t>
-                        </m:r>
-                        <m:r>
-                          <a:rPr lang="en-US" i="1">
-                            <a:latin typeface="Cambria Math" panose="02040503050406030204" pitchFamily="18" charset="0"/>
-                          </a:rPr>
-                          <m:t>𝐷</m:t>
-                        </m:r>
-                        <m:d>
-                          <m:dPr>
-                            <m:ctrlPr>
-                              <a:rPr lang="en-US" i="1">
-                                <a:latin typeface="Cambria Math" panose="02040503050406030204" pitchFamily="18" charset="0"/>
-                              </a:rPr>
-                            </m:ctrlPr>
-                          </m:dPr>
-                          <m:e>
-                            <m:sSub>
-                              <m:sSubPr>
-                                <m:ctrlPr>
-                                  <a:rPr lang="en-US" i="1">
-                                    <a:latin typeface="Cambria Math" panose="02040503050406030204" pitchFamily="18" charset="0"/>
-                                  </a:rPr>
-                                </m:ctrlPr>
-                              </m:sSubPr>
-                              <m:e>
-                                <m:r>
-                                  <a:rPr lang="en-US" i="1">
-                                    <a:latin typeface="Cambria Math" panose="02040503050406030204" pitchFamily="18" charset="0"/>
-                                  </a:rPr>
-                                  <m:t>𝑥</m:t>
-                                </m:r>
-                              </m:e>
-                              <m:sub>
-                                <m:r>
-                                  <a:rPr lang="en-US" i="1">
-                                    <a:latin typeface="Cambria Math" panose="02040503050406030204" pitchFamily="18" charset="0"/>
-                                  </a:rPr>
-                                  <m:t>𝑖</m:t>
-                                </m:r>
-                              </m:sub>
-                            </m:sSub>
-                          </m:e>
-                        </m:d>
-                        <m:r>
-                          <a:rPr lang="en-US" i="1">
-                            <a:latin typeface="Cambria Math" panose="02040503050406030204" pitchFamily="18" charset="0"/>
-                            <a:ea typeface="Cambria Math" panose="02040503050406030204" pitchFamily="18" charset="0"/>
-                          </a:rPr>
-                          <m:t>≤</m:t>
-                        </m:r>
-                        <m:r>
-                          <a:rPr lang="en-US" i="1">
-                            <a:latin typeface="Cambria Math" panose="02040503050406030204" pitchFamily="18" charset="0"/>
-                          </a:rPr>
-                          <m:t>𝑡</m:t>
-                        </m:r>
-                      </m:e>
-                    </m:nary>
-                    <m:r>
-                      <a:rPr lang="en-US" i="1">
-                        <a:latin typeface="Cambria Math" panose="02040503050406030204" pitchFamily="18" charset="0"/>
-                      </a:rPr>
-                      <m:t>]</m:t>
-                    </m:r>
-                  </m:oMath>
-                </a14:m>
-                <a:endParaRPr lang="en-US" b="0" dirty="0"/>
-              </a:p>
-              <a:p>
-                <a:pPr marL="0" indent="0">
-                  <a:buNone/>
-                </a:pPr>
-                <a:r>
-                  <a:rPr lang="en-US" dirty="0"/>
-                  <a:t>					FP:	</a:t>
-                </a:r>
-                <a14:m>
-                  <m:oMath xmlns:m="http://schemas.openxmlformats.org/officeDocument/2006/math">
-                    <m:nary>
-                      <m:naryPr>
-                        <m:chr m:val="∑"/>
-                        <m:supHide m:val="on"/>
-                        <m:ctrlPr>
-                          <a:rPr lang="en-US" b="0" i="1" smtClean="0">
-                            <a:latin typeface="Cambria Math" panose="02040503050406030204" pitchFamily="18" charset="0"/>
-                          </a:rPr>
-                        </m:ctrlPr>
-                      </m:naryPr>
-                      <m:sub>
-                        <m:r>
-                          <a:rPr lang="en-US" b="0" i="1" smtClean="0">
-                            <a:latin typeface="Cambria Math" panose="02040503050406030204" pitchFamily="18" charset="0"/>
-                          </a:rPr>
-                          <m:t>𝑖</m:t>
-                        </m:r>
-                        <m:r>
-                          <a:rPr lang="en-US" b="0" i="1" smtClean="0">
-                            <a:latin typeface="Cambria Math" panose="02040503050406030204" pitchFamily="18" charset="0"/>
-                          </a:rPr>
-                          <m:t>,   </m:t>
-                        </m:r>
-                        <m:sSub>
-                          <m:sSubPr>
-                            <m:ctrlPr>
-                              <a:rPr lang="en-US" b="1" i="1">
-                                <a:solidFill>
-                                  <a:srgbClr val="C00000"/>
-                                </a:solidFill>
-                                <a:latin typeface="Cambria Math" panose="02040503050406030204" pitchFamily="18" charset="0"/>
-                              </a:rPr>
-                            </m:ctrlPr>
-                          </m:sSubPr>
-                          <m:e>
-                            <m:r>
-                              <m:rPr>
-                                <m:brk m:alnAt="7"/>
-                              </m:rPr>
-                              <a:rPr lang="en-US" b="1" i="1">
-                                <a:solidFill>
-                                  <a:srgbClr val="C00000"/>
-                                </a:solidFill>
-                                <a:latin typeface="Cambria Math" panose="02040503050406030204" pitchFamily="18" charset="0"/>
-                              </a:rPr>
-                              <m:t>𝒚</m:t>
-                            </m:r>
-                          </m:e>
-                          <m:sub>
-                            <m:r>
-                              <m:rPr>
-                                <m:brk m:alnAt="7"/>
-                              </m:rPr>
-                              <a:rPr lang="en-US" b="1" i="1">
-                                <a:solidFill>
-                                  <a:srgbClr val="C00000"/>
-                                </a:solidFill>
-                                <a:latin typeface="Cambria Math" panose="02040503050406030204" pitchFamily="18" charset="0"/>
-                              </a:rPr>
-                              <m:t>𝒊</m:t>
-                            </m:r>
-                          </m:sub>
-                        </m:sSub>
-                        <m:r>
-                          <m:rPr>
-                            <m:brk m:alnAt="7"/>
-                          </m:rPr>
-                          <a:rPr lang="en-US" b="1" i="1">
-                            <a:solidFill>
-                              <a:srgbClr val="C00000"/>
-                            </a:solidFill>
-                            <a:latin typeface="Cambria Math" panose="02040503050406030204" pitchFamily="18" charset="0"/>
-                          </a:rPr>
-                          <m:t>=</m:t>
-                        </m:r>
-                        <m:r>
-                          <a:rPr lang="en-US" b="1" i="1" smtClean="0">
-                            <a:solidFill>
-                              <a:srgbClr val="C00000"/>
-                            </a:solidFill>
-                            <a:latin typeface="Cambria Math" panose="02040503050406030204" pitchFamily="18" charset="0"/>
-                          </a:rPr>
-                          <m:t>𝟎</m:t>
-                        </m:r>
-                      </m:sub>
-                      <m:sup/>
-                      <m:e>
-                        <m:r>
-                          <a:rPr lang="en-US" i="1">
-                            <a:latin typeface="Cambria Math" panose="02040503050406030204" pitchFamily="18" charset="0"/>
-                          </a:rPr>
-                          <m:t>𝐼</m:t>
-                        </m:r>
-                        <m:r>
-                          <a:rPr lang="en-US" i="1">
-                            <a:latin typeface="Cambria Math" panose="02040503050406030204" pitchFamily="18" charset="0"/>
-                          </a:rPr>
-                          <m:t>[</m:t>
-                        </m:r>
-                        <m:r>
-                          <a:rPr lang="en-US" i="1">
-                            <a:latin typeface="Cambria Math" panose="02040503050406030204" pitchFamily="18" charset="0"/>
-                          </a:rPr>
-                          <m:t>𝐷</m:t>
-                        </m:r>
-                        <m:d>
-                          <m:dPr>
-                            <m:ctrlPr>
-                              <a:rPr lang="en-US" i="1">
-                                <a:latin typeface="Cambria Math" panose="02040503050406030204" pitchFamily="18" charset="0"/>
-                              </a:rPr>
-                            </m:ctrlPr>
-                          </m:dPr>
-                          <m:e>
-                            <m:sSub>
-                              <m:sSubPr>
-                                <m:ctrlPr>
-                                  <a:rPr lang="en-US" i="1">
-                                    <a:latin typeface="Cambria Math" panose="02040503050406030204" pitchFamily="18" charset="0"/>
-                                  </a:rPr>
-                                </m:ctrlPr>
-                              </m:sSubPr>
-                              <m:e>
-                                <m:r>
-                                  <a:rPr lang="en-US" i="1">
-                                    <a:latin typeface="Cambria Math" panose="02040503050406030204" pitchFamily="18" charset="0"/>
-                                  </a:rPr>
-                                  <m:t>𝑥</m:t>
-                                </m:r>
-                              </m:e>
-                              <m:sub>
-                                <m:r>
-                                  <a:rPr lang="en-US" i="1">
-                                    <a:latin typeface="Cambria Math" panose="02040503050406030204" pitchFamily="18" charset="0"/>
-                                  </a:rPr>
-                                  <m:t>𝑖</m:t>
-                                </m:r>
-                              </m:sub>
-                            </m:sSub>
-                          </m:e>
-                        </m:d>
-                        <m:r>
-                          <a:rPr lang="en-US" i="1">
-                            <a:latin typeface="Cambria Math" panose="02040503050406030204" pitchFamily="18" charset="0"/>
-                          </a:rPr>
-                          <m:t>&gt;</m:t>
-                        </m:r>
-                        <m:r>
-                          <a:rPr lang="en-US" i="1">
-                            <a:latin typeface="Cambria Math" panose="02040503050406030204" pitchFamily="18" charset="0"/>
-                          </a:rPr>
-                          <m:t>𝑡</m:t>
-                        </m:r>
-                      </m:e>
-                    </m:nary>
-                    <m:r>
-                      <a:rPr lang="en-US" i="1">
-                        <a:latin typeface="Cambria Math" panose="02040503050406030204" pitchFamily="18" charset="0"/>
-                      </a:rPr>
-                      <m:t>]</m:t>
-                    </m:r>
-                  </m:oMath>
-                </a14:m>
-                <a:endParaRPr lang="en-US" dirty="0"/>
-              </a:p>
-              <a:p>
-                <a:pPr marL="0" indent="0">
-                  <a:buNone/>
-                </a:pPr>
-                <a:endParaRPr lang="en-US" dirty="0"/>
-              </a:p>
-              <a:p>
-                <a:pPr marL="0" indent="0">
-                  <a:buNone/>
-                </a:pPr>
-                <a:endParaRPr lang="en-US" b="0" dirty="0">
-                  <a:latin typeface="+mn-lt"/>
-                </a:endParaRPr>
-              </a:p>
-            </p:txBody>
-          </p:sp>
-        </mc:Choice>
-        <mc:Fallback>
-          <p:sp>
-            <p:nvSpPr>
-              <p:cNvPr id="8" name="Content Placeholder 7">
-                <a:extLst>
-                  <a:ext uri="{FF2B5EF4-FFF2-40B4-BE49-F238E27FC236}">
-                    <a16:creationId xmlns:a16="http://schemas.microsoft.com/office/drawing/2014/main" id="{8A099783-2799-6C19-C31C-FAF24757F700}"/>
-                  </a:ext>
-                </a:extLst>
-              </p:cNvPr>
-              <p:cNvSpPr>
-                <a:spLocks noGrp="1" noRot="1" noChangeAspect="1" noMove="1" noResize="1" noEditPoints="1" noAdjustHandles="1" noChangeArrowheads="1" noChangeShapeType="1" noTextEdit="1"/>
-              </p:cNvSpPr>
-              <p:nvPr>
-                <p:ph idx="1"/>
-              </p:nvPr>
-            </p:nvSpPr>
-            <p:spPr>
-              <a:xfrm>
-                <a:off x="711200" y="1295400"/>
-                <a:ext cx="8432800" cy="4819650"/>
-              </a:xfrm>
-              <a:blipFill>
-                <a:blip r:embed="rId2"/>
-                <a:stretch>
-                  <a:fillRect l="-1205" t="-12368" b="-21316"/>
-                </a:stretch>
-              </a:blipFill>
-            </p:spPr>
-            <p:txBody>
-              <a:bodyPr/>
-              <a:lstStyle/>
-              <a:p>
-                <a:r>
-                  <a:rPr lang="en-US">
-                    <a:noFill/>
-                  </a:rPr>
-                  <a:t> </a:t>
-                </a:r>
-              </a:p>
-            </p:txBody>
-          </p:sp>
-        </mc:Fallback>
-      </mc:AlternateContent>
-      <p:pic>
-        <p:nvPicPr>
-          <p:cNvPr id="19" name="Picture 18" descr="A graph of a function&#10;&#10;Description automatically generated">
-            <a:extLst>
-              <a:ext uri="{FF2B5EF4-FFF2-40B4-BE49-F238E27FC236}">
-                <a16:creationId xmlns:a16="http://schemas.microsoft.com/office/drawing/2014/main" id="{ED5C4D9E-FC76-30ED-A950-D295A549FD58}"/>
-              </a:ext>
-            </a:extLst>
-          </p:cNvPr>
-          <p:cNvPicPr>
-            <a:picLocks noChangeAspect="1"/>
-          </p:cNvPicPr>
-          <p:nvPr/>
-        </p:nvPicPr>
-        <p:blipFill>
-          <a:blip r:embed="rId3"/>
-          <a:stretch>
-            <a:fillRect/>
-          </a:stretch>
-        </p:blipFill>
-        <p:spPr>
-          <a:xfrm>
-            <a:off x="4953000" y="2362200"/>
-            <a:ext cx="3657600" cy="2921000"/>
-          </a:xfrm>
-          <a:prstGeom prst="rect">
-            <a:avLst/>
-          </a:prstGeom>
-          <a:effectLst>
-            <a:outerShdw blurRad="50800" dist="38100" dir="2700000" algn="tl" rotWithShape="0">
-              <a:prstClr val="black">
-                <a:alpha val="40000"/>
-              </a:prstClr>
-            </a:outerShdw>
-          </a:effectLst>
-        </p:spPr>
-      </p:pic>
-      <p:pic>
-        <p:nvPicPr>
-          <p:cNvPr id="21" name="Picture 20" descr="A graph of a function&#10;&#10;Description automatically generated">
-            <a:extLst>
-              <a:ext uri="{FF2B5EF4-FFF2-40B4-BE49-F238E27FC236}">
-                <a16:creationId xmlns:a16="http://schemas.microsoft.com/office/drawing/2014/main" id="{0735ED67-9E57-1D90-753D-20058D423985}"/>
-              </a:ext>
-            </a:extLst>
-          </p:cNvPr>
-          <p:cNvPicPr>
-            <a:picLocks noChangeAspect="1"/>
-          </p:cNvPicPr>
-          <p:nvPr/>
-        </p:nvPicPr>
-        <p:blipFill>
-          <a:blip r:embed="rId4"/>
-          <a:stretch>
-            <a:fillRect/>
-          </a:stretch>
-        </p:blipFill>
-        <p:spPr>
-          <a:xfrm>
-            <a:off x="381000" y="2286000"/>
-            <a:ext cx="3657600" cy="2921000"/>
-          </a:xfrm>
-          <a:prstGeom prst="rect">
-            <a:avLst/>
-          </a:prstGeom>
-          <a:effectLst>
-            <a:outerShdw blurRad="50800" dist="38100" dir="2700000" algn="tl" rotWithShape="0">
-              <a:prstClr val="black">
-                <a:alpha val="40000"/>
-              </a:prstClr>
-            </a:outerShdw>
-          </a:effectLst>
-        </p:spPr>
-      </p:pic>
-    </p:spTree>
-    <p:extLst>
-      <p:ext uri="{BB962C8B-B14F-4D97-AF65-F5344CB8AC3E}">
-        <p14:creationId xmlns:p14="http://schemas.microsoft.com/office/powerpoint/2010/main" val="224792447"/>
-      </p:ext>
-    </p:extLst>
-  </p:cSld>
-  <p:clrMapOvr>
-    <a:masterClrMapping/>
-  </p:clrMapOvr>
-  <mc:AlternateContent xmlns:mc="http://schemas.openxmlformats.org/markup-compatibility/2006" xmlns:p14="http://schemas.microsoft.com/office/powerpoint/2010/main">
-    <mc:Choice Requires="p14">
-      <p:transition spd="med" p14:dur="700">
-        <p:fade/>
-      </p:transition>
-    </mc:Choice>
-    <mc:Fallback xmlns="">
-      <p:transition spd="med">
-        <p:fade/>
-      </p:transition>
-    </mc:Fallback>
-  </mc:AlternateContent>
-</p:sld>
-</file>
-
-<file path=ppt/slides/slide21.xml><?xml version="1.0" encoding="utf-8"?>
-<p:sld xmlns:a="http://schemas.openxmlformats.org/drawingml/2006/main" xmlns:r="http://schemas.openxmlformats.org/officeDocument/2006/relationships" xmlns:p="http://schemas.openxmlformats.org/presentationml/2006/main">
-  <p:cSld>
-    <p:spTree>
-      <p:nvGrpSpPr>
-        <p:cNvPr id="1" name="">
-          <a:extLst>
-            <a:ext uri="{FF2B5EF4-FFF2-40B4-BE49-F238E27FC236}">
               <a16:creationId xmlns:a16="http://schemas.microsoft.com/office/drawing/2014/main" id="{5CDE3E14-E81B-0001-CB18-62738DE0D9B7}"/>
             </a:ext>
           </a:extLst>
@@ -11030,7 +10963,7 @@
 </p:sld>
 </file>
 
-<file path=ppt/slides/slide22.xml><?xml version="1.0" encoding="utf-8"?>
+<file path=ppt/slides/slide21.xml><?xml version="1.0" encoding="utf-8"?>
 <p:sld xmlns:a="http://schemas.openxmlformats.org/drawingml/2006/main" xmlns:r="http://schemas.openxmlformats.org/officeDocument/2006/relationships" xmlns:p="http://schemas.openxmlformats.org/presentationml/2006/main">
   <p:cSld>
     <p:spTree>
@@ -11303,7 +11236,7 @@
 </p:sld>
 </file>
 
-<file path=ppt/slides/slide23.xml><?xml version="1.0" encoding="utf-8"?>
+<file path=ppt/slides/slide22.xml><?xml version="1.0" encoding="utf-8"?>
 <p:sld xmlns:a="http://schemas.openxmlformats.org/drawingml/2006/main" xmlns:r="http://schemas.openxmlformats.org/officeDocument/2006/relationships" xmlns:p="http://schemas.openxmlformats.org/presentationml/2006/main">
   <p:cSld>
     <p:spTree>
@@ -11839,7 +11772,7 @@
 </p:sld>
 </file>
 
-<file path=ppt/slides/slide24.xml><?xml version="1.0" encoding="utf-8"?>
+<file path=ppt/slides/slide23.xml><?xml version="1.0" encoding="utf-8"?>
 <p:sld xmlns:a="http://schemas.openxmlformats.org/drawingml/2006/main" xmlns:r="http://schemas.openxmlformats.org/officeDocument/2006/relationships" xmlns:p="http://schemas.openxmlformats.org/presentationml/2006/main">
   <p:cSld>
     <p:spTree>
@@ -12559,7 +12492,7 @@
 </p:sld>
 </file>
 
-<file path=ppt/slides/slide25.xml><?xml version="1.0" encoding="utf-8"?>
+<file path=ppt/slides/slide24.xml><?xml version="1.0" encoding="utf-8"?>
 <p:sld xmlns:a="http://schemas.openxmlformats.org/drawingml/2006/main" xmlns:r="http://schemas.openxmlformats.org/officeDocument/2006/relationships" xmlns:p="http://schemas.openxmlformats.org/presentationml/2006/main">
   <p:cSld>
     <p:spTree>
@@ -12696,7 +12629,7 @@
 </p:sld>
 </file>
 
-<file path=ppt/slides/slide26.xml><?xml version="1.0" encoding="utf-8"?>
+<file path=ppt/slides/slide25.xml><?xml version="1.0" encoding="utf-8"?>
 <p:sld xmlns:a="http://schemas.openxmlformats.org/drawingml/2006/main" xmlns:r="http://schemas.openxmlformats.org/officeDocument/2006/relationships" xmlns:p="http://schemas.openxmlformats.org/presentationml/2006/main">
   <p:cSld>
     <p:spTree>
@@ -12763,7 +12696,7 @@
 </p:sld>
 </file>
 
-<file path=ppt/slides/slide27.xml><?xml version="1.0" encoding="utf-8"?>
+<file path=ppt/slides/slide26.xml><?xml version="1.0" encoding="utf-8"?>
 <p:sld xmlns:a="http://schemas.openxmlformats.org/drawingml/2006/main" xmlns:r="http://schemas.openxmlformats.org/officeDocument/2006/relationships" xmlns:p="http://schemas.openxmlformats.org/presentationml/2006/main">
   <p:cSld>
     <p:spTree>
@@ -13496,7 +13429,7 @@
 </p:sld>
 </file>
 
-<file path=ppt/slides/slide28.xml><?xml version="1.0" encoding="utf-8"?>
+<file path=ppt/slides/slide27.xml><?xml version="1.0" encoding="utf-8"?>
 <p:sld xmlns:a="http://schemas.openxmlformats.org/drawingml/2006/main" xmlns:r="http://schemas.openxmlformats.org/officeDocument/2006/relationships" xmlns:p="http://schemas.openxmlformats.org/presentationml/2006/main">
   <p:cSld>
     <p:spTree>
@@ -14726,7 +14659,7 @@
 </p:sld>
 </file>
 
-<file path=ppt/slides/slide29.xml><?xml version="1.0" encoding="utf-8"?>
+<file path=ppt/slides/slide28.xml><?xml version="1.0" encoding="utf-8"?>
 <p:sld xmlns:a="http://schemas.openxmlformats.org/drawingml/2006/main" xmlns:r="http://schemas.openxmlformats.org/officeDocument/2006/relationships" xmlns:p="http://schemas.openxmlformats.org/presentationml/2006/main">
   <p:cSld>
     <p:spTree>
@@ -15509,962 +15442,7 @@
 </p:sld>
 </file>
 
-<file path=ppt/slides/slide3.xml><?xml version="1.0" encoding="utf-8"?>
-<p:sld xmlns:a="http://schemas.openxmlformats.org/drawingml/2006/main" xmlns:r="http://schemas.openxmlformats.org/officeDocument/2006/relationships" xmlns:p="http://schemas.openxmlformats.org/presentationml/2006/main">
-  <p:cSld>
-    <p:spTree>
-      <p:nvGrpSpPr>
-        <p:cNvPr id="1" name="">
-          <a:extLst>
-            <a:ext uri="{FF2B5EF4-FFF2-40B4-BE49-F238E27FC236}">
-              <a16:creationId xmlns:a16="http://schemas.microsoft.com/office/drawing/2014/main" id="{75DEB631-CC40-84E0-9D60-34127FF22E9E}"/>
-            </a:ext>
-          </a:extLst>
-        </p:cNvPr>
-        <p:cNvGrpSpPr/>
-        <p:nvPr/>
-      </p:nvGrpSpPr>
-      <p:grpSpPr>
-        <a:xfrm>
-          <a:off x="0" y="0"/>
-          <a:ext cx="0" cy="0"/>
-          <a:chOff x="0" y="0"/>
-          <a:chExt cx="0" cy="0"/>
-        </a:xfrm>
-      </p:grpSpPr>
-      <p:sp>
-        <p:nvSpPr>
-          <p:cNvPr id="7" name="Title 6">
-            <a:extLst>
-              <a:ext uri="{FF2B5EF4-FFF2-40B4-BE49-F238E27FC236}">
-                <a16:creationId xmlns:a16="http://schemas.microsoft.com/office/drawing/2014/main" id="{CDBFC140-278B-664E-6BCF-9B66463A74D5}"/>
-              </a:ext>
-            </a:extLst>
-          </p:cNvPr>
-          <p:cNvSpPr>
-            <a:spLocks noGrp="1"/>
-          </p:cNvSpPr>
-          <p:nvPr>
-            <p:ph type="title"/>
-          </p:nvPr>
-        </p:nvSpPr>
-        <p:spPr/>
-        <p:txBody>
-          <a:bodyPr/>
-          <a:lstStyle/>
-          <a:p>
-            <a:r>
-              <a:rPr lang="en-US" dirty="0"/>
-              <a:t>Recap</a:t>
-            </a:r>
-            <a:endParaRPr lang="en-US" dirty="0">
-              <a:solidFill>
-                <a:schemeClr val="accent1"/>
-              </a:solidFill>
-            </a:endParaRPr>
-          </a:p>
-        </p:txBody>
-      </p:sp>
-      <mc:AlternateContent xmlns:mc="http://schemas.openxmlformats.org/markup-compatibility/2006">
-        <mc:Choice xmlns:a14="http://schemas.microsoft.com/office/drawing/2010/main" Requires="a14">
-          <p:sp>
-            <p:nvSpPr>
-              <p:cNvPr id="8" name="Content Placeholder 7">
-                <a:extLst>
-                  <a:ext uri="{FF2B5EF4-FFF2-40B4-BE49-F238E27FC236}">
-                    <a16:creationId xmlns:a16="http://schemas.microsoft.com/office/drawing/2014/main" id="{3A1A1B08-1158-8B28-BD0C-D1A7508A798B}"/>
-                  </a:ext>
-                </a:extLst>
-              </p:cNvPr>
-              <p:cNvSpPr>
-                <a:spLocks noGrp="1"/>
-              </p:cNvSpPr>
-              <p:nvPr>
-                <p:ph idx="1"/>
-              </p:nvPr>
-            </p:nvSpPr>
-            <p:spPr/>
-            <p:txBody>
-              <a:bodyPr/>
-              <a:lstStyle/>
-              <a:p>
-                <a:pPr marL="457200" indent="-457200">
-                  <a:buFont typeface="+mj-lt"/>
-                  <a:buAutoNum type="arabicPeriod" startAt="3"/>
-                </a:pPr>
-                <a:r>
-                  <a:rPr lang="en-US" dirty="0"/>
-                  <a:t>The empirical risk is an </a:t>
-                </a:r>
-                <a:r>
-                  <a:rPr lang="en-US" i="1" dirty="0"/>
-                  <a:t>unbiased</a:t>
-                </a:r>
-                <a:r>
-                  <a:rPr lang="en-US" dirty="0"/>
-                  <a:t> Monte Carlo estimate of the risk functional</a:t>
-                </a:r>
-              </a:p>
-              <a:p>
-                <a:pPr marL="0" indent="0">
-                  <a:buNone/>
-                </a:pPr>
-                <a14:m>
-                  <m:oMathPara xmlns:m="http://schemas.openxmlformats.org/officeDocument/2006/math">
-                    <m:oMath>
-                      <m:r>
-                        <a:rPr lang="en-US" b="0" i="1" smtClean="0">
-                          <a:latin typeface="Cambria Math" panose="02040503050406030204" pitchFamily="18" charset="0"/>
-                        </a:rPr>
-                        <m:t>𝑅</m:t>
-                      </m:r>
-                      <m:d>
-                        <m:dPr>
-                          <m:begChr m:val="["/>
-                          <m:endChr m:val="]"/>
-                          <m:ctrlPr>
-                            <a:rPr lang="en-US" b="0" i="1" smtClean="0">
-                              <a:latin typeface="Cambria Math" panose="02040503050406030204" pitchFamily="18" charset="0"/>
-                            </a:rPr>
-                          </m:ctrlPr>
-                        </m:dPr>
-                        <m:e>
-                          <m:r>
-                            <a:rPr lang="en-US" b="0" i="1" smtClean="0">
-                              <a:latin typeface="Cambria Math" panose="02040503050406030204" pitchFamily="18" charset="0"/>
-                            </a:rPr>
-                            <m:t>𝑓</m:t>
-                          </m:r>
-                        </m:e>
-                      </m:d>
-                      <m:r>
-                        <a:rPr lang="en-US" b="0" i="1" smtClean="0">
-                          <a:latin typeface="Cambria Math" panose="02040503050406030204" pitchFamily="18" charset="0"/>
-                        </a:rPr>
-                        <m:t>=</m:t>
-                      </m:r>
-                      <m:nary>
-                        <m:naryPr>
-                          <m:limLoc m:val="undOvr"/>
-                          <m:subHide m:val="on"/>
-                          <m:supHide m:val="on"/>
-                          <m:ctrlPr>
-                            <a:rPr lang="en-US" b="0" i="1" smtClean="0">
-                              <a:latin typeface="Cambria Math" panose="02040503050406030204" pitchFamily="18" charset="0"/>
-                            </a:rPr>
-                          </m:ctrlPr>
-                        </m:naryPr>
-                        <m:sub/>
-                        <m:sup/>
-                        <m:e>
-                          <m:r>
-                            <a:rPr lang="en-US" b="0" i="1" smtClean="0">
-                              <a:latin typeface="Cambria Math" panose="02040503050406030204" pitchFamily="18" charset="0"/>
-                            </a:rPr>
-                            <m:t>𝑑𝑥</m:t>
-                          </m:r>
-                        </m:e>
-                      </m:nary>
-                      <m:nary>
-                        <m:naryPr>
-                          <m:limLoc m:val="undOvr"/>
-                          <m:subHide m:val="on"/>
-                          <m:supHide m:val="on"/>
-                          <m:ctrlPr>
-                            <a:rPr lang="en-US" b="0" i="1" smtClean="0">
-                              <a:latin typeface="Cambria Math" panose="02040503050406030204" pitchFamily="18" charset="0"/>
-                            </a:rPr>
-                          </m:ctrlPr>
-                        </m:naryPr>
-                        <m:sub/>
-                        <m:sup/>
-                        <m:e>
-                          <m:r>
-                            <a:rPr lang="en-US" b="0" i="1" smtClean="0">
-                              <a:latin typeface="Cambria Math" panose="02040503050406030204" pitchFamily="18" charset="0"/>
-                            </a:rPr>
-                            <m:t>𝑑𝑦</m:t>
-                          </m:r>
-                          <m:r>
-                            <a:rPr lang="en-US" b="0" i="1" smtClean="0">
-                              <a:latin typeface="Cambria Math" panose="02040503050406030204" pitchFamily="18" charset="0"/>
-                            </a:rPr>
-                            <m:t> </m:t>
-                          </m:r>
-                          <m:r>
-                            <a:rPr lang="en-US" i="1">
-                              <a:latin typeface="Cambria Math" panose="02040503050406030204" pitchFamily="18" charset="0"/>
-                            </a:rPr>
-                            <m:t>𝐿</m:t>
-                          </m:r>
-                          <m:d>
-                            <m:dPr>
-                              <m:ctrlPr>
-                                <a:rPr lang="en-US" i="1">
-                                  <a:latin typeface="Cambria Math" panose="02040503050406030204" pitchFamily="18" charset="0"/>
-                                </a:rPr>
-                              </m:ctrlPr>
-                            </m:dPr>
-                            <m:e>
-                              <m:r>
-                                <a:rPr lang="en-US" i="1">
-                                  <a:latin typeface="Cambria Math" panose="02040503050406030204" pitchFamily="18" charset="0"/>
-                                </a:rPr>
-                                <m:t>𝑦</m:t>
-                              </m:r>
-                              <m:r>
-                                <a:rPr lang="en-US" i="1">
-                                  <a:latin typeface="Cambria Math" panose="02040503050406030204" pitchFamily="18" charset="0"/>
-                                </a:rPr>
-                                <m:t>, </m:t>
-                              </m:r>
-                              <m:r>
-                                <a:rPr lang="en-US" i="1">
-                                  <a:latin typeface="Cambria Math" panose="02040503050406030204" pitchFamily="18" charset="0"/>
-                                </a:rPr>
-                                <m:t>𝑓</m:t>
-                              </m:r>
-                            </m:e>
-                          </m:d>
-                          <m:r>
-                            <a:rPr lang="en-US" i="1">
-                              <a:latin typeface="Cambria Math" panose="02040503050406030204" pitchFamily="18" charset="0"/>
-                            </a:rPr>
-                            <m:t> </m:t>
-                          </m:r>
-                          <m:r>
-                            <a:rPr lang="en-US" i="1">
-                              <a:latin typeface="Cambria Math" panose="02040503050406030204" pitchFamily="18" charset="0"/>
-                            </a:rPr>
-                            <m:t>𝑝</m:t>
-                          </m:r>
-                          <m:d>
-                            <m:dPr>
-                              <m:ctrlPr>
-                                <a:rPr lang="en-US" i="1">
-                                  <a:latin typeface="Cambria Math" panose="02040503050406030204" pitchFamily="18" charset="0"/>
-                                </a:rPr>
-                              </m:ctrlPr>
-                            </m:dPr>
-                            <m:e>
-                              <m:r>
-                                <a:rPr lang="en-US" i="1">
-                                  <a:latin typeface="Cambria Math" panose="02040503050406030204" pitchFamily="18" charset="0"/>
-                                </a:rPr>
-                                <m:t>𝑥</m:t>
-                              </m:r>
-                              <m:r>
-                                <a:rPr lang="en-US" i="1">
-                                  <a:latin typeface="Cambria Math" panose="02040503050406030204" pitchFamily="18" charset="0"/>
-                                </a:rPr>
-                                <m:t>, </m:t>
-                              </m:r>
-                              <m:r>
-                                <a:rPr lang="en-US" i="1">
-                                  <a:latin typeface="Cambria Math" panose="02040503050406030204" pitchFamily="18" charset="0"/>
-                                </a:rPr>
-                                <m:t>𝑦</m:t>
-                              </m:r>
-                            </m:e>
-                          </m:d>
-                        </m:e>
-                      </m:nary>
-                    </m:oMath>
-                  </m:oMathPara>
-                </a14:m>
-                <a:endParaRPr lang="en-US" dirty="0"/>
-              </a:p>
-              <a:p>
-                <a:pPr marL="0" indent="0">
-                  <a:buNone/>
-                </a:pPr>
-                <a:r>
-                  <a:rPr lang="en-US" dirty="0"/>
-                  <a:t>      where </a:t>
-                </a:r>
-                <a14:m>
-                  <m:oMath xmlns:m="http://schemas.openxmlformats.org/officeDocument/2006/math">
-                    <m:r>
-                      <a:rPr lang="en-US" i="1" smtClean="0">
-                        <a:solidFill>
-                          <a:srgbClr val="0033CC"/>
-                        </a:solidFill>
-                        <a:latin typeface="Cambria Math" panose="02040503050406030204" pitchFamily="18" charset="0"/>
-                      </a:rPr>
-                      <m:t>𝑝</m:t>
-                    </m:r>
-                    <m:d>
-                      <m:dPr>
-                        <m:ctrlPr>
-                          <a:rPr lang="en-US" i="1">
-                            <a:solidFill>
-                              <a:srgbClr val="0033CC"/>
-                            </a:solidFill>
-                            <a:latin typeface="Cambria Math" panose="02040503050406030204" pitchFamily="18" charset="0"/>
-                          </a:rPr>
-                        </m:ctrlPr>
-                      </m:dPr>
-                      <m:e>
-                        <m:r>
-                          <a:rPr lang="en-US" i="1">
-                            <a:solidFill>
-                              <a:srgbClr val="0033CC"/>
-                            </a:solidFill>
-                            <a:latin typeface="Cambria Math" panose="02040503050406030204" pitchFamily="18" charset="0"/>
-                          </a:rPr>
-                          <m:t>𝑥</m:t>
-                        </m:r>
-                        <m:r>
-                          <a:rPr lang="en-US" i="1">
-                            <a:solidFill>
-                              <a:srgbClr val="0033CC"/>
-                            </a:solidFill>
-                            <a:latin typeface="Cambria Math" panose="02040503050406030204" pitchFamily="18" charset="0"/>
-                          </a:rPr>
-                          <m:t>, </m:t>
-                        </m:r>
-                        <m:r>
-                          <a:rPr lang="en-US" i="1">
-                            <a:solidFill>
-                              <a:srgbClr val="0033CC"/>
-                            </a:solidFill>
-                            <a:latin typeface="Cambria Math" panose="02040503050406030204" pitchFamily="18" charset="0"/>
-                          </a:rPr>
-                          <m:t>𝑦</m:t>
-                        </m:r>
-                      </m:e>
-                    </m:d>
-                    <m:r>
-                      <a:rPr lang="en-US" b="0" i="1" smtClean="0">
-                        <a:solidFill>
-                          <a:srgbClr val="0033CC"/>
-                        </a:solidFill>
-                        <a:latin typeface="Cambria Math" panose="02040503050406030204" pitchFamily="18" charset="0"/>
-                      </a:rPr>
-                      <m:t>𝑑𝑥𝑑𝑦</m:t>
-                    </m:r>
-                  </m:oMath>
-                </a14:m>
-                <a:r>
-                  <a:rPr lang="en-US" dirty="0"/>
-                  <a:t> the probability of the data.</a:t>
-                </a:r>
-                <a:br>
-                  <a:rPr lang="en-US" dirty="0"/>
-                </a:br>
-                <a:endParaRPr lang="en-US" dirty="0"/>
-              </a:p>
-              <a:p>
-                <a:pPr marL="457200" indent="-457200">
-                  <a:buFont typeface="+mj-lt"/>
-                  <a:buAutoNum type="arabicPeriod" startAt="4"/>
-                </a:pPr>
-                <a:r>
-                  <a:rPr lang="en-US" dirty="0"/>
-                  <a:t>Given </a:t>
-                </a:r>
-                <a14:m>
-                  <m:oMath xmlns:m="http://schemas.openxmlformats.org/officeDocument/2006/math">
-                    <m:r>
-                      <a:rPr lang="en-US" b="0" i="1" smtClean="0">
-                        <a:solidFill>
-                          <a:srgbClr val="0033CC"/>
-                        </a:solidFill>
-                        <a:latin typeface="Cambria Math" panose="02040503050406030204" pitchFamily="18" charset="0"/>
-                      </a:rPr>
-                      <m:t>𝑓</m:t>
-                    </m:r>
-                  </m:oMath>
-                </a14:m>
-                <a:r>
-                  <a:rPr lang="en-US" dirty="0"/>
-                  <a:t>, with inputs </a:t>
-                </a:r>
-                <a14:m>
-                  <m:oMath xmlns:m="http://schemas.openxmlformats.org/officeDocument/2006/math">
-                    <m:r>
-                      <a:rPr lang="en-US" i="1">
-                        <a:solidFill>
-                          <a:srgbClr val="0033CC"/>
-                        </a:solidFill>
-                        <a:latin typeface="Cambria Math" panose="02040503050406030204" pitchFamily="18" charset="0"/>
-                      </a:rPr>
-                      <m:t>𝑥</m:t>
-                    </m:r>
-                  </m:oMath>
-                </a14:m>
-                <a:r>
-                  <a:rPr lang="en-US" dirty="0"/>
-                  <a:t> and targets </a:t>
-                </a:r>
-                <a14:m>
-                  <m:oMath xmlns:m="http://schemas.openxmlformats.org/officeDocument/2006/math">
-                    <m:r>
-                      <a:rPr lang="en-US" i="1">
-                        <a:solidFill>
-                          <a:srgbClr val="0033CC"/>
-                        </a:solidFill>
-                        <a:latin typeface="Cambria Math" panose="02040503050406030204" pitchFamily="18" charset="0"/>
-                      </a:rPr>
-                      <m:t>𝑦</m:t>
-                    </m:r>
-                  </m:oMath>
-                </a14:m>
-                <a:r>
-                  <a:rPr lang="en-US" dirty="0"/>
-                  <a:t>, and the loss </a:t>
-                </a:r>
-                <a14:m>
-                  <m:oMath xmlns:m="http://schemas.openxmlformats.org/officeDocument/2006/math">
-                    <m:r>
-                      <a:rPr lang="en-US" i="1" smtClean="0">
-                        <a:solidFill>
-                          <a:srgbClr val="0033CC"/>
-                        </a:solidFill>
-                        <a:latin typeface="Cambria Math" panose="02040503050406030204" pitchFamily="18" charset="0"/>
-                      </a:rPr>
-                      <m:t>𝐿</m:t>
-                    </m:r>
-                    <m:d>
-                      <m:dPr>
-                        <m:ctrlPr>
-                          <a:rPr lang="en-US" i="1">
-                            <a:solidFill>
-                              <a:srgbClr val="0033CC"/>
-                            </a:solidFill>
-                            <a:latin typeface="Cambria Math" panose="02040503050406030204" pitchFamily="18" charset="0"/>
-                          </a:rPr>
-                        </m:ctrlPr>
-                      </m:dPr>
-                      <m:e>
-                        <m:r>
-                          <a:rPr lang="en-US" i="1">
-                            <a:solidFill>
-                              <a:srgbClr val="0033CC"/>
-                            </a:solidFill>
-                            <a:latin typeface="Cambria Math" panose="02040503050406030204" pitchFamily="18" charset="0"/>
-                          </a:rPr>
-                          <m:t>𝑦</m:t>
-                        </m:r>
-                        <m:r>
-                          <a:rPr lang="en-US" i="1">
-                            <a:solidFill>
-                              <a:srgbClr val="0033CC"/>
-                            </a:solidFill>
-                            <a:latin typeface="Cambria Math" panose="02040503050406030204" pitchFamily="18" charset="0"/>
-                          </a:rPr>
-                          <m:t>, </m:t>
-                        </m:r>
-                        <m:r>
-                          <a:rPr lang="en-US" i="1">
-                            <a:solidFill>
-                              <a:srgbClr val="0033CC"/>
-                            </a:solidFill>
-                            <a:latin typeface="Cambria Math" panose="02040503050406030204" pitchFamily="18" charset="0"/>
-                          </a:rPr>
-                          <m:t>𝑓</m:t>
-                        </m:r>
-                      </m:e>
-                    </m:d>
-                  </m:oMath>
-                </a14:m>
-                <a:r>
-                  <a:rPr lang="en-US" dirty="0"/>
-                  <a:t>, minimizing the risk functional yields the important result</a:t>
-                </a:r>
-              </a:p>
-              <a:p>
-                <a:pPr marL="0" indent="0">
-                  <a:buNone/>
-                </a:pPr>
-                <a:br>
-                  <a:rPr lang="en-US" dirty="0"/>
-                </a:br>
-                <a:endParaRPr lang="en-US" dirty="0"/>
-              </a:p>
-              <a:p>
-                <a:pPr marL="0" indent="0">
-                  <a:buNone/>
-                </a:pPr>
-                <a:r>
-                  <a:rPr lang="en-US" dirty="0"/>
-                  <a:t>  </a:t>
-                </a:r>
-              </a:p>
-            </p:txBody>
-          </p:sp>
-        </mc:Choice>
-        <mc:Fallback>
-          <p:sp>
-            <p:nvSpPr>
-              <p:cNvPr id="8" name="Content Placeholder 7">
-                <a:extLst>
-                  <a:ext uri="{FF2B5EF4-FFF2-40B4-BE49-F238E27FC236}">
-                    <a16:creationId xmlns:a16="http://schemas.microsoft.com/office/drawing/2014/main" id="{3A1A1B08-1158-8B28-BD0C-D1A7508A798B}"/>
-                  </a:ext>
-                </a:extLst>
-              </p:cNvPr>
-              <p:cNvSpPr>
-                <a:spLocks noGrp="1" noRot="1" noChangeAspect="1" noMove="1" noResize="1" noEditPoints="1" noAdjustHandles="1" noChangeArrowheads="1" noChangeShapeType="1" noTextEdit="1"/>
-              </p:cNvSpPr>
-              <p:nvPr>
-                <p:ph idx="1"/>
-              </p:nvPr>
-            </p:nvSpPr>
-            <p:spPr>
-              <a:blipFill>
-                <a:blip r:embed="rId2"/>
-                <a:stretch>
-                  <a:fillRect l="-1142" t="-15789" r="-1631"/>
-                </a:stretch>
-              </a:blipFill>
-            </p:spPr>
-            <p:txBody>
-              <a:bodyPr/>
-              <a:lstStyle/>
-              <a:p>
-                <a:r>
-                  <a:rPr lang="en-US">
-                    <a:noFill/>
-                  </a:rPr>
-                  <a:t> </a:t>
-                </a:r>
-              </a:p>
-            </p:txBody>
-          </p:sp>
-        </mc:Fallback>
-      </mc:AlternateContent>
-      <mc:AlternateContent xmlns:mc="http://schemas.openxmlformats.org/markup-compatibility/2006">
-        <mc:Choice xmlns:a14="http://schemas.microsoft.com/office/drawing/2010/main" Requires="a14">
-          <p:sp>
-            <p:nvSpPr>
-              <p:cNvPr id="2" name="TextBox 1">
-                <a:extLst>
-                  <a:ext uri="{FF2B5EF4-FFF2-40B4-BE49-F238E27FC236}">
-                    <a16:creationId xmlns:a16="http://schemas.microsoft.com/office/drawing/2014/main" id="{3AAE38DF-53DF-D7EE-5BD0-2DC22CA37FCF}"/>
-                  </a:ext>
-                </a:extLst>
-              </p:cNvPr>
-              <p:cNvSpPr txBox="1"/>
-              <p:nvPr/>
-            </p:nvSpPr>
-            <p:spPr>
-              <a:xfrm>
-                <a:off x="1768641" y="4953000"/>
-                <a:ext cx="6003759" cy="1060931"/>
-              </a:xfrm>
-              <a:prstGeom prst="rect">
-                <a:avLst/>
-              </a:prstGeom>
-              <a:solidFill>
-                <a:srgbClr val="FFFC8F"/>
-              </a:solidFill>
-              <a:ln>
-                <a:solidFill>
-                  <a:schemeClr val="tx1"/>
-                </a:solidFill>
-              </a:ln>
-              <a:effectLst>
-                <a:outerShdw blurRad="50800" dist="38100" dir="2700000" algn="tl" rotWithShape="0">
-                  <a:prstClr val="black">
-                    <a:alpha val="40000"/>
-                  </a:prstClr>
-                </a:outerShdw>
-              </a:effectLst>
-            </p:spPr>
-            <p:txBody>
-              <a:bodyPr wrap="none" rtlCol="0">
-                <a:spAutoFit/>
-              </a:bodyPr>
-              <a:lstStyle/>
-              <a:p>
-                <a:pPr/>
-                <a14:m>
-                  <m:oMathPara xmlns:m="http://schemas.openxmlformats.org/officeDocument/2006/math">
-                    <m:oMath>
-                      <m:nary>
-                        <m:naryPr>
-                          <m:limLoc m:val="undOvr"/>
-                          <m:subHide m:val="on"/>
-                          <m:supHide m:val="on"/>
-                          <m:ctrlPr>
-                            <a:rPr lang="en-US" b="0" i="1" smtClean="0">
-                              <a:latin typeface="Cambria Math" panose="02040503050406030204" pitchFamily="18" charset="0"/>
-                            </a:rPr>
-                          </m:ctrlPr>
-                        </m:naryPr>
-                        <m:sub/>
-                        <m:sup/>
-                        <m:e>
-                          <m:r>
-                            <a:rPr lang="en-US" b="0" i="1" smtClean="0">
-                              <a:latin typeface="Cambria Math" panose="02040503050406030204" pitchFamily="18" charset="0"/>
-                            </a:rPr>
-                            <m:t>𝑑𝑦</m:t>
-                          </m:r>
-                          <m:r>
-                            <a:rPr lang="en-US" b="0" i="1" smtClean="0">
-                              <a:latin typeface="Cambria Math" panose="02040503050406030204" pitchFamily="18" charset="0"/>
-                            </a:rPr>
-                            <m:t> </m:t>
-                          </m:r>
-                          <m:f>
-                            <m:fPr>
-                              <m:ctrlPr>
-                                <a:rPr lang="en-US" b="0" i="1" smtClean="0">
-                                  <a:latin typeface="Cambria Math" panose="02040503050406030204" pitchFamily="18" charset="0"/>
-                                </a:rPr>
-                              </m:ctrlPr>
-                            </m:fPr>
-                            <m:num>
-                              <m:r>
-                                <a:rPr lang="en-US" b="0" i="1" smtClean="0">
-                                  <a:latin typeface="Cambria Math" panose="02040503050406030204" pitchFamily="18" charset="0"/>
-                                </a:rPr>
-                                <m:t>𝜕</m:t>
-                              </m:r>
-                              <m:r>
-                                <a:rPr lang="en-US" b="0" i="1" smtClean="0">
-                                  <a:latin typeface="Cambria Math" panose="02040503050406030204" pitchFamily="18" charset="0"/>
-                                </a:rPr>
-                                <m:t>𝐿</m:t>
-                              </m:r>
-                            </m:num>
-                            <m:den>
-                              <m:r>
-                                <a:rPr lang="en-US" b="0" i="1" smtClean="0">
-                                  <a:latin typeface="Cambria Math" panose="02040503050406030204" pitchFamily="18" charset="0"/>
-                                </a:rPr>
-                                <m:t>𝜕</m:t>
-                              </m:r>
-                              <m:r>
-                                <a:rPr lang="en-US" b="0" i="1" smtClean="0">
-                                  <a:latin typeface="Cambria Math" panose="02040503050406030204" pitchFamily="18" charset="0"/>
-                                </a:rPr>
-                                <m:t>𝑓</m:t>
-                              </m:r>
-                            </m:den>
-                          </m:f>
-                          <m:r>
-                            <a:rPr lang="en-US" i="1">
-                              <a:latin typeface="Cambria Math" panose="02040503050406030204" pitchFamily="18" charset="0"/>
-                            </a:rPr>
-                            <m:t>𝑝</m:t>
-                          </m:r>
-                          <m:d>
-                            <m:dPr>
-                              <m:ctrlPr>
-                                <a:rPr lang="en-US" b="0" i="1" smtClean="0">
-                                  <a:latin typeface="Cambria Math" panose="02040503050406030204" pitchFamily="18" charset="0"/>
-                                </a:rPr>
-                              </m:ctrlPr>
-                            </m:dPr>
-                            <m:e>
-                              <m:r>
-                                <a:rPr lang="en-US" b="0" i="1" smtClean="0">
-                                  <a:latin typeface="Cambria Math" panose="02040503050406030204" pitchFamily="18" charset="0"/>
-                                </a:rPr>
-                                <m:t>𝑦</m:t>
-                              </m:r>
-                              <m:r>
-                                <a:rPr lang="en-US" b="0" i="1" smtClean="0">
-                                  <a:latin typeface="Cambria Math" panose="02040503050406030204" pitchFamily="18" charset="0"/>
-                                </a:rPr>
-                                <m:t> | </m:t>
-                              </m:r>
-                              <m:r>
-                                <a:rPr lang="en-US" i="1">
-                                  <a:latin typeface="Cambria Math" panose="02040503050406030204" pitchFamily="18" charset="0"/>
-                                </a:rPr>
-                                <m:t>𝑥</m:t>
-                              </m:r>
-                            </m:e>
-                          </m:d>
-                          <m:r>
-                            <a:rPr lang="en-US" b="0" i="1" smtClean="0">
-                              <a:latin typeface="Cambria Math" panose="02040503050406030204" pitchFamily="18" charset="0"/>
-                            </a:rPr>
-                            <m:t>=0</m:t>
-                          </m:r>
-                          <m:r>
-                            <a:rPr lang="en-US" i="1">
-                              <a:latin typeface="Cambria Math" panose="02040503050406030204" pitchFamily="18" charset="0"/>
-                              <a:ea typeface="Cambria Math" panose="02040503050406030204" pitchFamily="18" charset="0"/>
-                            </a:rPr>
-                            <m:t>→</m:t>
-                          </m:r>
-                          <m:sSub>
-                            <m:sSubPr>
-                              <m:ctrlPr>
-                                <a:rPr lang="en-US" b="0" i="1" smtClean="0">
-                                  <a:solidFill>
-                                    <a:srgbClr val="0033CC"/>
-                                  </a:solidFill>
-                                  <a:latin typeface="Cambria Math" panose="02040503050406030204" pitchFamily="18" charset="0"/>
-                                  <a:ea typeface="Cambria Math" panose="02040503050406030204" pitchFamily="18" charset="0"/>
-                                </a:rPr>
-                              </m:ctrlPr>
-                            </m:sSubPr>
-                            <m:e>
-                              <m:r>
-                                <a:rPr lang="en-US" b="0" i="1" smtClean="0">
-                                  <a:solidFill>
-                                    <a:srgbClr val="0033CC"/>
-                                  </a:solidFill>
-                                  <a:latin typeface="Cambria Math" panose="02040503050406030204" pitchFamily="18" charset="0"/>
-                                  <a:ea typeface="Cambria Math" panose="02040503050406030204" pitchFamily="18" charset="0"/>
-                                </a:rPr>
-                                <m:t>𝔼</m:t>
-                              </m:r>
-                            </m:e>
-                            <m:sub>
-                              <m:r>
-                                <a:rPr lang="en-US" b="0" i="1" smtClean="0">
-                                  <a:solidFill>
-                                    <a:srgbClr val="0033CC"/>
-                                  </a:solidFill>
-                                  <a:latin typeface="Cambria Math" panose="02040503050406030204" pitchFamily="18" charset="0"/>
-                                  <a:ea typeface="Cambria Math" panose="02040503050406030204" pitchFamily="18" charset="0"/>
-                                </a:rPr>
-                                <m:t>𝑦</m:t>
-                              </m:r>
-                              <m:r>
-                                <a:rPr lang="en-US" b="0" i="1" smtClean="0">
-                                  <a:solidFill>
-                                    <a:srgbClr val="0033CC"/>
-                                  </a:solidFill>
-                                  <a:latin typeface="Cambria Math" panose="02040503050406030204" pitchFamily="18" charset="0"/>
-                                  <a:ea typeface="Cambria Math" panose="02040503050406030204" pitchFamily="18" charset="0"/>
-                                </a:rPr>
-                                <m:t>∼</m:t>
-                              </m:r>
-                              <m:r>
-                                <a:rPr lang="en-US" b="0" i="1" smtClean="0">
-                                  <a:solidFill>
-                                    <a:srgbClr val="0033CC"/>
-                                  </a:solidFill>
-                                  <a:latin typeface="Cambria Math" panose="02040503050406030204" pitchFamily="18" charset="0"/>
-                                  <a:ea typeface="Cambria Math" panose="02040503050406030204" pitchFamily="18" charset="0"/>
-                                </a:rPr>
-                                <m:t>𝑝</m:t>
-                              </m:r>
-                              <m:d>
-                                <m:dPr>
-                                  <m:ctrlPr>
-                                    <a:rPr lang="en-US" b="0" i="1" smtClean="0">
-                                      <a:solidFill>
-                                        <a:srgbClr val="0033CC"/>
-                                      </a:solidFill>
-                                      <a:latin typeface="Cambria Math" panose="02040503050406030204" pitchFamily="18" charset="0"/>
-                                      <a:ea typeface="Cambria Math" panose="02040503050406030204" pitchFamily="18" charset="0"/>
-                                    </a:rPr>
-                                  </m:ctrlPr>
-                                </m:dPr>
-                                <m:e>
-                                  <m:r>
-                                    <a:rPr lang="en-US" b="0" i="1" smtClean="0">
-                                      <a:solidFill>
-                                        <a:srgbClr val="0033CC"/>
-                                      </a:solidFill>
-                                      <a:latin typeface="Cambria Math" panose="02040503050406030204" pitchFamily="18" charset="0"/>
-                                      <a:ea typeface="Cambria Math" panose="02040503050406030204" pitchFamily="18" charset="0"/>
-                                    </a:rPr>
-                                    <m:t>𝑦</m:t>
-                                  </m:r>
-                                </m:e>
-                                <m:e>
-                                  <m:r>
-                                    <a:rPr lang="en-US" b="0" i="1" smtClean="0">
-                                      <a:solidFill>
-                                        <a:srgbClr val="0033CC"/>
-                                      </a:solidFill>
-                                      <a:latin typeface="Cambria Math" panose="02040503050406030204" pitchFamily="18" charset="0"/>
-                                      <a:ea typeface="Cambria Math" panose="02040503050406030204" pitchFamily="18" charset="0"/>
-                                    </a:rPr>
-                                    <m:t>𝑥</m:t>
-                                  </m:r>
-                                </m:e>
-                              </m:d>
-                            </m:sub>
-                          </m:sSub>
-                          <m:r>
-                            <a:rPr lang="en-US" b="0" i="1" smtClean="0">
-                              <a:latin typeface="Cambria Math" panose="02040503050406030204" pitchFamily="18" charset="0"/>
-                              <a:ea typeface="Cambria Math" panose="02040503050406030204" pitchFamily="18" charset="0"/>
-                            </a:rPr>
-                            <m:t> </m:t>
-                          </m:r>
-                          <m:d>
-                            <m:dPr>
-                              <m:begChr m:val="["/>
-                              <m:endChr m:val="]"/>
-                              <m:ctrlPr>
-                                <a:rPr lang="en-US" i="1">
-                                  <a:solidFill>
-                                    <a:srgbClr val="0033CC"/>
-                                  </a:solidFill>
-                                  <a:latin typeface="Cambria Math" panose="02040503050406030204" pitchFamily="18" charset="0"/>
-                                </a:rPr>
-                              </m:ctrlPr>
-                            </m:dPr>
-                            <m:e>
-                              <m:f>
-                                <m:fPr>
-                                  <m:ctrlPr>
-                                    <a:rPr lang="en-US" i="1">
-                                      <a:solidFill>
-                                        <a:srgbClr val="0033CC"/>
-                                      </a:solidFill>
-                                      <a:latin typeface="Cambria Math" panose="02040503050406030204" pitchFamily="18" charset="0"/>
-                                    </a:rPr>
-                                  </m:ctrlPr>
-                                </m:fPr>
-                                <m:num>
-                                  <m:r>
-                                    <a:rPr lang="en-US" i="1">
-                                      <a:solidFill>
-                                        <a:srgbClr val="0033CC"/>
-                                      </a:solidFill>
-                                      <a:latin typeface="Cambria Math" panose="02040503050406030204" pitchFamily="18" charset="0"/>
-                                    </a:rPr>
-                                    <m:t>𝜕</m:t>
-                                  </m:r>
-                                  <m:r>
-                                    <a:rPr lang="en-US" i="1">
-                                      <a:solidFill>
-                                        <a:srgbClr val="0033CC"/>
-                                      </a:solidFill>
-                                      <a:latin typeface="Cambria Math" panose="02040503050406030204" pitchFamily="18" charset="0"/>
-                                    </a:rPr>
-                                    <m:t>𝐿</m:t>
-                                  </m:r>
-                                </m:num>
-                                <m:den>
-                                  <m:r>
-                                    <a:rPr lang="en-US" i="1">
-                                      <a:solidFill>
-                                        <a:srgbClr val="0033CC"/>
-                                      </a:solidFill>
-                                      <a:latin typeface="Cambria Math" panose="02040503050406030204" pitchFamily="18" charset="0"/>
-                                    </a:rPr>
-                                    <m:t>𝜕</m:t>
-                                  </m:r>
-                                  <m:r>
-                                    <a:rPr lang="en-US" i="1">
-                                      <a:solidFill>
-                                        <a:srgbClr val="0033CC"/>
-                                      </a:solidFill>
-                                      <a:latin typeface="Cambria Math" panose="02040503050406030204" pitchFamily="18" charset="0"/>
-                                    </a:rPr>
-                                    <m:t>𝑓</m:t>
-                                  </m:r>
-                                </m:den>
-                              </m:f>
-                            </m:e>
-                          </m:d>
-                          <m:r>
-                            <a:rPr lang="en-US" b="0" i="1" smtClean="0">
-                              <a:solidFill>
-                                <a:srgbClr val="0033CC"/>
-                              </a:solidFill>
-                              <a:latin typeface="Cambria Math" panose="02040503050406030204" pitchFamily="18" charset="0"/>
-                              <a:ea typeface="Cambria Math" panose="02040503050406030204" pitchFamily="18" charset="0"/>
-                            </a:rPr>
-                            <m:t>=0</m:t>
-                          </m:r>
-                        </m:e>
-                      </m:nary>
-                    </m:oMath>
-                  </m:oMathPara>
-                </a14:m>
-                <a:endParaRPr lang="en-US" dirty="0"/>
-              </a:p>
-            </p:txBody>
-          </p:sp>
-        </mc:Choice>
-        <mc:Fallback>
-          <p:sp>
-            <p:nvSpPr>
-              <p:cNvPr id="2" name="TextBox 1">
-                <a:extLst>
-                  <a:ext uri="{FF2B5EF4-FFF2-40B4-BE49-F238E27FC236}">
-                    <a16:creationId xmlns:a16="http://schemas.microsoft.com/office/drawing/2014/main" id="{3AAE38DF-53DF-D7EE-5BD0-2DC22CA37FCF}"/>
-                  </a:ext>
-                </a:extLst>
-              </p:cNvPr>
-              <p:cNvSpPr txBox="1">
-                <a:spLocks noRot="1" noChangeAspect="1" noMove="1" noResize="1" noEditPoints="1" noAdjustHandles="1" noChangeArrowheads="1" noChangeShapeType="1" noTextEdit="1"/>
-              </p:cNvSpPr>
-              <p:nvPr/>
-            </p:nvSpPr>
-            <p:spPr>
-              <a:xfrm>
-                <a:off x="1768641" y="4953000"/>
-                <a:ext cx="6003759" cy="1060931"/>
-              </a:xfrm>
-              <a:prstGeom prst="rect">
-                <a:avLst/>
-              </a:prstGeom>
-              <a:blipFill>
-                <a:blip r:embed="rId3"/>
-                <a:stretch>
-                  <a:fillRect/>
-                </a:stretch>
-              </a:blipFill>
-              <a:ln>
-                <a:solidFill>
-                  <a:schemeClr val="tx1"/>
-                </a:solidFill>
-              </a:ln>
-              <a:effectLst>
-                <a:outerShdw blurRad="50800" dist="38100" dir="2700000" algn="tl" rotWithShape="0">
-                  <a:prstClr val="black">
-                    <a:alpha val="40000"/>
-                  </a:prstClr>
-                </a:outerShdw>
-              </a:effectLst>
-            </p:spPr>
-            <p:txBody>
-              <a:bodyPr/>
-              <a:lstStyle/>
-              <a:p>
-                <a:r>
-                  <a:rPr lang="en-US">
-                    <a:noFill/>
-                  </a:rPr>
-                  <a:t> </a:t>
-                </a:r>
-              </a:p>
-            </p:txBody>
-          </p:sp>
-        </mc:Fallback>
-      </mc:AlternateContent>
-    </p:spTree>
-    <p:extLst>
-      <p:ext uri="{BB962C8B-B14F-4D97-AF65-F5344CB8AC3E}">
-        <p14:creationId xmlns:p14="http://schemas.microsoft.com/office/powerpoint/2010/main" val="3962134214"/>
-      </p:ext>
-    </p:extLst>
-  </p:cSld>
-  <p:clrMapOvr>
-    <a:masterClrMapping/>
-  </p:clrMapOvr>
-  <mc:AlternateContent xmlns:mc="http://schemas.openxmlformats.org/markup-compatibility/2006" xmlns:p14="http://schemas.microsoft.com/office/powerpoint/2010/main">
-    <mc:Choice Requires="p14">
-      <p:transition spd="med" p14:dur="700">
-        <p:fade/>
-      </p:transition>
-    </mc:Choice>
-    <mc:Fallback xmlns="">
-      <p:transition spd="med">
-        <p:fade/>
-      </p:transition>
-    </mc:Fallback>
-  </mc:AlternateContent>
-</p:sld>
-</file>
-
-<file path=ppt/slides/slide30.xml><?xml version="1.0" encoding="utf-8"?>
+<file path=ppt/slides/slide29.xml><?xml version="1.0" encoding="utf-8"?>
 <p:sld xmlns:a="http://schemas.openxmlformats.org/drawingml/2006/main" xmlns:r="http://schemas.openxmlformats.org/officeDocument/2006/relationships" xmlns:p="http://schemas.openxmlformats.org/presentationml/2006/main">
   <p:cSld>
     <p:spTree>
@@ -17817,7 +16795,942 @@
 </p:sld>
 </file>
 
-<file path=ppt/slides/slide31.xml><?xml version="1.0" encoding="utf-8"?>
+<file path=ppt/slides/slide3.xml><?xml version="1.0" encoding="utf-8"?>
+<p:sld xmlns:a="http://schemas.openxmlformats.org/drawingml/2006/main" xmlns:r="http://schemas.openxmlformats.org/officeDocument/2006/relationships" xmlns:p="http://schemas.openxmlformats.org/presentationml/2006/main">
+  <p:cSld>
+    <p:spTree>
+      <p:nvGrpSpPr>
+        <p:cNvPr id="1" name="">
+          <a:extLst>
+            <a:ext uri="{FF2B5EF4-FFF2-40B4-BE49-F238E27FC236}">
+              <a16:creationId xmlns:a16="http://schemas.microsoft.com/office/drawing/2014/main" id="{75DEB631-CC40-84E0-9D60-34127FF22E9E}"/>
+            </a:ext>
+          </a:extLst>
+        </p:cNvPr>
+        <p:cNvGrpSpPr/>
+        <p:nvPr/>
+      </p:nvGrpSpPr>
+      <p:grpSpPr>
+        <a:xfrm>
+          <a:off x="0" y="0"/>
+          <a:ext cx="0" cy="0"/>
+          <a:chOff x="0" y="0"/>
+          <a:chExt cx="0" cy="0"/>
+        </a:xfrm>
+      </p:grpSpPr>
+      <p:sp>
+        <p:nvSpPr>
+          <p:cNvPr id="7" name="Title 6">
+            <a:extLst>
+              <a:ext uri="{FF2B5EF4-FFF2-40B4-BE49-F238E27FC236}">
+                <a16:creationId xmlns:a16="http://schemas.microsoft.com/office/drawing/2014/main" id="{CDBFC140-278B-664E-6BCF-9B66463A74D5}"/>
+              </a:ext>
+            </a:extLst>
+          </p:cNvPr>
+          <p:cNvSpPr>
+            <a:spLocks noGrp="1"/>
+          </p:cNvSpPr>
+          <p:nvPr>
+            <p:ph type="title"/>
+          </p:nvPr>
+        </p:nvSpPr>
+        <p:spPr/>
+        <p:txBody>
+          <a:bodyPr/>
+          <a:lstStyle/>
+          <a:p>
+            <a:r>
+              <a:rPr lang="en-US" dirty="0"/>
+              <a:t>Recap</a:t>
+            </a:r>
+            <a:endParaRPr lang="en-US" dirty="0">
+              <a:solidFill>
+                <a:schemeClr val="accent1"/>
+              </a:solidFill>
+            </a:endParaRPr>
+          </a:p>
+        </p:txBody>
+      </p:sp>
+      <mc:AlternateContent xmlns:mc="http://schemas.openxmlformats.org/markup-compatibility/2006" xmlns:a14="http://schemas.microsoft.com/office/drawing/2010/main">
+        <mc:Choice Requires="a14">
+          <p:sp>
+            <p:nvSpPr>
+              <p:cNvPr id="8" name="Content Placeholder 7">
+                <a:extLst>
+                  <a:ext uri="{FF2B5EF4-FFF2-40B4-BE49-F238E27FC236}">
+                    <a16:creationId xmlns:a16="http://schemas.microsoft.com/office/drawing/2014/main" id="{3A1A1B08-1158-8B28-BD0C-D1A7508A798B}"/>
+                  </a:ext>
+                </a:extLst>
+              </p:cNvPr>
+              <p:cNvSpPr>
+                <a:spLocks noGrp="1"/>
+              </p:cNvSpPr>
+              <p:nvPr>
+                <p:ph idx="1"/>
+              </p:nvPr>
+            </p:nvSpPr>
+            <p:spPr/>
+            <p:txBody>
+              <a:bodyPr/>
+              <a:lstStyle/>
+              <a:p>
+                <a:pPr marL="457200" indent="-457200">
+                  <a:buFont typeface="+mj-lt"/>
+                  <a:buAutoNum type="arabicPeriod" startAt="3"/>
+                </a:pPr>
+                <a:r>
+                  <a:rPr lang="en-US" dirty="0"/>
+                  <a:t>The empirical risk is an </a:t>
+                </a:r>
+                <a:r>
+                  <a:rPr lang="en-US" i="1" dirty="0"/>
+                  <a:t>unbiased</a:t>
+                </a:r>
+                <a:r>
+                  <a:rPr lang="en-US" dirty="0"/>
+                  <a:t> Monte Carlo estimate of the risk functional</a:t>
+                </a:r>
+              </a:p>
+              <a:p>
+                <a:pPr marL="0" indent="0">
+                  <a:buNone/>
+                </a:pPr>
+                <a14:m>
+                  <m:oMathPara xmlns:m="http://schemas.openxmlformats.org/officeDocument/2006/math">
+                    <m:oMath>
+                      <m:r>
+                        <a:rPr lang="en-US" b="0" i="1" smtClean="0">
+                          <a:latin typeface="Cambria Math" panose="02040503050406030204" pitchFamily="18" charset="0"/>
+                        </a:rPr>
+                        <m:t>𝑅</m:t>
+                      </m:r>
+                      <m:d>
+                        <m:dPr>
+                          <m:begChr m:val="["/>
+                          <m:endChr m:val="]"/>
+                          <m:ctrlPr>
+                            <a:rPr lang="en-US" b="0" i="1" smtClean="0">
+                              <a:latin typeface="Cambria Math" panose="02040503050406030204" pitchFamily="18" charset="0"/>
+                            </a:rPr>
+                          </m:ctrlPr>
+                        </m:dPr>
+                        <m:e>
+                          <m:r>
+                            <a:rPr lang="en-US" b="0" i="1" smtClean="0">
+                              <a:latin typeface="Cambria Math" panose="02040503050406030204" pitchFamily="18" charset="0"/>
+                            </a:rPr>
+                            <m:t>𝑓</m:t>
+                          </m:r>
+                        </m:e>
+                      </m:d>
+                      <m:r>
+                        <a:rPr lang="en-US" b="0" i="1" smtClean="0">
+                          <a:latin typeface="Cambria Math" panose="02040503050406030204" pitchFamily="18" charset="0"/>
+                        </a:rPr>
+                        <m:t>=</m:t>
+                      </m:r>
+                      <m:nary>
+                        <m:naryPr>
+                          <m:limLoc m:val="undOvr"/>
+                          <m:subHide m:val="on"/>
+                          <m:supHide m:val="on"/>
+                          <m:ctrlPr>
+                            <a:rPr lang="en-US" b="0" i="1" smtClean="0">
+                              <a:latin typeface="Cambria Math" panose="02040503050406030204" pitchFamily="18" charset="0"/>
+                            </a:rPr>
+                          </m:ctrlPr>
+                        </m:naryPr>
+                        <m:sub/>
+                        <m:sup/>
+                        <m:e>
+                          <m:r>
+                            <a:rPr lang="en-US" b="0" i="1" smtClean="0">
+                              <a:latin typeface="Cambria Math" panose="02040503050406030204" pitchFamily="18" charset="0"/>
+                            </a:rPr>
+                            <m:t>𝑑𝑥</m:t>
+                          </m:r>
+                        </m:e>
+                      </m:nary>
+                      <m:nary>
+                        <m:naryPr>
+                          <m:limLoc m:val="undOvr"/>
+                          <m:subHide m:val="on"/>
+                          <m:supHide m:val="on"/>
+                          <m:ctrlPr>
+                            <a:rPr lang="en-US" b="0" i="1" smtClean="0">
+                              <a:latin typeface="Cambria Math" panose="02040503050406030204" pitchFamily="18" charset="0"/>
+                            </a:rPr>
+                          </m:ctrlPr>
+                        </m:naryPr>
+                        <m:sub/>
+                        <m:sup/>
+                        <m:e>
+                          <m:r>
+                            <a:rPr lang="en-US" b="0" i="1" smtClean="0">
+                              <a:latin typeface="Cambria Math" panose="02040503050406030204" pitchFamily="18" charset="0"/>
+                            </a:rPr>
+                            <m:t>𝑑𝑦</m:t>
+                          </m:r>
+                          <m:r>
+                            <a:rPr lang="en-US" b="0" i="1" smtClean="0">
+                              <a:latin typeface="Cambria Math" panose="02040503050406030204" pitchFamily="18" charset="0"/>
+                            </a:rPr>
+                            <m:t> </m:t>
+                          </m:r>
+                          <m:r>
+                            <a:rPr lang="en-US" i="1">
+                              <a:latin typeface="Cambria Math" panose="02040503050406030204" pitchFamily="18" charset="0"/>
+                            </a:rPr>
+                            <m:t>𝐿</m:t>
+                          </m:r>
+                          <m:d>
+                            <m:dPr>
+                              <m:ctrlPr>
+                                <a:rPr lang="en-US" i="1">
+                                  <a:latin typeface="Cambria Math" panose="02040503050406030204" pitchFamily="18" charset="0"/>
+                                </a:rPr>
+                              </m:ctrlPr>
+                            </m:dPr>
+                            <m:e>
+                              <m:r>
+                                <a:rPr lang="en-US" i="1">
+                                  <a:latin typeface="Cambria Math" panose="02040503050406030204" pitchFamily="18" charset="0"/>
+                                </a:rPr>
+                                <m:t>𝑦</m:t>
+                              </m:r>
+                              <m:r>
+                                <a:rPr lang="en-US" i="1">
+                                  <a:latin typeface="Cambria Math" panose="02040503050406030204" pitchFamily="18" charset="0"/>
+                                </a:rPr>
+                                <m:t>, </m:t>
+                              </m:r>
+                              <m:r>
+                                <a:rPr lang="en-US" i="1">
+                                  <a:latin typeface="Cambria Math" panose="02040503050406030204" pitchFamily="18" charset="0"/>
+                                </a:rPr>
+                                <m:t>𝑓</m:t>
+                              </m:r>
+                            </m:e>
+                          </m:d>
+                          <m:r>
+                            <a:rPr lang="en-US" i="1">
+                              <a:latin typeface="Cambria Math" panose="02040503050406030204" pitchFamily="18" charset="0"/>
+                            </a:rPr>
+                            <m:t> </m:t>
+                          </m:r>
+                          <m:r>
+                            <a:rPr lang="en-US" i="1">
+                              <a:latin typeface="Cambria Math" panose="02040503050406030204" pitchFamily="18" charset="0"/>
+                            </a:rPr>
+                            <m:t>𝑝</m:t>
+                          </m:r>
+                          <m:d>
+                            <m:dPr>
+                              <m:ctrlPr>
+                                <a:rPr lang="en-US" i="1">
+                                  <a:latin typeface="Cambria Math" panose="02040503050406030204" pitchFamily="18" charset="0"/>
+                                </a:rPr>
+                              </m:ctrlPr>
+                            </m:dPr>
+                            <m:e>
+                              <m:r>
+                                <a:rPr lang="en-US" i="1">
+                                  <a:latin typeface="Cambria Math" panose="02040503050406030204" pitchFamily="18" charset="0"/>
+                                </a:rPr>
+                                <m:t>𝑥</m:t>
+                              </m:r>
+                              <m:r>
+                                <a:rPr lang="en-US" i="1">
+                                  <a:latin typeface="Cambria Math" panose="02040503050406030204" pitchFamily="18" charset="0"/>
+                                </a:rPr>
+                                <m:t>, </m:t>
+                              </m:r>
+                              <m:r>
+                                <a:rPr lang="en-US" i="1">
+                                  <a:latin typeface="Cambria Math" panose="02040503050406030204" pitchFamily="18" charset="0"/>
+                                </a:rPr>
+                                <m:t>𝑦</m:t>
+                              </m:r>
+                            </m:e>
+                          </m:d>
+                        </m:e>
+                      </m:nary>
+                    </m:oMath>
+                  </m:oMathPara>
+                </a14:m>
+                <a:endParaRPr lang="en-US" dirty="0"/>
+              </a:p>
+              <a:p>
+                <a:pPr marL="0" indent="0">
+                  <a:buNone/>
+                </a:pPr>
+                <a:r>
+                  <a:rPr lang="en-US" dirty="0"/>
+                  <a:t>      where </a:t>
+                </a:r>
+                <a14:m>
+                  <m:oMath xmlns:m="http://schemas.openxmlformats.org/officeDocument/2006/math">
+                    <m:r>
+                      <a:rPr lang="en-US" i="1" smtClean="0">
+                        <a:solidFill>
+                          <a:srgbClr val="0033CC"/>
+                        </a:solidFill>
+                        <a:latin typeface="Cambria Math" panose="02040503050406030204" pitchFamily="18" charset="0"/>
+                      </a:rPr>
+                      <m:t>𝑝</m:t>
+                    </m:r>
+                    <m:d>
+                      <m:dPr>
+                        <m:ctrlPr>
+                          <a:rPr lang="en-US" i="1">
+                            <a:solidFill>
+                              <a:srgbClr val="0033CC"/>
+                            </a:solidFill>
+                            <a:latin typeface="Cambria Math" panose="02040503050406030204" pitchFamily="18" charset="0"/>
+                          </a:rPr>
+                        </m:ctrlPr>
+                      </m:dPr>
+                      <m:e>
+                        <m:r>
+                          <a:rPr lang="en-US" i="1">
+                            <a:solidFill>
+                              <a:srgbClr val="0033CC"/>
+                            </a:solidFill>
+                            <a:latin typeface="Cambria Math" panose="02040503050406030204" pitchFamily="18" charset="0"/>
+                          </a:rPr>
+                          <m:t>𝑥</m:t>
+                        </m:r>
+                        <m:r>
+                          <a:rPr lang="en-US" i="1">
+                            <a:solidFill>
+                              <a:srgbClr val="0033CC"/>
+                            </a:solidFill>
+                            <a:latin typeface="Cambria Math" panose="02040503050406030204" pitchFamily="18" charset="0"/>
+                          </a:rPr>
+                          <m:t>, </m:t>
+                        </m:r>
+                        <m:r>
+                          <a:rPr lang="en-US" i="1">
+                            <a:solidFill>
+                              <a:srgbClr val="0033CC"/>
+                            </a:solidFill>
+                            <a:latin typeface="Cambria Math" panose="02040503050406030204" pitchFamily="18" charset="0"/>
+                          </a:rPr>
+                          <m:t>𝑦</m:t>
+                        </m:r>
+                      </m:e>
+                    </m:d>
+                    <m:r>
+                      <a:rPr lang="en-US" b="0" i="1" smtClean="0">
+                        <a:solidFill>
+                          <a:srgbClr val="0033CC"/>
+                        </a:solidFill>
+                        <a:latin typeface="Cambria Math" panose="02040503050406030204" pitchFamily="18" charset="0"/>
+                      </a:rPr>
+                      <m:t>𝑑𝑥𝑑𝑦</m:t>
+                    </m:r>
+                  </m:oMath>
+                </a14:m>
+                <a:r>
+                  <a:rPr lang="en-US" dirty="0"/>
+                  <a:t> is the probability of the data.</a:t>
+                </a:r>
+                <a:br>
+                  <a:rPr lang="en-US" dirty="0"/>
+                </a:br>
+                <a:endParaRPr lang="en-US" dirty="0"/>
+              </a:p>
+              <a:p>
+                <a:pPr marL="457200" indent="-457200">
+                  <a:buFont typeface="+mj-lt"/>
+                  <a:buAutoNum type="arabicPeriod" startAt="4"/>
+                </a:pPr>
+                <a:r>
+                  <a:rPr lang="en-US" dirty="0"/>
+                  <a:t>Given </a:t>
+                </a:r>
+                <a14:m>
+                  <m:oMath xmlns:m="http://schemas.openxmlformats.org/officeDocument/2006/math">
+                    <m:r>
+                      <a:rPr lang="en-US" b="0" i="1" smtClean="0">
+                        <a:solidFill>
+                          <a:srgbClr val="0033CC"/>
+                        </a:solidFill>
+                        <a:latin typeface="Cambria Math" panose="02040503050406030204" pitchFamily="18" charset="0"/>
+                      </a:rPr>
+                      <m:t>𝑓</m:t>
+                    </m:r>
+                  </m:oMath>
+                </a14:m>
+                <a:r>
+                  <a:rPr lang="en-US" dirty="0"/>
+                  <a:t>, with inputs </a:t>
+                </a:r>
+                <a14:m>
+                  <m:oMath xmlns:m="http://schemas.openxmlformats.org/officeDocument/2006/math">
+                    <m:r>
+                      <a:rPr lang="en-US" i="1">
+                        <a:solidFill>
+                          <a:srgbClr val="0033CC"/>
+                        </a:solidFill>
+                        <a:latin typeface="Cambria Math" panose="02040503050406030204" pitchFamily="18" charset="0"/>
+                      </a:rPr>
+                      <m:t>𝑥</m:t>
+                    </m:r>
+                  </m:oMath>
+                </a14:m>
+                <a:r>
+                  <a:rPr lang="en-US" dirty="0"/>
+                  <a:t> and targets </a:t>
+                </a:r>
+                <a14:m>
+                  <m:oMath xmlns:m="http://schemas.openxmlformats.org/officeDocument/2006/math">
+                    <m:r>
+                      <a:rPr lang="en-US" i="1">
+                        <a:solidFill>
+                          <a:srgbClr val="0033CC"/>
+                        </a:solidFill>
+                        <a:latin typeface="Cambria Math" panose="02040503050406030204" pitchFamily="18" charset="0"/>
+                      </a:rPr>
+                      <m:t>𝑦</m:t>
+                    </m:r>
+                  </m:oMath>
+                </a14:m>
+                <a:r>
+                  <a:rPr lang="en-US" dirty="0"/>
+                  <a:t>, and the loss </a:t>
+                </a:r>
+                <a14:m>
+                  <m:oMath xmlns:m="http://schemas.openxmlformats.org/officeDocument/2006/math">
+                    <m:r>
+                      <a:rPr lang="en-US" i="1" smtClean="0">
+                        <a:solidFill>
+                          <a:srgbClr val="0033CC"/>
+                        </a:solidFill>
+                        <a:latin typeface="Cambria Math" panose="02040503050406030204" pitchFamily="18" charset="0"/>
+                      </a:rPr>
+                      <m:t>𝐿</m:t>
+                    </m:r>
+                    <m:d>
+                      <m:dPr>
+                        <m:ctrlPr>
+                          <a:rPr lang="en-US" i="1">
+                            <a:solidFill>
+                              <a:srgbClr val="0033CC"/>
+                            </a:solidFill>
+                            <a:latin typeface="Cambria Math" panose="02040503050406030204" pitchFamily="18" charset="0"/>
+                          </a:rPr>
+                        </m:ctrlPr>
+                      </m:dPr>
+                      <m:e>
+                        <m:r>
+                          <a:rPr lang="en-US" i="1">
+                            <a:solidFill>
+                              <a:srgbClr val="0033CC"/>
+                            </a:solidFill>
+                            <a:latin typeface="Cambria Math" panose="02040503050406030204" pitchFamily="18" charset="0"/>
+                          </a:rPr>
+                          <m:t>𝑦</m:t>
+                        </m:r>
+                        <m:r>
+                          <a:rPr lang="en-US" i="1">
+                            <a:solidFill>
+                              <a:srgbClr val="0033CC"/>
+                            </a:solidFill>
+                            <a:latin typeface="Cambria Math" panose="02040503050406030204" pitchFamily="18" charset="0"/>
+                          </a:rPr>
+                          <m:t>, </m:t>
+                        </m:r>
+                        <m:r>
+                          <a:rPr lang="en-US" i="1">
+                            <a:solidFill>
+                              <a:srgbClr val="0033CC"/>
+                            </a:solidFill>
+                            <a:latin typeface="Cambria Math" panose="02040503050406030204" pitchFamily="18" charset="0"/>
+                          </a:rPr>
+                          <m:t>𝑓</m:t>
+                        </m:r>
+                      </m:e>
+                    </m:d>
+                  </m:oMath>
+                </a14:m>
+                <a:r>
+                  <a:rPr lang="en-US" dirty="0"/>
+                  <a:t>, minimizing the risk functional yields the important result</a:t>
+                </a:r>
+              </a:p>
+              <a:p>
+                <a:pPr marL="0" indent="0">
+                  <a:buNone/>
+                </a:pPr>
+                <a:br>
+                  <a:rPr lang="en-US" dirty="0"/>
+                </a:br>
+                <a:endParaRPr lang="en-US" dirty="0"/>
+              </a:p>
+              <a:p>
+                <a:pPr marL="0" indent="0">
+                  <a:buNone/>
+                </a:pPr>
+                <a:r>
+                  <a:rPr lang="en-US" dirty="0"/>
+                  <a:t>  </a:t>
+                </a:r>
+              </a:p>
+            </p:txBody>
+          </p:sp>
+        </mc:Choice>
+        <mc:Fallback xmlns="">
+          <p:sp>
+            <p:nvSpPr>
+              <p:cNvPr id="8" name="Content Placeholder 7">
+                <a:extLst>
+                  <a:ext uri="{FF2B5EF4-FFF2-40B4-BE49-F238E27FC236}">
+                    <a16:creationId xmlns:a16="http://schemas.microsoft.com/office/drawing/2014/main" id="{3A1A1B08-1158-8B28-BD0C-D1A7508A798B}"/>
+                  </a:ext>
+                </a:extLst>
+              </p:cNvPr>
+              <p:cNvSpPr>
+                <a:spLocks noGrp="1" noRot="1" noChangeAspect="1" noMove="1" noResize="1" noEditPoints="1" noAdjustHandles="1" noChangeArrowheads="1" noChangeShapeType="1" noTextEdit="1"/>
+              </p:cNvSpPr>
+              <p:nvPr>
+                <p:ph idx="1"/>
+              </p:nvPr>
+            </p:nvSpPr>
+            <p:spPr>
+              <a:blipFill>
+                <a:blip r:embed="rId2"/>
+                <a:stretch>
+                  <a:fillRect l="-1142" t="-15789" r="-1631"/>
+                </a:stretch>
+              </a:blipFill>
+            </p:spPr>
+            <p:txBody>
+              <a:bodyPr/>
+              <a:lstStyle/>
+              <a:p>
+                <a:r>
+                  <a:rPr lang="en-US">
+                    <a:noFill/>
+                  </a:rPr>
+                  <a:t> </a:t>
+                </a:r>
+              </a:p>
+            </p:txBody>
+          </p:sp>
+        </mc:Fallback>
+      </mc:AlternateContent>
+      <mc:AlternateContent xmlns:mc="http://schemas.openxmlformats.org/markup-compatibility/2006" xmlns:a14="http://schemas.microsoft.com/office/drawing/2010/main">
+        <mc:Choice Requires="a14">
+          <p:sp>
+            <p:nvSpPr>
+              <p:cNvPr id="2" name="TextBox 1">
+                <a:extLst>
+                  <a:ext uri="{FF2B5EF4-FFF2-40B4-BE49-F238E27FC236}">
+                    <a16:creationId xmlns:a16="http://schemas.microsoft.com/office/drawing/2014/main" id="{3AAE38DF-53DF-D7EE-5BD0-2DC22CA37FCF}"/>
+                  </a:ext>
+                </a:extLst>
+              </p:cNvPr>
+              <p:cNvSpPr txBox="1"/>
+              <p:nvPr/>
+            </p:nvSpPr>
+            <p:spPr>
+              <a:xfrm>
+                <a:off x="1768641" y="4953000"/>
+                <a:ext cx="5695341" cy="1060931"/>
+              </a:xfrm>
+              <a:prstGeom prst="rect">
+                <a:avLst/>
+              </a:prstGeom>
+              <a:solidFill>
+                <a:srgbClr val="FFFC8F"/>
+              </a:solidFill>
+              <a:ln>
+                <a:solidFill>
+                  <a:schemeClr val="tx1"/>
+                </a:solidFill>
+              </a:ln>
+              <a:effectLst>
+                <a:outerShdw blurRad="50800" dist="38100" dir="2700000" algn="tl" rotWithShape="0">
+                  <a:prstClr val="black">
+                    <a:alpha val="40000"/>
+                  </a:prstClr>
+                </a:outerShdw>
+              </a:effectLst>
+            </p:spPr>
+            <p:txBody>
+              <a:bodyPr wrap="none" rtlCol="0">
+                <a:spAutoFit/>
+              </a:bodyPr>
+              <a:lstStyle/>
+              <a:p>
+                <a:pPr/>
+                <a14:m>
+                  <m:oMathPara xmlns:m="http://schemas.openxmlformats.org/officeDocument/2006/math">
+                    <m:oMath>
+                      <m:nary>
+                        <m:naryPr>
+                          <m:limLoc m:val="undOvr"/>
+                          <m:subHide m:val="on"/>
+                          <m:supHide m:val="on"/>
+                          <m:ctrlPr>
+                            <a:rPr lang="en-US" b="0" i="1" smtClean="0">
+                              <a:latin typeface="Cambria Math" panose="02040503050406030204" pitchFamily="18" charset="0"/>
+                            </a:rPr>
+                          </m:ctrlPr>
+                        </m:naryPr>
+                        <m:sub/>
+                        <m:sup/>
+                        <m:e>
+                          <m:r>
+                            <a:rPr lang="en-US" b="0" i="1" smtClean="0">
+                              <a:latin typeface="Cambria Math" panose="02040503050406030204" pitchFamily="18" charset="0"/>
+                            </a:rPr>
+                            <m:t>𝑑𝑦</m:t>
+                          </m:r>
+                          <m:r>
+                            <a:rPr lang="en-US" b="0" i="1" smtClean="0">
+                              <a:latin typeface="Cambria Math" panose="02040503050406030204" pitchFamily="18" charset="0"/>
+                            </a:rPr>
+                            <m:t> </m:t>
+                          </m:r>
+                          <m:f>
+                            <m:fPr>
+                              <m:ctrlPr>
+                                <a:rPr lang="en-US" b="0" i="1" smtClean="0">
+                                  <a:latin typeface="Cambria Math" panose="02040503050406030204" pitchFamily="18" charset="0"/>
+                                </a:rPr>
+                              </m:ctrlPr>
+                            </m:fPr>
+                            <m:num>
+                              <m:r>
+                                <a:rPr lang="en-US" b="0" i="1" smtClean="0">
+                                  <a:latin typeface="Cambria Math" panose="02040503050406030204" pitchFamily="18" charset="0"/>
+                                </a:rPr>
+                                <m:t>𝜕</m:t>
+                              </m:r>
+                              <m:r>
+                                <a:rPr lang="en-US" b="0" i="1" smtClean="0">
+                                  <a:latin typeface="Cambria Math" panose="02040503050406030204" pitchFamily="18" charset="0"/>
+                                </a:rPr>
+                                <m:t>𝐿</m:t>
+                              </m:r>
+                            </m:num>
+                            <m:den>
+                              <m:r>
+                                <a:rPr lang="en-US" b="0" i="1" smtClean="0">
+                                  <a:latin typeface="Cambria Math" panose="02040503050406030204" pitchFamily="18" charset="0"/>
+                                </a:rPr>
+                                <m:t>𝜕</m:t>
+                              </m:r>
+                              <m:r>
+                                <a:rPr lang="en-US" b="0" i="1" smtClean="0">
+                                  <a:latin typeface="Cambria Math" panose="02040503050406030204" pitchFamily="18" charset="0"/>
+                                </a:rPr>
+                                <m:t>𝑓</m:t>
+                              </m:r>
+                            </m:den>
+                          </m:f>
+                          <m:r>
+                            <a:rPr lang="en-US" i="1">
+                              <a:latin typeface="Cambria Math" panose="02040503050406030204" pitchFamily="18" charset="0"/>
+                            </a:rPr>
+                            <m:t>𝑝</m:t>
+                          </m:r>
+                          <m:d>
+                            <m:dPr>
+                              <m:ctrlPr>
+                                <a:rPr lang="en-US" b="0" i="1" smtClean="0">
+                                  <a:latin typeface="Cambria Math" panose="02040503050406030204" pitchFamily="18" charset="0"/>
+                                </a:rPr>
+                              </m:ctrlPr>
+                            </m:dPr>
+                            <m:e>
+                              <m:r>
+                                <a:rPr lang="en-US" b="0" i="1" smtClean="0">
+                                  <a:latin typeface="Cambria Math" panose="02040503050406030204" pitchFamily="18" charset="0"/>
+                                </a:rPr>
+                                <m:t>𝑦</m:t>
+                              </m:r>
+                              <m:r>
+                                <a:rPr lang="en-US" b="0" i="1" smtClean="0">
+                                  <a:latin typeface="Cambria Math" panose="02040503050406030204" pitchFamily="18" charset="0"/>
+                                </a:rPr>
+                                <m:t> | </m:t>
+                              </m:r>
+                              <m:r>
+                                <a:rPr lang="en-US" i="1">
+                                  <a:latin typeface="Cambria Math" panose="02040503050406030204" pitchFamily="18" charset="0"/>
+                                </a:rPr>
+                                <m:t>𝑥</m:t>
+                              </m:r>
+                            </m:e>
+                          </m:d>
+                          <m:r>
+                            <a:rPr lang="en-US" b="0" i="1" smtClean="0">
+                              <a:latin typeface="Cambria Math" panose="02040503050406030204" pitchFamily="18" charset="0"/>
+                            </a:rPr>
+                            <m:t>=0</m:t>
+                          </m:r>
+                          <m:r>
+                            <a:rPr lang="en-US" i="1">
+                              <a:latin typeface="Cambria Math" panose="02040503050406030204" pitchFamily="18" charset="0"/>
+                              <a:ea typeface="Cambria Math" panose="02040503050406030204" pitchFamily="18" charset="0"/>
+                            </a:rPr>
+                            <m:t>→</m:t>
+                          </m:r>
+                          <m:sSub>
+                            <m:sSubPr>
+                              <m:ctrlPr>
+                                <a:rPr lang="en-US" b="0" i="1" smtClean="0">
+                                  <a:solidFill>
+                                    <a:srgbClr val="0033CC"/>
+                                  </a:solidFill>
+                                  <a:latin typeface="Cambria Math" panose="02040503050406030204" pitchFamily="18" charset="0"/>
+                                  <a:ea typeface="Cambria Math" panose="02040503050406030204" pitchFamily="18" charset="0"/>
+                                </a:rPr>
+                              </m:ctrlPr>
+                            </m:sSubPr>
+                            <m:e>
+                              <m:r>
+                                <a:rPr lang="en-US" b="0" i="1" smtClean="0">
+                                  <a:solidFill>
+                                    <a:srgbClr val="0033CC"/>
+                                  </a:solidFill>
+                                  <a:latin typeface="Cambria Math" panose="02040503050406030204" pitchFamily="18" charset="0"/>
+                                  <a:ea typeface="Cambria Math" panose="02040503050406030204" pitchFamily="18" charset="0"/>
+                                </a:rPr>
+                                <m:t>𝔼</m:t>
+                              </m:r>
+                            </m:e>
+                            <m:sub>
+                              <m:r>
+                                <a:rPr lang="en-US" b="0" i="1" smtClean="0">
+                                  <a:solidFill>
+                                    <a:srgbClr val="0033CC"/>
+                                  </a:solidFill>
+                                  <a:latin typeface="Cambria Math" panose="02040503050406030204" pitchFamily="18" charset="0"/>
+                                  <a:ea typeface="Cambria Math" panose="02040503050406030204" pitchFamily="18" charset="0"/>
+                                </a:rPr>
+                                <m:t>𝑝</m:t>
+                              </m:r>
+                              <m:d>
+                                <m:dPr>
+                                  <m:ctrlPr>
+                                    <a:rPr lang="en-US" b="0" i="1" smtClean="0">
+                                      <a:solidFill>
+                                        <a:srgbClr val="0033CC"/>
+                                      </a:solidFill>
+                                      <a:latin typeface="Cambria Math" panose="02040503050406030204" pitchFamily="18" charset="0"/>
+                                      <a:ea typeface="Cambria Math" panose="02040503050406030204" pitchFamily="18" charset="0"/>
+                                    </a:rPr>
+                                  </m:ctrlPr>
+                                </m:dPr>
+                                <m:e>
+                                  <m:r>
+                                    <a:rPr lang="en-US" b="0" i="1" smtClean="0">
+                                      <a:solidFill>
+                                        <a:srgbClr val="0033CC"/>
+                                      </a:solidFill>
+                                      <a:latin typeface="Cambria Math" panose="02040503050406030204" pitchFamily="18" charset="0"/>
+                                      <a:ea typeface="Cambria Math" panose="02040503050406030204" pitchFamily="18" charset="0"/>
+                                    </a:rPr>
+                                    <m:t>𝑦</m:t>
+                                  </m:r>
+                                </m:e>
+                                <m:e>
+                                  <m:r>
+                                    <a:rPr lang="en-US" b="0" i="1" smtClean="0">
+                                      <a:solidFill>
+                                        <a:srgbClr val="0033CC"/>
+                                      </a:solidFill>
+                                      <a:latin typeface="Cambria Math" panose="02040503050406030204" pitchFamily="18" charset="0"/>
+                                      <a:ea typeface="Cambria Math" panose="02040503050406030204" pitchFamily="18" charset="0"/>
+                                    </a:rPr>
+                                    <m:t>𝑥</m:t>
+                                  </m:r>
+                                </m:e>
+                              </m:d>
+                            </m:sub>
+                          </m:sSub>
+                          <m:r>
+                            <a:rPr lang="en-US" b="0" i="1" smtClean="0">
+                              <a:latin typeface="Cambria Math" panose="02040503050406030204" pitchFamily="18" charset="0"/>
+                              <a:ea typeface="Cambria Math" panose="02040503050406030204" pitchFamily="18" charset="0"/>
+                            </a:rPr>
+                            <m:t> </m:t>
+                          </m:r>
+                          <m:d>
+                            <m:dPr>
+                              <m:begChr m:val="["/>
+                              <m:endChr m:val="]"/>
+                              <m:ctrlPr>
+                                <a:rPr lang="en-US" i="1">
+                                  <a:solidFill>
+                                    <a:srgbClr val="0033CC"/>
+                                  </a:solidFill>
+                                  <a:latin typeface="Cambria Math" panose="02040503050406030204" pitchFamily="18" charset="0"/>
+                                </a:rPr>
+                              </m:ctrlPr>
+                            </m:dPr>
+                            <m:e>
+                              <m:f>
+                                <m:fPr>
+                                  <m:ctrlPr>
+                                    <a:rPr lang="en-US" i="1">
+                                      <a:solidFill>
+                                        <a:srgbClr val="0033CC"/>
+                                      </a:solidFill>
+                                      <a:latin typeface="Cambria Math" panose="02040503050406030204" pitchFamily="18" charset="0"/>
+                                    </a:rPr>
+                                  </m:ctrlPr>
+                                </m:fPr>
+                                <m:num>
+                                  <m:r>
+                                    <a:rPr lang="en-US" i="1">
+                                      <a:solidFill>
+                                        <a:srgbClr val="0033CC"/>
+                                      </a:solidFill>
+                                      <a:latin typeface="Cambria Math" panose="02040503050406030204" pitchFamily="18" charset="0"/>
+                                    </a:rPr>
+                                    <m:t>𝜕</m:t>
+                                  </m:r>
+                                  <m:r>
+                                    <a:rPr lang="en-US" i="1">
+                                      <a:solidFill>
+                                        <a:srgbClr val="0033CC"/>
+                                      </a:solidFill>
+                                      <a:latin typeface="Cambria Math" panose="02040503050406030204" pitchFamily="18" charset="0"/>
+                                    </a:rPr>
+                                    <m:t>𝐿</m:t>
+                                  </m:r>
+                                </m:num>
+                                <m:den>
+                                  <m:r>
+                                    <a:rPr lang="en-US" i="1">
+                                      <a:solidFill>
+                                        <a:srgbClr val="0033CC"/>
+                                      </a:solidFill>
+                                      <a:latin typeface="Cambria Math" panose="02040503050406030204" pitchFamily="18" charset="0"/>
+                                    </a:rPr>
+                                    <m:t>𝜕</m:t>
+                                  </m:r>
+                                  <m:r>
+                                    <a:rPr lang="en-US" i="1">
+                                      <a:solidFill>
+                                        <a:srgbClr val="0033CC"/>
+                                      </a:solidFill>
+                                      <a:latin typeface="Cambria Math" panose="02040503050406030204" pitchFamily="18" charset="0"/>
+                                    </a:rPr>
+                                    <m:t>𝑓</m:t>
+                                  </m:r>
+                                </m:den>
+                              </m:f>
+                            </m:e>
+                          </m:d>
+                          <m:r>
+                            <a:rPr lang="en-US" b="0" i="1" smtClean="0">
+                              <a:solidFill>
+                                <a:srgbClr val="0033CC"/>
+                              </a:solidFill>
+                              <a:latin typeface="Cambria Math" panose="02040503050406030204" pitchFamily="18" charset="0"/>
+                              <a:ea typeface="Cambria Math" panose="02040503050406030204" pitchFamily="18" charset="0"/>
+                            </a:rPr>
+                            <m:t>=0</m:t>
+                          </m:r>
+                        </m:e>
+                      </m:nary>
+                    </m:oMath>
+                  </m:oMathPara>
+                </a14:m>
+                <a:endParaRPr lang="en-US" dirty="0"/>
+              </a:p>
+            </p:txBody>
+          </p:sp>
+        </mc:Choice>
+        <mc:Fallback xmlns="">
+          <p:sp>
+            <p:nvSpPr>
+              <p:cNvPr id="2" name="TextBox 1">
+                <a:extLst>
+                  <a:ext uri="{FF2B5EF4-FFF2-40B4-BE49-F238E27FC236}">
+                    <a16:creationId xmlns:a16="http://schemas.microsoft.com/office/drawing/2014/main" id="{3AAE38DF-53DF-D7EE-5BD0-2DC22CA37FCF}"/>
+                  </a:ext>
+                </a:extLst>
+              </p:cNvPr>
+              <p:cNvSpPr txBox="1">
+                <a:spLocks noRot="1" noChangeAspect="1" noMove="1" noResize="1" noEditPoints="1" noAdjustHandles="1" noChangeArrowheads="1" noChangeShapeType="1" noTextEdit="1"/>
+              </p:cNvSpPr>
+              <p:nvPr/>
+            </p:nvSpPr>
+            <p:spPr>
+              <a:xfrm>
+                <a:off x="1768641" y="4953000"/>
+                <a:ext cx="5695341" cy="1060931"/>
+              </a:xfrm>
+              <a:prstGeom prst="rect">
+                <a:avLst/>
+              </a:prstGeom>
+              <a:blipFill>
+                <a:blip r:embed="rId3"/>
+                <a:stretch>
+                  <a:fillRect/>
+                </a:stretch>
+              </a:blipFill>
+              <a:ln>
+                <a:solidFill>
+                  <a:schemeClr val="tx1"/>
+                </a:solidFill>
+              </a:ln>
+              <a:effectLst>
+                <a:outerShdw blurRad="50800" dist="38100" dir="2700000" algn="tl" rotWithShape="0">
+                  <a:prstClr val="black">
+                    <a:alpha val="40000"/>
+                  </a:prstClr>
+                </a:outerShdw>
+              </a:effectLst>
+            </p:spPr>
+            <p:txBody>
+              <a:bodyPr/>
+              <a:lstStyle/>
+              <a:p>
+                <a:r>
+                  <a:rPr lang="en-US">
+                    <a:noFill/>
+                  </a:rPr>
+                  <a:t> </a:t>
+                </a:r>
+              </a:p>
+            </p:txBody>
+          </p:sp>
+        </mc:Fallback>
+      </mc:AlternateContent>
+    </p:spTree>
+    <p:extLst>
+      <p:ext uri="{BB962C8B-B14F-4D97-AF65-F5344CB8AC3E}">
+        <p14:creationId xmlns:p14="http://schemas.microsoft.com/office/powerpoint/2010/main" val="3962134214"/>
+      </p:ext>
+    </p:extLst>
+  </p:cSld>
+  <p:clrMapOvr>
+    <a:masterClrMapping/>
+  </p:clrMapOvr>
+  <mc:AlternateContent xmlns:mc="http://schemas.openxmlformats.org/markup-compatibility/2006" xmlns:p14="http://schemas.microsoft.com/office/powerpoint/2010/main">
+    <mc:Choice Requires="p14">
+      <p:transition spd="med" p14:dur="700">
+        <p:fade/>
+      </p:transition>
+    </mc:Choice>
+    <mc:Fallback xmlns="">
+      <p:transition spd="med">
+        <p:fade/>
+      </p:transition>
+    </mc:Fallback>
+  </mc:AlternateContent>
+</p:sld>
+</file>
+
+<file path=ppt/slides/slide30.xml><?xml version="1.0" encoding="utf-8"?>
 <p:sld xmlns:a="http://schemas.openxmlformats.org/drawingml/2006/main" xmlns:r="http://schemas.openxmlformats.org/officeDocument/2006/relationships" xmlns:p="http://schemas.openxmlformats.org/presentationml/2006/main">
   <p:cSld>
     <p:spTree>
@@ -19761,8 +19674,8 @@
           <a:chExt cx="0" cy="0"/>
         </a:xfrm>
       </p:grpSpPr>
-      <mc:AlternateContent xmlns:mc="http://schemas.openxmlformats.org/markup-compatibility/2006">
-        <mc:Choice xmlns:a14="http://schemas.microsoft.com/office/drawing/2010/main" Requires="a14">
+      <mc:AlternateContent xmlns:mc="http://schemas.openxmlformats.org/markup-compatibility/2006" xmlns:a14="http://schemas.microsoft.com/office/drawing/2010/main">
+        <mc:Choice Requires="a14">
           <p:sp>
             <p:nvSpPr>
               <p:cNvPr id="4" name="Content Placeholder 3">
@@ -19993,20 +19906,6 @@
                           </m:r>
                         </m:e>
                         <m:sub>
-                          <m:r>
-                            <a:rPr lang="en-US" i="1" smtClean="0">
-                              <a:latin typeface="Cambria Math" panose="02040503050406030204" pitchFamily="18" charset="0"/>
-                              <a:ea typeface="Cambria Math" panose="02040503050406030204" pitchFamily="18" charset="0"/>
-                            </a:rPr>
-                            <m:t>𝑦</m:t>
-                          </m:r>
-                          <m:r>
-                            <a:rPr lang="en-US" i="1" smtClean="0">
-                              <a:latin typeface="Cambria Math" panose="02040503050406030204" pitchFamily="18" charset="0"/>
-                              <a:ea typeface="Cambria Math" panose="02040503050406030204" pitchFamily="18" charset="0"/>
-                            </a:rPr>
-                            <m:t>∼</m:t>
-                          </m:r>
                           <m:r>
                             <a:rPr lang="en-US" i="1" smtClean="0">
                               <a:latin typeface="Cambria Math" panose="02040503050406030204" pitchFamily="18" charset="0"/>
@@ -20236,7 +20135,7 @@
             </p:txBody>
           </p:sp>
         </mc:Choice>
-        <mc:Fallback>
+        <mc:Fallback xmlns="">
           <p:sp>
             <p:nvSpPr>
               <p:cNvPr id="4" name="Content Placeholder 3">
@@ -20304,8 +20203,8 @@
           </a:p>
         </p:txBody>
       </p:sp>
-      <mc:AlternateContent xmlns:mc="http://schemas.openxmlformats.org/markup-compatibility/2006">
-        <mc:Choice xmlns:a14="http://schemas.microsoft.com/office/drawing/2010/main" Requires="a14">
+      <mc:AlternateContent xmlns:mc="http://schemas.openxmlformats.org/markup-compatibility/2006" xmlns:a14="http://schemas.microsoft.com/office/drawing/2010/main">
+        <mc:Choice Requires="a14">
           <p:sp>
             <p:nvSpPr>
               <p:cNvPr id="5" name="Text Box 6">
@@ -20323,7 +20222,7 @@
             <p:spPr bwMode="auto">
               <a:xfrm>
                 <a:off x="2590800" y="3276600"/>
-                <a:ext cx="3638175" cy="542008"/>
+                <a:ext cx="3215945" cy="542008"/>
               </a:xfrm>
               <a:prstGeom prst="rect">
                 <a:avLst/>
@@ -20456,20 +20355,6 @@
                               <a:latin typeface="Cambria Math" panose="02040503050406030204" pitchFamily="18" charset="0"/>
                               <a:ea typeface="Cambria Math" panose="02040503050406030204" pitchFamily="18" charset="0"/>
                             </a:rPr>
-                            <m:t>𝑦</m:t>
-                          </m:r>
-                          <m:r>
-                            <a:rPr lang="en-US" i="1">
-                              <a:latin typeface="Cambria Math" panose="02040503050406030204" pitchFamily="18" charset="0"/>
-                              <a:ea typeface="Cambria Math" panose="02040503050406030204" pitchFamily="18" charset="0"/>
-                            </a:rPr>
-                            <m:t>∼</m:t>
-                          </m:r>
-                          <m:r>
-                            <a:rPr lang="en-US" i="1">
-                              <a:latin typeface="Cambria Math" panose="02040503050406030204" pitchFamily="18" charset="0"/>
-                              <a:ea typeface="Cambria Math" panose="02040503050406030204" pitchFamily="18" charset="0"/>
-                            </a:rPr>
                             <m:t>𝑝</m:t>
                           </m:r>
                           <m:d>
@@ -20545,7 +20430,7 @@
             </p:txBody>
           </p:sp>
         </mc:Choice>
-        <mc:Fallback>
+        <mc:Fallback xmlns="">
           <p:sp>
             <p:nvSpPr>
               <p:cNvPr id="5" name="Text Box 6">
@@ -20563,7 +20448,7 @@
             <p:spPr bwMode="auto">
               <a:xfrm>
                 <a:off x="2590800" y="3276600"/>
-                <a:ext cx="3638175" cy="542008"/>
+                <a:ext cx="3215945" cy="542008"/>
               </a:xfrm>
               <a:prstGeom prst="rect">
                 <a:avLst/>
@@ -20571,7 +20456,7 @@
               <a:blipFill>
                 <a:blip r:embed="rId3"/>
                 <a:stretch>
-                  <a:fillRect l="-687" b="-6522"/>
+                  <a:fillRect l="-778" b="-6522"/>
                 </a:stretch>
               </a:blipFill>
               <a:ln w="38100">
@@ -20773,8 +20658,8 @@
           <a:chExt cx="0" cy="0"/>
         </a:xfrm>
       </p:grpSpPr>
-      <mc:AlternateContent xmlns:mc="http://schemas.openxmlformats.org/markup-compatibility/2006">
-        <mc:Choice xmlns:a14="http://schemas.microsoft.com/office/drawing/2010/main" Requires="a14">
+      <mc:AlternateContent xmlns:mc="http://schemas.openxmlformats.org/markup-compatibility/2006" xmlns:a14="http://schemas.microsoft.com/office/drawing/2010/main">
+        <mc:Choice Requires="a14">
           <p:sp>
             <p:nvSpPr>
               <p:cNvPr id="4" name="Content Placeholder 3">
@@ -21045,20 +20930,6 @@
                               <a:latin typeface="Cambria Math" panose="02040503050406030204" pitchFamily="18" charset="0"/>
                               <a:ea typeface="Cambria Math" panose="02040503050406030204" pitchFamily="18" charset="0"/>
                             </a:rPr>
-                            <m:t>𝑦</m:t>
-                          </m:r>
-                          <m:r>
-                            <a:rPr lang="en-US" i="1">
-                              <a:latin typeface="Cambria Math" panose="02040503050406030204" pitchFamily="18" charset="0"/>
-                              <a:ea typeface="Cambria Math" panose="02040503050406030204" pitchFamily="18" charset="0"/>
-                            </a:rPr>
-                            <m:t>∼</m:t>
-                          </m:r>
-                          <m:r>
-                            <a:rPr lang="en-US" i="1">
-                              <a:latin typeface="Cambria Math" panose="02040503050406030204" pitchFamily="18" charset="0"/>
-                              <a:ea typeface="Cambria Math" panose="02040503050406030204" pitchFamily="18" charset="0"/>
-                            </a:rPr>
                             <m:t>𝑝</m:t>
                           </m:r>
                           <m:d>
@@ -21199,20 +21070,6 @@
                           </m:r>
                         </m:e>
                         <m:sub>
-                          <m:r>
-                            <a:rPr lang="en-US" i="1">
-                              <a:latin typeface="Cambria Math" panose="02040503050406030204" pitchFamily="18" charset="0"/>
-                              <a:ea typeface="Cambria Math" panose="02040503050406030204" pitchFamily="18" charset="0"/>
-                            </a:rPr>
-                            <m:t>𝑦</m:t>
-                          </m:r>
-                          <m:r>
-                            <a:rPr lang="en-US" i="1">
-                              <a:latin typeface="Cambria Math" panose="02040503050406030204" pitchFamily="18" charset="0"/>
-                              <a:ea typeface="Cambria Math" panose="02040503050406030204" pitchFamily="18" charset="0"/>
-                            </a:rPr>
-                            <m:t>∼</m:t>
-                          </m:r>
                           <m:r>
                             <a:rPr lang="en-US" i="1">
                               <a:latin typeface="Cambria Math" panose="02040503050406030204" pitchFamily="18" charset="0"/>
@@ -21492,20 +21349,6 @@
                               <a:latin typeface="Cambria Math" panose="02040503050406030204" pitchFamily="18" charset="0"/>
                               <a:ea typeface="Cambria Math" panose="02040503050406030204" pitchFamily="18" charset="0"/>
                             </a:rPr>
-                            <m:t>𝑦</m:t>
-                          </m:r>
-                          <m:r>
-                            <a:rPr lang="en-US" i="1">
-                              <a:latin typeface="Cambria Math" panose="02040503050406030204" pitchFamily="18" charset="0"/>
-                              <a:ea typeface="Cambria Math" panose="02040503050406030204" pitchFamily="18" charset="0"/>
-                            </a:rPr>
-                            <m:t>∼</m:t>
-                          </m:r>
-                          <m:r>
-                            <a:rPr lang="en-US" i="1">
-                              <a:latin typeface="Cambria Math" panose="02040503050406030204" pitchFamily="18" charset="0"/>
-                              <a:ea typeface="Cambria Math" panose="02040503050406030204" pitchFamily="18" charset="0"/>
-                            </a:rPr>
                             <m:t>𝑝</m:t>
                           </m:r>
                           <m:d>
@@ -21658,7 +21501,7 @@
             </p:txBody>
           </p:sp>
         </mc:Choice>
-        <mc:Fallback>
+        <mc:Fallback xmlns="">
           <p:sp>
             <p:nvSpPr>
               <p:cNvPr id="4" name="Content Placeholder 3">
@@ -21726,8 +21569,8 @@
           </a:p>
         </p:txBody>
       </p:sp>
-      <mc:AlternateContent xmlns:mc="http://schemas.openxmlformats.org/markup-compatibility/2006">
-        <mc:Choice xmlns:a14="http://schemas.microsoft.com/office/drawing/2010/main" Requires="a14">
+      <mc:AlternateContent xmlns:mc="http://schemas.openxmlformats.org/markup-compatibility/2006" xmlns:a14="http://schemas.microsoft.com/office/drawing/2010/main">
+        <mc:Choice Requires="a14">
           <p:sp>
             <p:nvSpPr>
               <p:cNvPr id="2" name="Text Box 6">
@@ -21906,7 +21749,7 @@
             </p:txBody>
           </p:sp>
         </mc:Choice>
-        <mc:Fallback>
+        <mc:Fallback xmlns="">
           <p:sp>
             <p:nvSpPr>
               <p:cNvPr id="2" name="Text Box 6">
@@ -22220,1092 +22063,6 @@
 </file>
 
 <file path=ppt/slides/slide8.xml><?xml version="1.0" encoding="utf-8"?>
-<p:sld xmlns:a="http://schemas.openxmlformats.org/drawingml/2006/main" xmlns:r="http://schemas.openxmlformats.org/officeDocument/2006/relationships" xmlns:p="http://schemas.openxmlformats.org/presentationml/2006/main">
-  <p:cSld>
-    <p:spTree>
-      <p:nvGrpSpPr>
-        <p:cNvPr id="1" name="">
-          <a:extLst>
-            <a:ext uri="{FF2B5EF4-FFF2-40B4-BE49-F238E27FC236}">
-              <a16:creationId xmlns:a16="http://schemas.microsoft.com/office/drawing/2014/main" id="{6319EFD6-8AF9-3AC0-A772-0C5780E4E81E}"/>
-            </a:ext>
-          </a:extLst>
-        </p:cNvPr>
-        <p:cNvGrpSpPr/>
-        <p:nvPr/>
-      </p:nvGrpSpPr>
-      <p:grpSpPr>
-        <a:xfrm>
-          <a:off x="0" y="0"/>
-          <a:ext cx="0" cy="0"/>
-          <a:chOff x="0" y="0"/>
-          <a:chExt cx="0" cy="0"/>
-        </a:xfrm>
-      </p:grpSpPr>
-      <mc:AlternateContent xmlns:mc="http://schemas.openxmlformats.org/markup-compatibility/2006">
-        <mc:Choice xmlns:a14="http://schemas.microsoft.com/office/drawing/2010/main" Requires="a14">
-          <p:sp>
-            <p:nvSpPr>
-              <p:cNvPr id="4" name="Content Placeholder 3">
-                <a:extLst>
-                  <a:ext uri="{FF2B5EF4-FFF2-40B4-BE49-F238E27FC236}">
-                    <a16:creationId xmlns:a16="http://schemas.microsoft.com/office/drawing/2014/main" id="{CA5FF234-6F7F-A2E8-4C2B-8C41E7CF3A52}"/>
-                  </a:ext>
-                </a:extLst>
-              </p:cNvPr>
-              <p:cNvSpPr>
-                <a:spLocks noGrp="1"/>
-              </p:cNvSpPr>
-              <p:nvPr>
-                <p:ph sz="half" idx="1"/>
-              </p:nvPr>
-            </p:nvSpPr>
-            <p:spPr/>
-            <p:txBody>
-              <a:bodyPr/>
-              <a:lstStyle/>
-              <a:p>
-                <a:pPr marL="0" indent="0">
-                  <a:buNone/>
-                </a:pPr>
-                <a:r>
-                  <a:rPr lang="en-US" dirty="0"/>
-                  <a:t>According to Bayes’ theorem</a:t>
-                </a:r>
-              </a:p>
-              <a:p>
-                <a:pPr marL="0" indent="0">
-                  <a:buNone/>
-                </a:pPr>
-                <a14:m>
-                  <m:oMathPara xmlns:m="http://schemas.openxmlformats.org/officeDocument/2006/math">
-                    <m:oMath>
-                      <m:sSub>
-                        <m:sSubPr>
-                          <m:ctrlPr>
-                            <a:rPr lang="en-US" i="1" dirty="0">
-                              <a:latin typeface="Cambria Math" panose="02040503050406030204" pitchFamily="18" charset="0"/>
-                            </a:rPr>
-                          </m:ctrlPr>
-                        </m:sSubPr>
-                        <m:e>
-                          <m:r>
-                            <a:rPr lang="en-US" i="1" dirty="0">
-                              <a:latin typeface="Cambria Math" panose="02040503050406030204" pitchFamily="18" charset="0"/>
-                            </a:rPr>
-                            <m:t>𝑓</m:t>
-                          </m:r>
-                        </m:e>
-                        <m:sub>
-                          <m:sSup>
-                            <m:sSupPr>
-                              <m:ctrlPr>
-                                <a:rPr lang="en-US" b="0" i="1" dirty="0" smtClean="0">
-                                  <a:latin typeface="Cambria Math" panose="02040503050406030204" pitchFamily="18" charset="0"/>
-                                </a:rPr>
-                              </m:ctrlPr>
-                            </m:sSupPr>
-                            <m:e>
-                              <m:r>
-                                <a:rPr lang="en-US" b="0" i="1" dirty="0" smtClean="0">
-                                  <a:latin typeface="Cambria Math" panose="02040503050406030204" pitchFamily="18" charset="0"/>
-                                </a:rPr>
-                                <m:t>𝜔</m:t>
-                              </m:r>
-                            </m:e>
-                            <m:sup>
-                              <m:r>
-                                <a:rPr lang="en-US" b="0" i="1" dirty="0" smtClean="0">
-                                  <a:latin typeface="Cambria Math" panose="02040503050406030204" pitchFamily="18" charset="0"/>
-                                </a:rPr>
-                                <m:t>∗</m:t>
-                              </m:r>
-                            </m:sup>
-                          </m:sSup>
-                        </m:sub>
-                      </m:sSub>
-                      <m:d>
-                        <m:dPr>
-                          <m:ctrlPr>
-                            <a:rPr lang="en-US" i="1" dirty="0">
-                              <a:latin typeface="Cambria Math" panose="02040503050406030204" pitchFamily="18" charset="0"/>
-                            </a:rPr>
-                          </m:ctrlPr>
-                        </m:dPr>
-                        <m:e>
-                          <m:r>
-                            <a:rPr lang="en-US" i="1" dirty="0">
-                              <a:latin typeface="Cambria Math" panose="02040503050406030204" pitchFamily="18" charset="0"/>
-                            </a:rPr>
-                            <m:t>𝑥</m:t>
-                          </m:r>
-                        </m:e>
-                      </m:d>
-                      <m:r>
-                        <a:rPr lang="en-US" i="1">
-                          <a:latin typeface="Cambria Math" panose="02040503050406030204" pitchFamily="18" charset="0"/>
-                        </a:rPr>
-                        <m:t>=</m:t>
-                      </m:r>
-                      <m:r>
-                        <a:rPr lang="en-US" i="1" smtClean="0">
-                          <a:solidFill>
-                            <a:srgbClr val="0033CC"/>
-                          </a:solidFill>
-                          <a:latin typeface="Cambria Math" panose="02040503050406030204" pitchFamily="18" charset="0"/>
-                        </a:rPr>
-                        <m:t>𝑝</m:t>
-                      </m:r>
-                      <m:d>
-                        <m:dPr>
-                          <m:ctrlPr>
-                            <a:rPr lang="en-US" i="1">
-                              <a:solidFill>
-                                <a:srgbClr val="0033CC"/>
-                              </a:solidFill>
-                              <a:latin typeface="Cambria Math" panose="02040503050406030204" pitchFamily="18" charset="0"/>
-                            </a:rPr>
-                          </m:ctrlPr>
-                        </m:dPr>
-                        <m:e>
-                          <m:r>
-                            <a:rPr lang="en-US" i="1">
-                              <a:solidFill>
-                                <a:srgbClr val="0033CC"/>
-                              </a:solidFill>
-                              <a:latin typeface="Cambria Math" panose="02040503050406030204" pitchFamily="18" charset="0"/>
-                            </a:rPr>
-                            <m:t>1</m:t>
-                          </m:r>
-                        </m:e>
-                        <m:e>
-                          <m:r>
-                            <a:rPr lang="en-US" b="0" i="1" smtClean="0">
-                              <a:solidFill>
-                                <a:srgbClr val="0033CC"/>
-                              </a:solidFill>
-                              <a:latin typeface="Cambria Math" panose="02040503050406030204" pitchFamily="18" charset="0"/>
-                            </a:rPr>
-                            <m:t> </m:t>
-                          </m:r>
-                          <m:r>
-                            <a:rPr lang="en-US" i="1">
-                              <a:solidFill>
-                                <a:srgbClr val="0033CC"/>
-                              </a:solidFill>
-                              <a:latin typeface="Cambria Math" panose="02040503050406030204" pitchFamily="18" charset="0"/>
-                            </a:rPr>
-                            <m:t>𝑥</m:t>
-                          </m:r>
-                        </m:e>
-                      </m:d>
-                      <m:r>
-                        <a:rPr lang="en-US" b="0" i="1" smtClean="0">
-                          <a:solidFill>
-                            <a:srgbClr val="0033CC"/>
-                          </a:solidFill>
-                          <a:latin typeface="Cambria Math" panose="02040503050406030204" pitchFamily="18" charset="0"/>
-                        </a:rPr>
-                        <m:t>=</m:t>
-                      </m:r>
-                      <m:f>
-                        <m:fPr>
-                          <m:ctrlPr>
-                            <a:rPr lang="en-US" b="0" i="1" smtClean="0">
-                              <a:solidFill>
-                                <a:srgbClr val="0033CC"/>
-                              </a:solidFill>
-                              <a:latin typeface="Cambria Math" panose="02040503050406030204" pitchFamily="18" charset="0"/>
-                            </a:rPr>
-                          </m:ctrlPr>
-                        </m:fPr>
-                        <m:num>
-                          <m:r>
-                            <a:rPr lang="en-US" b="0" i="1" smtClean="0">
-                              <a:solidFill>
-                                <a:srgbClr val="0033CC"/>
-                              </a:solidFill>
-                              <a:latin typeface="Cambria Math" panose="02040503050406030204" pitchFamily="18" charset="0"/>
-                            </a:rPr>
-                            <m:t>𝑝</m:t>
-                          </m:r>
-                          <m:d>
-                            <m:dPr>
-                              <m:ctrlPr>
-                                <a:rPr lang="en-US" b="0" i="1" smtClean="0">
-                                  <a:solidFill>
-                                    <a:srgbClr val="0033CC"/>
-                                  </a:solidFill>
-                                  <a:latin typeface="Cambria Math" panose="02040503050406030204" pitchFamily="18" charset="0"/>
-                                </a:rPr>
-                              </m:ctrlPr>
-                            </m:dPr>
-                            <m:e>
-                              <m:r>
-                                <a:rPr lang="en-US" b="0" i="1" smtClean="0">
-                                  <a:solidFill>
-                                    <a:srgbClr val="0033CC"/>
-                                  </a:solidFill>
-                                  <a:latin typeface="Cambria Math" panose="02040503050406030204" pitchFamily="18" charset="0"/>
-                                </a:rPr>
-                                <m:t>𝑥</m:t>
-                              </m:r>
-                              <m:r>
-                                <a:rPr lang="en-US" b="0" i="1" smtClean="0">
-                                  <a:solidFill>
-                                    <a:srgbClr val="0033CC"/>
-                                  </a:solidFill>
-                                  <a:latin typeface="Cambria Math" panose="02040503050406030204" pitchFamily="18" charset="0"/>
-                                </a:rPr>
-                                <m:t> </m:t>
-                              </m:r>
-                            </m:e>
-                            <m:e>
-                              <m:r>
-                                <a:rPr lang="en-US" b="0" i="1" smtClean="0">
-                                  <a:solidFill>
-                                    <a:srgbClr val="0033CC"/>
-                                  </a:solidFill>
-                                  <a:latin typeface="Cambria Math" panose="02040503050406030204" pitchFamily="18" charset="0"/>
-                                </a:rPr>
-                                <m:t> 1</m:t>
-                              </m:r>
-                            </m:e>
-                          </m:d>
-                          <m:r>
-                            <a:rPr lang="en-US" b="0" i="1" smtClean="0">
-                              <a:solidFill>
-                                <a:srgbClr val="0033CC"/>
-                              </a:solidFill>
-                              <a:latin typeface="Cambria Math" panose="02040503050406030204" pitchFamily="18" charset="0"/>
-                            </a:rPr>
-                            <m:t> </m:t>
-                          </m:r>
-                          <m:r>
-                            <a:rPr lang="en-US" b="0" i="1" smtClean="0">
-                              <a:solidFill>
-                                <a:srgbClr val="0033CC"/>
-                              </a:solidFill>
-                              <a:latin typeface="Cambria Math" panose="02040503050406030204" pitchFamily="18" charset="0"/>
-                            </a:rPr>
-                            <m:t>𝜋</m:t>
-                          </m:r>
-                          <m:r>
-                            <a:rPr lang="en-US" b="0" i="1" smtClean="0">
-                              <a:solidFill>
-                                <a:srgbClr val="0033CC"/>
-                              </a:solidFill>
-                              <a:latin typeface="Cambria Math" panose="02040503050406030204" pitchFamily="18" charset="0"/>
-                            </a:rPr>
-                            <m:t>(1)</m:t>
-                          </m:r>
-                        </m:num>
-                        <m:den>
-                          <m:r>
-                            <a:rPr lang="en-US" b="0" i="1" smtClean="0">
-                              <a:solidFill>
-                                <a:srgbClr val="0033CC"/>
-                              </a:solidFill>
-                              <a:latin typeface="Cambria Math" panose="02040503050406030204" pitchFamily="18" charset="0"/>
-                            </a:rPr>
-                            <m:t>𝑝</m:t>
-                          </m:r>
-                          <m:r>
-                            <a:rPr lang="en-US" b="0" i="1" smtClean="0">
-                              <a:solidFill>
-                                <a:srgbClr val="0033CC"/>
-                              </a:solidFill>
-                              <a:latin typeface="Cambria Math" panose="02040503050406030204" pitchFamily="18" charset="0"/>
-                            </a:rPr>
-                            <m:t>(</m:t>
-                          </m:r>
-                          <m:r>
-                            <a:rPr lang="en-US" b="0" i="1" smtClean="0">
-                              <a:solidFill>
-                                <a:srgbClr val="0033CC"/>
-                              </a:solidFill>
-                              <a:latin typeface="Cambria Math" panose="02040503050406030204" pitchFamily="18" charset="0"/>
-                            </a:rPr>
-                            <m:t>𝑥</m:t>
-                          </m:r>
-                          <m:r>
-                            <a:rPr lang="en-US" b="0" i="1" smtClean="0">
-                              <a:solidFill>
-                                <a:srgbClr val="0033CC"/>
-                              </a:solidFill>
-                              <a:latin typeface="Cambria Math" panose="02040503050406030204" pitchFamily="18" charset="0"/>
-                            </a:rPr>
-                            <m:t>)</m:t>
-                          </m:r>
-                        </m:den>
-                      </m:f>
-                    </m:oMath>
-                  </m:oMathPara>
-                </a14:m>
-                <a:br>
-                  <a:rPr lang="en-US" dirty="0">
-                    <a:effectLst>
-                      <a:outerShdw blurRad="38100" dist="38100" dir="2700000" algn="tl">
-                        <a:srgbClr val="DDDDDD"/>
-                      </a:outerShdw>
-                    </a:effectLst>
-                  </a:rPr>
-                </a:br>
-                <a:endParaRPr lang="en-US" dirty="0">
-                  <a:latin typeface="+mn-lt"/>
-                </a:endParaRPr>
-              </a:p>
-              <a:p>
-                <a:pPr marL="0" indent="0">
-                  <a:buNone/>
-                </a:pPr>
-                <a:r>
-                  <a:rPr lang="en-US" dirty="0">
-                    <a:latin typeface="+mn-lt"/>
-                  </a:rPr>
-                  <a:t>with </a:t>
-                </a:r>
-                <a14:m>
-                  <m:oMath xmlns:m="http://schemas.openxmlformats.org/officeDocument/2006/math">
-                    <m:r>
-                      <a:rPr lang="en-US" b="0" i="1" smtClean="0">
-                        <a:solidFill>
-                          <a:srgbClr val="0033CC"/>
-                        </a:solidFill>
-                        <a:latin typeface="Cambria Math" panose="02040503050406030204" pitchFamily="18" charset="0"/>
-                      </a:rPr>
-                      <m:t>𝑝</m:t>
-                    </m:r>
-                    <m:d>
-                      <m:dPr>
-                        <m:ctrlPr>
-                          <a:rPr lang="en-US" b="0" i="1" smtClean="0">
-                            <a:solidFill>
-                              <a:srgbClr val="0033CC"/>
-                            </a:solidFill>
-                            <a:latin typeface="Cambria Math" panose="02040503050406030204" pitchFamily="18" charset="0"/>
-                          </a:rPr>
-                        </m:ctrlPr>
-                      </m:dPr>
-                      <m:e>
-                        <m:r>
-                          <a:rPr lang="en-US" b="0" i="1" smtClean="0">
-                            <a:solidFill>
-                              <a:srgbClr val="0033CC"/>
-                            </a:solidFill>
-                            <a:latin typeface="Cambria Math" panose="02040503050406030204" pitchFamily="18" charset="0"/>
-                          </a:rPr>
-                          <m:t>𝑥</m:t>
-                        </m:r>
-                      </m:e>
-                    </m:d>
-                    <m:r>
-                      <a:rPr lang="en-US" b="0" i="1" smtClean="0">
-                        <a:solidFill>
-                          <a:srgbClr val="0033CC"/>
-                        </a:solidFill>
-                        <a:latin typeface="Cambria Math" panose="02040503050406030204" pitchFamily="18" charset="0"/>
-                      </a:rPr>
-                      <m:t>=</m:t>
-                    </m:r>
-                    <m:r>
-                      <a:rPr lang="en-US" i="1">
-                        <a:solidFill>
-                          <a:srgbClr val="0033CC"/>
-                        </a:solidFill>
-                        <a:latin typeface="Cambria Math" panose="02040503050406030204" pitchFamily="18" charset="0"/>
-                      </a:rPr>
-                      <m:t>𝑝</m:t>
-                    </m:r>
-                    <m:d>
-                      <m:dPr>
-                        <m:ctrlPr>
-                          <a:rPr lang="en-US" i="1">
-                            <a:solidFill>
-                              <a:srgbClr val="0033CC"/>
-                            </a:solidFill>
-                            <a:latin typeface="Cambria Math" panose="02040503050406030204" pitchFamily="18" charset="0"/>
-                          </a:rPr>
-                        </m:ctrlPr>
-                      </m:dPr>
-                      <m:e>
-                        <m:r>
-                          <a:rPr lang="en-US" i="1">
-                            <a:solidFill>
-                              <a:srgbClr val="0033CC"/>
-                            </a:solidFill>
-                            <a:latin typeface="Cambria Math" panose="02040503050406030204" pitchFamily="18" charset="0"/>
-                          </a:rPr>
-                          <m:t>𝑥</m:t>
-                        </m:r>
-                      </m:e>
-                      <m:e>
-                        <m:r>
-                          <a:rPr lang="en-US" i="1">
-                            <a:solidFill>
-                              <a:srgbClr val="0033CC"/>
-                            </a:solidFill>
-                            <a:latin typeface="Cambria Math" panose="02040503050406030204" pitchFamily="18" charset="0"/>
-                          </a:rPr>
-                          <m:t>1 </m:t>
-                        </m:r>
-                      </m:e>
-                    </m:d>
-                    <m:r>
-                      <a:rPr lang="en-US" i="1">
-                        <a:solidFill>
-                          <a:srgbClr val="0033CC"/>
-                        </a:solidFill>
-                        <a:latin typeface="Cambria Math" panose="02040503050406030204" pitchFamily="18" charset="0"/>
-                      </a:rPr>
-                      <m:t> </m:t>
-                    </m:r>
-                    <m:r>
-                      <a:rPr lang="en-US" i="1">
-                        <a:solidFill>
-                          <a:srgbClr val="0033CC"/>
-                        </a:solidFill>
-                        <a:latin typeface="Cambria Math" panose="02040503050406030204" pitchFamily="18" charset="0"/>
-                      </a:rPr>
-                      <m:t>𝜋</m:t>
-                    </m:r>
-                    <m:d>
-                      <m:dPr>
-                        <m:ctrlPr>
-                          <a:rPr lang="en-US" i="1">
-                            <a:solidFill>
-                              <a:srgbClr val="0033CC"/>
-                            </a:solidFill>
-                            <a:latin typeface="Cambria Math" panose="02040503050406030204" pitchFamily="18" charset="0"/>
-                          </a:rPr>
-                        </m:ctrlPr>
-                      </m:dPr>
-                      <m:e>
-                        <m:r>
-                          <a:rPr lang="en-US" i="1">
-                            <a:solidFill>
-                              <a:srgbClr val="0033CC"/>
-                            </a:solidFill>
-                            <a:latin typeface="Cambria Math" panose="02040503050406030204" pitchFamily="18" charset="0"/>
-                          </a:rPr>
-                          <m:t>1</m:t>
-                        </m:r>
-                      </m:e>
-                    </m:d>
-                    <m:r>
-                      <a:rPr lang="en-US" i="1">
-                        <a:solidFill>
-                          <a:srgbClr val="0033CC"/>
-                        </a:solidFill>
-                        <a:latin typeface="Cambria Math" panose="02040503050406030204" pitchFamily="18" charset="0"/>
-                      </a:rPr>
-                      <m:t>+</m:t>
-                    </m:r>
-                    <m:r>
-                      <a:rPr lang="en-US" i="1">
-                        <a:solidFill>
-                          <a:srgbClr val="0033CC"/>
-                        </a:solidFill>
-                        <a:latin typeface="Cambria Math" panose="02040503050406030204" pitchFamily="18" charset="0"/>
-                      </a:rPr>
-                      <m:t>𝑝</m:t>
-                    </m:r>
-                    <m:d>
-                      <m:dPr>
-                        <m:ctrlPr>
-                          <a:rPr lang="en-US" i="1">
-                            <a:solidFill>
-                              <a:srgbClr val="0033CC"/>
-                            </a:solidFill>
-                            <a:latin typeface="Cambria Math" panose="02040503050406030204" pitchFamily="18" charset="0"/>
-                          </a:rPr>
-                        </m:ctrlPr>
-                      </m:dPr>
-                      <m:e>
-                        <m:r>
-                          <a:rPr lang="en-US" i="1">
-                            <a:solidFill>
-                              <a:srgbClr val="0033CC"/>
-                            </a:solidFill>
-                            <a:latin typeface="Cambria Math" panose="02040503050406030204" pitchFamily="18" charset="0"/>
-                          </a:rPr>
-                          <m:t>𝑥</m:t>
-                        </m:r>
-                      </m:e>
-                      <m:e>
-                        <m:r>
-                          <a:rPr lang="en-US" i="1">
-                            <a:solidFill>
-                              <a:srgbClr val="0033CC"/>
-                            </a:solidFill>
-                            <a:latin typeface="Cambria Math" panose="02040503050406030204" pitchFamily="18" charset="0"/>
-                          </a:rPr>
-                          <m:t>0 </m:t>
-                        </m:r>
-                      </m:e>
-                    </m:d>
-                    <m:r>
-                      <a:rPr lang="en-US" i="1">
-                        <a:solidFill>
-                          <a:srgbClr val="0033CC"/>
-                        </a:solidFill>
-                        <a:latin typeface="Cambria Math" panose="02040503050406030204" pitchFamily="18" charset="0"/>
-                      </a:rPr>
-                      <m:t> </m:t>
-                    </m:r>
-                    <m:r>
-                      <a:rPr lang="en-US" i="1">
-                        <a:solidFill>
-                          <a:srgbClr val="0033CC"/>
-                        </a:solidFill>
-                        <a:latin typeface="Cambria Math" panose="02040503050406030204" pitchFamily="18" charset="0"/>
-                      </a:rPr>
-                      <m:t>𝜋</m:t>
-                    </m:r>
-                    <m:r>
-                      <a:rPr lang="en-US" i="1">
-                        <a:solidFill>
-                          <a:srgbClr val="0033CC"/>
-                        </a:solidFill>
-                        <a:latin typeface="Cambria Math" panose="02040503050406030204" pitchFamily="18" charset="0"/>
-                      </a:rPr>
-                      <m:t>(0)</m:t>
-                    </m:r>
-                  </m:oMath>
-                </a14:m>
-                <a:r>
-                  <a:rPr lang="en-US" dirty="0">
-                    <a:ea typeface="Cambria Math" panose="02040503050406030204" pitchFamily="18" charset="0"/>
-                  </a:rPr>
-                  <a:t>. </a:t>
-                </a:r>
-                <a:br>
-                  <a:rPr lang="en-US" dirty="0">
-                    <a:ea typeface="Cambria Math" panose="02040503050406030204" pitchFamily="18" charset="0"/>
-                  </a:rPr>
-                </a:br>
-                <a:endParaRPr lang="en-US" dirty="0">
-                  <a:effectLst>
-                    <a:outerShdw blurRad="38100" dist="38100" dir="2700000" algn="tl">
-                      <a:srgbClr val="DDDDDD"/>
-                    </a:outerShdw>
-                  </a:effectLst>
-                </a:endParaRPr>
-              </a:p>
-              <a:p>
-                <a:pPr lvl="1"/>
-                <a14:m>
-                  <m:oMath xmlns:m="http://schemas.openxmlformats.org/officeDocument/2006/math">
-                    <m:r>
-                      <a:rPr lang="en-US" i="1" smtClean="0">
-                        <a:solidFill>
-                          <a:srgbClr val="0033CC"/>
-                        </a:solidFill>
-                        <a:latin typeface="Cambria Math" panose="02040503050406030204" pitchFamily="18" charset="0"/>
-                      </a:rPr>
-                      <m:t>𝑝</m:t>
-                    </m:r>
-                    <m:d>
-                      <m:dPr>
-                        <m:ctrlPr>
-                          <a:rPr lang="en-US" i="1">
-                            <a:solidFill>
-                              <a:srgbClr val="0033CC"/>
-                            </a:solidFill>
-                            <a:latin typeface="Cambria Math" panose="02040503050406030204" pitchFamily="18" charset="0"/>
-                          </a:rPr>
-                        </m:ctrlPr>
-                      </m:dPr>
-                      <m:e>
-                        <m:r>
-                          <a:rPr lang="en-US" i="1">
-                            <a:solidFill>
-                              <a:srgbClr val="0033CC"/>
-                            </a:solidFill>
-                            <a:latin typeface="Cambria Math" panose="02040503050406030204" pitchFamily="18" charset="0"/>
-                          </a:rPr>
-                          <m:t>𝑥</m:t>
-                        </m:r>
-                        <m:r>
-                          <a:rPr lang="en-US" b="0" i="1" smtClean="0">
-                            <a:solidFill>
-                              <a:srgbClr val="0033CC"/>
-                            </a:solidFill>
-                            <a:latin typeface="Cambria Math" panose="02040503050406030204" pitchFamily="18" charset="0"/>
-                          </a:rPr>
-                          <m:t> </m:t>
-                        </m:r>
-                      </m:e>
-                      <m:e>
-                        <m:r>
-                          <a:rPr lang="en-US" b="0" i="1" smtClean="0">
-                            <a:solidFill>
-                              <a:srgbClr val="0033CC"/>
-                            </a:solidFill>
-                            <a:latin typeface="Cambria Math" panose="02040503050406030204" pitchFamily="18" charset="0"/>
-                          </a:rPr>
-                          <m:t> </m:t>
-                        </m:r>
-                        <m:r>
-                          <a:rPr lang="en-US" b="0" i="1" smtClean="0">
-                            <a:solidFill>
-                              <a:srgbClr val="0033CC"/>
-                            </a:solidFill>
-                            <a:latin typeface="Cambria Math" panose="02040503050406030204" pitchFamily="18" charset="0"/>
-                          </a:rPr>
-                          <m:t>𝑘</m:t>
-                        </m:r>
-                      </m:e>
-                    </m:d>
-                  </m:oMath>
-                </a14:m>
-                <a:r>
-                  <a:rPr lang="en-US" dirty="0">
-                    <a:effectLst>
-                      <a:outerShdw blurRad="38100" dist="38100" dir="2700000" algn="tl">
-                        <a:srgbClr val="DDDDDD"/>
-                      </a:outerShdw>
-                    </a:effectLst>
-                  </a:rPr>
-                  <a:t> is the probability density of </a:t>
-                </a:r>
-                <a14:m>
-                  <m:oMath xmlns:m="http://schemas.openxmlformats.org/officeDocument/2006/math">
-                    <m:r>
-                      <a:rPr lang="en-US" i="1">
-                        <a:solidFill>
-                          <a:srgbClr val="0033CC"/>
-                        </a:solidFill>
-                        <a:effectLst>
-                          <a:outerShdw blurRad="38100" dist="38100" dir="2700000" algn="tl">
-                            <a:srgbClr val="DDDDDD"/>
-                          </a:outerShdw>
-                        </a:effectLst>
-                        <a:latin typeface="Cambria Math" panose="02040503050406030204" pitchFamily="18" charset="0"/>
-                      </a:rPr>
-                      <m:t>𝑥</m:t>
-                    </m:r>
-                  </m:oMath>
-                </a14:m>
-                <a:r>
-                  <a:rPr lang="en-US" dirty="0">
-                    <a:effectLst>
-                      <a:outerShdw blurRad="38100" dist="38100" dir="2700000" algn="tl">
-                        <a:srgbClr val="DDDDDD"/>
-                      </a:outerShdw>
-                    </a:effectLst>
-                  </a:rPr>
-                  <a:t> for the class labeled  </a:t>
-                </a:r>
-                <a14:m>
-                  <m:oMath xmlns:m="http://schemas.openxmlformats.org/officeDocument/2006/math">
-                    <m:r>
-                      <a:rPr lang="en-US" i="1">
-                        <a:latin typeface="Cambria Math" panose="02040503050406030204" pitchFamily="18" charset="0"/>
-                      </a:rPr>
-                      <m:t>𝑦</m:t>
-                    </m:r>
-                    <m:r>
-                      <a:rPr lang="en-US" i="1">
-                        <a:latin typeface="Cambria Math" panose="02040503050406030204" pitchFamily="18" charset="0"/>
-                      </a:rPr>
-                      <m:t>=</m:t>
-                    </m:r>
-                    <m:r>
-                      <a:rPr lang="en-US" b="0" i="1" smtClean="0">
-                        <a:latin typeface="Cambria Math" panose="02040503050406030204" pitchFamily="18" charset="0"/>
-                      </a:rPr>
-                      <m:t>𝑘</m:t>
-                    </m:r>
-                  </m:oMath>
-                </a14:m>
-                <a:r>
-                  <a:rPr lang="en-US" dirty="0">
-                    <a:effectLst>
-                      <a:outerShdw blurRad="38100" dist="38100" dir="2700000" algn="tl">
-                        <a:srgbClr val="DDDDDD"/>
-                      </a:outerShdw>
-                    </a:effectLst>
-                  </a:rPr>
-                  <a:t>.</a:t>
-                </a:r>
-              </a:p>
-              <a:p>
-                <a:pPr lvl="1"/>
-                <a14:m>
-                  <m:oMath xmlns:m="http://schemas.openxmlformats.org/officeDocument/2006/math">
-                    <m:r>
-                      <a:rPr lang="en-US" b="0" i="1" smtClean="0">
-                        <a:solidFill>
-                          <a:srgbClr val="0033CC"/>
-                        </a:solidFill>
-                        <a:latin typeface="Cambria Math" panose="02040503050406030204" pitchFamily="18" charset="0"/>
-                      </a:rPr>
-                      <m:t>𝜋</m:t>
-                    </m:r>
-                    <m:r>
-                      <a:rPr lang="en-US" b="0" i="1" smtClean="0">
-                        <a:solidFill>
-                          <a:srgbClr val="0033CC"/>
-                        </a:solidFill>
-                        <a:latin typeface="Cambria Math" panose="02040503050406030204" pitchFamily="18" charset="0"/>
-                      </a:rPr>
-                      <m:t>(</m:t>
-                    </m:r>
-                    <m:r>
-                      <a:rPr lang="en-US" b="0" i="1" smtClean="0">
-                        <a:solidFill>
-                          <a:srgbClr val="0033CC"/>
-                        </a:solidFill>
-                        <a:latin typeface="Cambria Math" panose="02040503050406030204" pitchFamily="18" charset="0"/>
-                      </a:rPr>
-                      <m:t>𝑘</m:t>
-                    </m:r>
-                    <m:r>
-                      <a:rPr lang="en-US" b="0" i="1">
-                        <a:solidFill>
-                          <a:srgbClr val="0033CC"/>
-                        </a:solidFill>
-                        <a:latin typeface="Cambria Math" panose="02040503050406030204" pitchFamily="18" charset="0"/>
-                      </a:rPr>
-                      <m:t>)</m:t>
-                    </m:r>
-                  </m:oMath>
-                </a14:m>
-                <a:r>
-                  <a:rPr lang="en-US" dirty="0">
-                    <a:solidFill>
-                      <a:srgbClr val="0033CC"/>
-                    </a:solidFill>
-                    <a:effectLst>
-                      <a:outerShdw blurRad="38100" dist="38100" dir="2700000" algn="tl">
-                        <a:srgbClr val="DDDDDD"/>
-                      </a:outerShdw>
-                    </a:effectLst>
-                  </a:rPr>
-                  <a:t> </a:t>
-                </a:r>
-                <a:r>
-                  <a:rPr lang="en-US" dirty="0">
-                    <a:effectLst>
-                      <a:outerShdw blurRad="38100" dist="38100" dir="2700000" algn="tl">
-                        <a:srgbClr val="DDDDDD"/>
-                      </a:outerShdw>
-                    </a:effectLst>
-                  </a:rPr>
-                  <a:t>is the prior probability of the class labeled </a:t>
-                </a:r>
-                <a14:m>
-                  <m:oMath xmlns:m="http://schemas.openxmlformats.org/officeDocument/2006/math">
-                    <m:r>
-                      <a:rPr lang="en-US" i="1">
-                        <a:latin typeface="Cambria Math" panose="02040503050406030204" pitchFamily="18" charset="0"/>
-                      </a:rPr>
-                      <m:t>𝑦</m:t>
-                    </m:r>
-                    <m:r>
-                      <a:rPr lang="en-US" i="1">
-                        <a:latin typeface="Cambria Math" panose="02040503050406030204" pitchFamily="18" charset="0"/>
-                      </a:rPr>
-                      <m:t>=</m:t>
-                    </m:r>
-                    <m:r>
-                      <a:rPr lang="en-US" i="1">
-                        <a:latin typeface="Cambria Math" panose="02040503050406030204" pitchFamily="18" charset="0"/>
-                      </a:rPr>
-                      <m:t>𝑘</m:t>
-                    </m:r>
-                  </m:oMath>
-                </a14:m>
-                <a:r>
-                  <a:rPr lang="en-US" dirty="0">
-                    <a:effectLst>
-                      <a:outerShdw blurRad="38100" dist="38100" dir="2700000" algn="tl">
-                        <a:srgbClr val="DDDDDD"/>
-                      </a:outerShdw>
-                    </a:effectLst>
-                  </a:rPr>
-                  <a:t>.</a:t>
-                </a:r>
-              </a:p>
-              <a:p>
-                <a:pPr marL="457200" lvl="1" indent="0">
-                  <a:buNone/>
-                </a:pPr>
-                <a:endParaRPr lang="en-US" dirty="0">
-                  <a:effectLst>
-                    <a:outerShdw blurRad="38100" dist="38100" dir="2700000" algn="tl">
-                      <a:srgbClr val="DDDDDD"/>
-                    </a:outerShdw>
-                  </a:effectLst>
-                </a:endParaRPr>
-              </a:p>
-              <a:p>
-                <a:pPr marL="0" indent="0">
-                  <a:buNone/>
-                </a:pPr>
-                <a:r>
-                  <a:rPr lang="en-US" dirty="0">
-                    <a:effectLst>
-                      <a:outerShdw blurRad="38100" dist="38100" dir="2700000" algn="tl">
-                        <a:srgbClr val="DDDDDD"/>
-                      </a:outerShdw>
-                    </a:effectLst>
-                  </a:rPr>
-                  <a:t>Any model trained with binary cross entropy necessarily approximates </a:t>
-                </a:r>
-                <a14:m>
-                  <m:oMath xmlns:m="http://schemas.openxmlformats.org/officeDocument/2006/math">
-                    <m:r>
-                      <a:rPr lang="en-US" i="1">
-                        <a:solidFill>
-                          <a:srgbClr val="0033CC"/>
-                        </a:solidFill>
-                        <a:latin typeface="Cambria Math" panose="02040503050406030204" pitchFamily="18" charset="0"/>
-                      </a:rPr>
-                      <m:t>𝑝</m:t>
-                    </m:r>
-                    <m:d>
-                      <m:dPr>
-                        <m:ctrlPr>
-                          <a:rPr lang="en-US" i="1">
-                            <a:solidFill>
-                              <a:srgbClr val="0033CC"/>
-                            </a:solidFill>
-                            <a:latin typeface="Cambria Math" panose="02040503050406030204" pitchFamily="18" charset="0"/>
-                          </a:rPr>
-                        </m:ctrlPr>
-                      </m:dPr>
-                      <m:e>
-                        <m:r>
-                          <a:rPr lang="en-US" i="1">
-                            <a:solidFill>
-                              <a:srgbClr val="0033CC"/>
-                            </a:solidFill>
-                            <a:latin typeface="Cambria Math" panose="02040503050406030204" pitchFamily="18" charset="0"/>
-                          </a:rPr>
-                          <m:t>1</m:t>
-                        </m:r>
-                        <m:r>
-                          <a:rPr lang="en-US" b="0" i="1" smtClean="0">
-                            <a:solidFill>
-                              <a:srgbClr val="0033CC"/>
-                            </a:solidFill>
-                            <a:latin typeface="Cambria Math" panose="02040503050406030204" pitchFamily="18" charset="0"/>
-                          </a:rPr>
-                          <m:t> </m:t>
-                        </m:r>
-                      </m:e>
-                      <m:e>
-                        <m:r>
-                          <a:rPr lang="en-US" i="1">
-                            <a:solidFill>
-                              <a:srgbClr val="0033CC"/>
-                            </a:solidFill>
-                            <a:latin typeface="Cambria Math" panose="02040503050406030204" pitchFamily="18" charset="0"/>
-                          </a:rPr>
-                          <m:t> </m:t>
-                        </m:r>
-                        <m:r>
-                          <a:rPr lang="en-US" i="1">
-                            <a:solidFill>
-                              <a:srgbClr val="0033CC"/>
-                            </a:solidFill>
-                            <a:latin typeface="Cambria Math" panose="02040503050406030204" pitchFamily="18" charset="0"/>
-                          </a:rPr>
-                          <m:t>𝑥</m:t>
-                        </m:r>
-                      </m:e>
-                    </m:d>
-                  </m:oMath>
-                </a14:m>
-                <a:r>
-                  <a:rPr lang="en-US" dirty="0">
-                    <a:effectLst>
-                      <a:outerShdw blurRad="38100" dist="38100" dir="2700000" algn="tl">
-                        <a:srgbClr val="DDDDDD"/>
-                      </a:outerShdw>
-                    </a:effectLst>
-                  </a:rPr>
-                  <a:t>. </a:t>
-                </a:r>
-              </a:p>
-              <a:p>
-                <a:pPr marL="0" indent="0">
-                  <a:buNone/>
-                </a:pPr>
-                <a:endParaRPr lang="en-US" dirty="0"/>
-              </a:p>
-              <a:p>
-                <a:pPr marL="0" indent="0">
-                  <a:buNone/>
-                </a:pPr>
-                <a:endParaRPr lang="en-US" dirty="0"/>
-              </a:p>
-            </p:txBody>
-          </p:sp>
-        </mc:Choice>
-        <mc:Fallback>
-          <p:sp>
-            <p:nvSpPr>
-              <p:cNvPr id="4" name="Content Placeholder 3">
-                <a:extLst>
-                  <a:ext uri="{FF2B5EF4-FFF2-40B4-BE49-F238E27FC236}">
-                    <a16:creationId xmlns:a16="http://schemas.microsoft.com/office/drawing/2014/main" id="{CA5FF234-6F7F-A2E8-4C2B-8C41E7CF3A52}"/>
-                  </a:ext>
-                </a:extLst>
-              </p:cNvPr>
-              <p:cNvSpPr>
-                <a:spLocks noGrp="1" noRot="1" noChangeAspect="1" noMove="1" noResize="1" noEditPoints="1" noAdjustHandles="1" noChangeArrowheads="1" noChangeShapeType="1" noTextEdit="1"/>
-              </p:cNvSpPr>
-              <p:nvPr>
-                <p:ph sz="half" idx="1"/>
-              </p:nvPr>
-            </p:nvSpPr>
-            <p:spPr>
-              <a:blipFill>
-                <a:blip r:embed="rId2"/>
-                <a:stretch>
-                  <a:fillRect l="-1309" t="-1316" r="-327"/>
-                </a:stretch>
-              </a:blipFill>
-            </p:spPr>
-            <p:txBody>
-              <a:bodyPr/>
-              <a:lstStyle/>
-              <a:p>
-                <a:r>
-                  <a:rPr lang="en-US">
-                    <a:noFill/>
-                  </a:rPr>
-                  <a:t> </a:t>
-                </a:r>
-              </a:p>
-            </p:txBody>
-          </p:sp>
-        </mc:Fallback>
-      </mc:AlternateContent>
-      <p:sp>
-        <p:nvSpPr>
-          <p:cNvPr id="3" name="Title 2">
-            <a:extLst>
-              <a:ext uri="{FF2B5EF4-FFF2-40B4-BE49-F238E27FC236}">
-                <a16:creationId xmlns:a16="http://schemas.microsoft.com/office/drawing/2014/main" id="{32840FCC-D5A4-4372-6695-0E20A32EC113}"/>
-              </a:ext>
-            </a:extLst>
-          </p:cNvPr>
-          <p:cNvSpPr>
-            <a:spLocks noGrp="1"/>
-          </p:cNvSpPr>
-          <p:nvPr>
-            <p:ph type="title"/>
-          </p:nvPr>
-        </p:nvSpPr>
-        <p:spPr/>
-        <p:txBody>
-          <a:bodyPr/>
-          <a:lstStyle/>
-          <a:p>
-            <a:r>
-              <a:rPr lang="en-US" dirty="0"/>
-              <a:t>Binary Cross Entropy Loss (2)</a:t>
-            </a:r>
-          </a:p>
-        </p:txBody>
-      </p:sp>
-    </p:spTree>
-    <p:extLst>
-      <p:ext uri="{BB962C8B-B14F-4D97-AF65-F5344CB8AC3E}">
-        <p14:creationId xmlns:p14="http://schemas.microsoft.com/office/powerpoint/2010/main" val="3757646305"/>
-      </p:ext>
-    </p:extLst>
-  </p:cSld>
-  <p:clrMapOvr>
-    <a:masterClrMapping/>
-  </p:clrMapOvr>
-  <p:timing>
-    <p:tnLst>
-      <p:par>
-        <p:cTn id="1" dur="indefinite" restart="never" nodeType="tmRoot">
-          <p:childTnLst>
-            <p:seq concurrent="1" nextAc="seek">
-              <p:cTn id="2" dur="indefinite" nodeType="mainSeq">
-                <p:childTnLst>
-                  <p:par>
-                    <p:cTn id="3" fill="hold">
-                      <p:stCondLst>
-                        <p:cond delay="indefinite"/>
-                      </p:stCondLst>
-                      <p:childTnLst>
-                        <p:par>
-                          <p:cTn id="4" fill="hold">
-                            <p:stCondLst>
-                              <p:cond delay="0"/>
-                            </p:stCondLst>
-                            <p:childTnLst>
-                              <p:par>
-                                <p:cTn id="5" presetID="1" presetClass="entr" presetSubtype="0" fill="hold" nodeType="clickEffect">
-                                  <p:stCondLst>
-                                    <p:cond delay="0"/>
-                                  </p:stCondLst>
-                                  <p:childTnLst>
-                                    <p:set>
-                                      <p:cBhvr>
-                                        <p:cTn id="6" dur="1" fill="hold">
-                                          <p:stCondLst>
-                                            <p:cond delay="0"/>
-                                          </p:stCondLst>
-                                        </p:cTn>
-                                        <p:tgtEl>
-                                          <p:spTgt spid="4">
-                                            <p:txEl>
-                                              <p:pRg st="6" end="6"/>
-                                            </p:txEl>
-                                          </p:spTgt>
-                                        </p:tgtEl>
-                                        <p:attrNameLst>
-                                          <p:attrName>style.visibility</p:attrName>
-                                        </p:attrNameLst>
-                                      </p:cBhvr>
-                                      <p:to>
-                                        <p:strVal val="visible"/>
-                                      </p:to>
-                                    </p:set>
-                                  </p:childTnLst>
-                                </p:cTn>
-                              </p:par>
-                            </p:childTnLst>
-                          </p:cTn>
-                        </p:par>
-                      </p:childTnLst>
-                    </p:cTn>
-                  </p:par>
-                </p:childTnLst>
-              </p:cTn>
-              <p:prevCondLst>
-                <p:cond evt="onPrev" delay="0">
-                  <p:tgtEl>
-                    <p:sldTgt/>
-                  </p:tgtEl>
-                </p:cond>
-              </p:prevCondLst>
-              <p:nextCondLst>
-                <p:cond evt="onNext" delay="0">
-                  <p:tgtEl>
-                    <p:sldTgt/>
-                  </p:tgtEl>
-                </p:cond>
-              </p:nextCondLst>
-            </p:seq>
-          </p:childTnLst>
-        </p:cTn>
-      </p:par>
-    </p:tnLst>
-  </p:timing>
-</p:sld>
-</file>
-
-<file path=ppt/slides/slide9.xml><?xml version="1.0" encoding="utf-8"?>
 <p:sld xmlns:a="http://schemas.openxmlformats.org/drawingml/2006/main" xmlns:r="http://schemas.openxmlformats.org/officeDocument/2006/relationships" xmlns:p="http://schemas.openxmlformats.org/presentationml/2006/main">
   <p:cSld>
     <p:spTree>
@@ -24525,6 +23282,72 @@
       </p:par>
     </p:tnLst>
   </p:timing>
+</p:sld>
+</file>
+
+<file path=ppt/slides/slide9.xml><?xml version="1.0" encoding="utf-8"?>
+<p:sld xmlns:a="http://schemas.openxmlformats.org/drawingml/2006/main" xmlns:r="http://schemas.openxmlformats.org/officeDocument/2006/relationships" xmlns:p="http://schemas.openxmlformats.org/presentationml/2006/main">
+  <p:cSld>
+    <p:spTree>
+      <p:nvGrpSpPr>
+        <p:cNvPr id="1" name="">
+          <a:extLst>
+            <a:ext uri="{FF2B5EF4-FFF2-40B4-BE49-F238E27FC236}">
+              <a16:creationId xmlns:a16="http://schemas.microsoft.com/office/drawing/2014/main" id="{61ECB4C0-80C8-07F9-C349-10ACCC49952E}"/>
+            </a:ext>
+          </a:extLst>
+        </p:cNvPr>
+        <p:cNvGrpSpPr/>
+        <p:nvPr/>
+      </p:nvGrpSpPr>
+      <p:grpSpPr>
+        <a:xfrm>
+          <a:off x="0" y="0"/>
+          <a:ext cx="0" cy="0"/>
+          <a:chOff x="0" y="0"/>
+          <a:chExt cx="0" cy="0"/>
+        </a:xfrm>
+      </p:grpSpPr>
+      <p:pic>
+        <p:nvPicPr>
+          <p:cNvPr id="11" name="Picture 10">
+            <a:extLst>
+              <a:ext uri="{FF2B5EF4-FFF2-40B4-BE49-F238E27FC236}">
+                <a16:creationId xmlns:a16="http://schemas.microsoft.com/office/drawing/2014/main" id="{351E33F5-BBCF-6CD6-6E9E-6FD680B452EB}"/>
+              </a:ext>
+            </a:extLst>
+          </p:cNvPr>
+          <p:cNvPicPr>
+            <a:picLocks noChangeAspect="1"/>
+          </p:cNvPicPr>
+          <p:nvPr/>
+        </p:nvPicPr>
+        <p:blipFill>
+          <a:blip r:embed="rId2"/>
+          <a:stretch>
+            <a:fillRect/>
+          </a:stretch>
+        </p:blipFill>
+        <p:spPr>
+          <a:xfrm>
+            <a:off x="946150" y="457200"/>
+            <a:ext cx="7251700" cy="5791200"/>
+          </a:xfrm>
+          <a:prstGeom prst="rect">
+            <a:avLst/>
+          </a:prstGeom>
+        </p:spPr>
+      </p:pic>
+    </p:spTree>
+    <p:extLst>
+      <p:ext uri="{BB962C8B-B14F-4D97-AF65-F5344CB8AC3E}">
+        <p14:creationId xmlns:p14="http://schemas.microsoft.com/office/powerpoint/2010/main" val="782288326"/>
+      </p:ext>
+    </p:extLst>
+  </p:cSld>
+  <p:clrMapOvr>
+    <a:masterClrMapping/>
+  </p:clrMapOvr>
 </p:sld>
 </file>
 
